--- a/Python/Lesson 03 - Functions/Lesson 03 - Functions.pptx
+++ b/Python/Lesson 03 - Functions/Lesson 03 - Functions.pptx
@@ -5,20 +5,47 @@
     <p:sldMasterId id="2147483684" r:id="rId1"/>
   </p:sldMasterIdLst>
   <p:notesMasterIdLst>
-    <p:notesMasterId r:id="rId3"/>
+    <p:notesMasterId r:id="rId30"/>
   </p:notesMasterIdLst>
   <p:sldIdLst>
     <p:sldId id="256" r:id="rId2"/>
+    <p:sldId id="488" r:id="rId3"/>
+    <p:sldId id="489" r:id="rId4"/>
+    <p:sldId id="486" r:id="rId5"/>
+    <p:sldId id="491" r:id="rId6"/>
+    <p:sldId id="257" r:id="rId7"/>
+    <p:sldId id="490" r:id="rId8"/>
+    <p:sldId id="492" r:id="rId9"/>
+    <p:sldId id="419" r:id="rId10"/>
+    <p:sldId id="493" r:id="rId11"/>
+    <p:sldId id="500" r:id="rId12"/>
+    <p:sldId id="494" r:id="rId13"/>
+    <p:sldId id="405" r:id="rId14"/>
+    <p:sldId id="495" r:id="rId15"/>
+    <p:sldId id="496" r:id="rId16"/>
+    <p:sldId id="424" r:id="rId17"/>
+    <p:sldId id="498" r:id="rId18"/>
+    <p:sldId id="499" r:id="rId19"/>
+    <p:sldId id="433" r:id="rId20"/>
+    <p:sldId id="501" r:id="rId21"/>
+    <p:sldId id="477" r:id="rId22"/>
+    <p:sldId id="462" r:id="rId23"/>
+    <p:sldId id="465" r:id="rId24"/>
+    <p:sldId id="484" r:id="rId25"/>
+    <p:sldId id="481" r:id="rId26"/>
+    <p:sldId id="482" r:id="rId27"/>
+    <p:sldId id="282" r:id="rId28"/>
+    <p:sldId id="476" r:id="rId29"/>
   </p:sldIdLst>
   <p:sldSz cx="9144000" cy="5143500" type="screen16x9"/>
   <p:notesSz cx="6858000" cy="9144000"/>
   <p:embeddedFontLst>
     <p:embeddedFont>
       <p:font typeface="Roboto" panose="02000000000000000000" pitchFamily="2" charset="0"/>
-      <p:regular r:id="rId4"/>
-      <p:bold r:id="rId5"/>
-      <p:italic r:id="rId6"/>
-      <p:boldItalic r:id="rId7"/>
+      <p:regular r:id="rId31"/>
+      <p:bold r:id="rId32"/>
+      <p:italic r:id="rId33"/>
+      <p:boldItalic r:id="rId34"/>
     </p:embeddedFont>
   </p:embeddedFontLst>
   <p:defaultTextStyle>
@@ -970,6 +997,2900 @@
 </p:notes>
 </file>
 
+<file path=ppt/notesSlides/notesSlide10.xml><?xml version="1.0" encoding="utf-8"?>
+<p:notes xmlns:a="http://schemas.openxmlformats.org/drawingml/2006/main" xmlns:r="http://schemas.openxmlformats.org/officeDocument/2006/relationships" xmlns:p="http://schemas.openxmlformats.org/presentationml/2006/main">
+  <p:cSld>
+    <p:spTree>
+      <p:nvGrpSpPr>
+        <p:cNvPr id="1" name="">
+          <a:extLst>
+            <a:ext uri="{FF2B5EF4-FFF2-40B4-BE49-F238E27FC236}">
+              <a16:creationId xmlns:a16="http://schemas.microsoft.com/office/drawing/2014/main" id="{9DEC4BE3-0F40-FA3E-2098-6387168E0984}"/>
+            </a:ext>
+          </a:extLst>
+        </p:cNvPr>
+        <p:cNvGrpSpPr/>
+        <p:nvPr/>
+      </p:nvGrpSpPr>
+      <p:grpSpPr>
+        <a:xfrm>
+          <a:off x="0" y="0"/>
+          <a:ext cx="0" cy="0"/>
+          <a:chOff x="0" y="0"/>
+          <a:chExt cx="0" cy="0"/>
+        </a:xfrm>
+      </p:grpSpPr>
+      <p:sp>
+        <p:nvSpPr>
+          <p:cNvPr id="2" name="Slide Image Placeholder 1">
+            <a:extLst>
+              <a:ext uri="{FF2B5EF4-FFF2-40B4-BE49-F238E27FC236}">
+                <a16:creationId xmlns:a16="http://schemas.microsoft.com/office/drawing/2014/main" id="{359FCB48-5F83-68A1-A1E3-56D993AEC07D}"/>
+              </a:ext>
+            </a:extLst>
+          </p:cNvPr>
+          <p:cNvSpPr>
+            <a:spLocks noGrp="1" noRot="1" noChangeAspect="1"/>
+          </p:cNvSpPr>
+          <p:nvPr>
+            <p:ph type="sldImg"/>
+          </p:nvPr>
+        </p:nvSpPr>
+        <p:spPr>
+          <a:xfrm>
+            <a:off x="381000" y="685800"/>
+            <a:ext cx="6096000" cy="3429000"/>
+          </a:xfrm>
+        </p:spPr>
+      </p:sp>
+      <p:sp>
+        <p:nvSpPr>
+          <p:cNvPr id="3" name="Notes Placeholder 2">
+            <a:extLst>
+              <a:ext uri="{FF2B5EF4-FFF2-40B4-BE49-F238E27FC236}">
+                <a16:creationId xmlns:a16="http://schemas.microsoft.com/office/drawing/2014/main" id="{995B53DF-E7CF-FD26-8EF5-487B9DB6D706}"/>
+              </a:ext>
+            </a:extLst>
+          </p:cNvPr>
+          <p:cNvSpPr>
+            <a:spLocks noGrp="1"/>
+          </p:cNvSpPr>
+          <p:nvPr>
+            <p:ph type="body" idx="1"/>
+          </p:nvPr>
+        </p:nvSpPr>
+        <p:spPr/>
+        <p:txBody>
+          <a:bodyPr>
+            <a:normAutofit/>
+          </a:bodyPr>
+          <a:lstStyle/>
+          <a:p>
+            <a:endParaRPr lang="en-US" dirty="0"/>
+          </a:p>
+        </p:txBody>
+      </p:sp>
+      <p:sp>
+        <p:nvSpPr>
+          <p:cNvPr id="4" name="Slide Number Placeholder 3">
+            <a:extLst>
+              <a:ext uri="{FF2B5EF4-FFF2-40B4-BE49-F238E27FC236}">
+                <a16:creationId xmlns:a16="http://schemas.microsoft.com/office/drawing/2014/main" id="{926AEABA-6ABD-0AA2-2729-1ECCBBDDCD06}"/>
+              </a:ext>
+            </a:extLst>
+          </p:cNvPr>
+          <p:cNvSpPr>
+            <a:spLocks noGrp="1"/>
+          </p:cNvSpPr>
+          <p:nvPr>
+            <p:ph type="sldNum" sz="quarter" idx="5"/>
+          </p:nvPr>
+        </p:nvSpPr>
+        <p:spPr/>
+        <p:txBody>
+          <a:bodyPr/>
+          <a:lstStyle/>
+          <a:p>
+            <a:pPr>
+              <a:defRPr/>
+            </a:pPr>
+            <a:fld id="{18B4ECCA-5441-478E-8672-6AB21BB71BD9}" type="slidenum">
+              <a:rPr lang="en-US" altLang="en-US" smtClean="0"/>
+              <a:pPr>
+                <a:defRPr/>
+              </a:pPr>
+              <a:t>10</a:t>
+            </a:fld>
+            <a:endParaRPr lang="en-US" altLang="en-US"/>
+          </a:p>
+        </p:txBody>
+      </p:sp>
+    </p:spTree>
+    <p:extLst>
+      <p:ext uri="{BB962C8B-B14F-4D97-AF65-F5344CB8AC3E}">
+        <p14:creationId xmlns:p14="http://schemas.microsoft.com/office/powerpoint/2010/main" val="2057766567"/>
+      </p:ext>
+    </p:extLst>
+  </p:cSld>
+  <p:clrMapOvr>
+    <a:masterClrMapping/>
+  </p:clrMapOvr>
+</p:notes>
+</file>
+
+<file path=ppt/notesSlides/notesSlide11.xml><?xml version="1.0" encoding="utf-8"?>
+<p:notes xmlns:a="http://schemas.openxmlformats.org/drawingml/2006/main" xmlns:r="http://schemas.openxmlformats.org/officeDocument/2006/relationships" xmlns:p="http://schemas.openxmlformats.org/presentationml/2006/main">
+  <p:cSld>
+    <p:spTree>
+      <p:nvGrpSpPr>
+        <p:cNvPr id="1" name="">
+          <a:extLst>
+            <a:ext uri="{FF2B5EF4-FFF2-40B4-BE49-F238E27FC236}">
+              <a16:creationId xmlns:a16="http://schemas.microsoft.com/office/drawing/2014/main" id="{DFA44AA2-3DEE-6F66-ED7C-03931BE3B4A4}"/>
+            </a:ext>
+          </a:extLst>
+        </p:cNvPr>
+        <p:cNvGrpSpPr/>
+        <p:nvPr/>
+      </p:nvGrpSpPr>
+      <p:grpSpPr>
+        <a:xfrm>
+          <a:off x="0" y="0"/>
+          <a:ext cx="0" cy="0"/>
+          <a:chOff x="0" y="0"/>
+          <a:chExt cx="0" cy="0"/>
+        </a:xfrm>
+      </p:grpSpPr>
+      <p:sp>
+        <p:nvSpPr>
+          <p:cNvPr id="2" name="Slide Image Placeholder 1">
+            <a:extLst>
+              <a:ext uri="{FF2B5EF4-FFF2-40B4-BE49-F238E27FC236}">
+                <a16:creationId xmlns:a16="http://schemas.microsoft.com/office/drawing/2014/main" id="{FE4F032E-9D18-BD08-8827-A3299DEEA2E9}"/>
+              </a:ext>
+            </a:extLst>
+          </p:cNvPr>
+          <p:cNvSpPr>
+            <a:spLocks noGrp="1" noRot="1" noChangeAspect="1"/>
+          </p:cNvSpPr>
+          <p:nvPr>
+            <p:ph type="sldImg"/>
+          </p:nvPr>
+        </p:nvSpPr>
+        <p:spPr>
+          <a:xfrm>
+            <a:off x="381000" y="685800"/>
+            <a:ext cx="6096000" cy="3429000"/>
+          </a:xfrm>
+        </p:spPr>
+      </p:sp>
+      <p:sp>
+        <p:nvSpPr>
+          <p:cNvPr id="3" name="Notes Placeholder 2">
+            <a:extLst>
+              <a:ext uri="{FF2B5EF4-FFF2-40B4-BE49-F238E27FC236}">
+                <a16:creationId xmlns:a16="http://schemas.microsoft.com/office/drawing/2014/main" id="{B403149A-3EB3-8136-C82D-F54F508C7C49}"/>
+              </a:ext>
+            </a:extLst>
+          </p:cNvPr>
+          <p:cNvSpPr>
+            <a:spLocks noGrp="1"/>
+          </p:cNvSpPr>
+          <p:nvPr>
+            <p:ph type="body" idx="1"/>
+          </p:nvPr>
+        </p:nvSpPr>
+        <p:spPr/>
+        <p:txBody>
+          <a:bodyPr>
+            <a:normAutofit/>
+          </a:bodyPr>
+          <a:lstStyle/>
+          <a:p>
+            <a:pPr marL="0" marR="0" lvl="0" indent="0" algn="l" defTabSz="914400" rtl="0" eaLnBrk="1" fontAlgn="auto" latinLnBrk="0" hangingPunct="1">
+              <a:lnSpc>
+                <a:spcPct val="100000"/>
+              </a:lnSpc>
+              <a:spcBef>
+                <a:spcPts val="0"/>
+              </a:spcBef>
+              <a:spcAft>
+                <a:spcPts val="0"/>
+              </a:spcAft>
+              <a:buClrTx/>
+              <a:buSzTx/>
+              <a:buFontTx/>
+              <a:buNone/>
+              <a:tabLst/>
+              <a:defRPr/>
+            </a:pPr>
+            <a:r>
+              <a:rPr lang="en-US" dirty="0"/>
+              <a:t>GLOBAL MODULE INDEX</a:t>
+            </a:r>
+          </a:p>
+          <a:p>
+            <a:endParaRPr lang="en-US" dirty="0"/>
+          </a:p>
+        </p:txBody>
+      </p:sp>
+      <p:sp>
+        <p:nvSpPr>
+          <p:cNvPr id="4" name="Slide Number Placeholder 3">
+            <a:extLst>
+              <a:ext uri="{FF2B5EF4-FFF2-40B4-BE49-F238E27FC236}">
+                <a16:creationId xmlns:a16="http://schemas.microsoft.com/office/drawing/2014/main" id="{B0389EB9-C118-1EB9-5630-2E8ACB23AFBA}"/>
+              </a:ext>
+            </a:extLst>
+          </p:cNvPr>
+          <p:cNvSpPr>
+            <a:spLocks noGrp="1"/>
+          </p:cNvSpPr>
+          <p:nvPr>
+            <p:ph type="sldNum" sz="quarter" idx="5"/>
+          </p:nvPr>
+        </p:nvSpPr>
+        <p:spPr/>
+        <p:txBody>
+          <a:bodyPr/>
+          <a:lstStyle/>
+          <a:p>
+            <a:pPr>
+              <a:defRPr/>
+            </a:pPr>
+            <a:fld id="{18B4ECCA-5441-478E-8672-6AB21BB71BD9}" type="slidenum">
+              <a:rPr lang="en-US" altLang="en-US" smtClean="0"/>
+              <a:pPr>
+                <a:defRPr/>
+              </a:pPr>
+              <a:t>11</a:t>
+            </a:fld>
+            <a:endParaRPr lang="en-US" altLang="en-US"/>
+          </a:p>
+        </p:txBody>
+      </p:sp>
+    </p:spTree>
+    <p:extLst>
+      <p:ext uri="{BB962C8B-B14F-4D97-AF65-F5344CB8AC3E}">
+        <p14:creationId xmlns:p14="http://schemas.microsoft.com/office/powerpoint/2010/main" val="2790307212"/>
+      </p:ext>
+    </p:extLst>
+  </p:cSld>
+  <p:clrMapOvr>
+    <a:masterClrMapping/>
+  </p:clrMapOvr>
+</p:notes>
+</file>
+
+<file path=ppt/notesSlides/notesSlide12.xml><?xml version="1.0" encoding="utf-8"?>
+<p:notes xmlns:a="http://schemas.openxmlformats.org/drawingml/2006/main" xmlns:r="http://schemas.openxmlformats.org/officeDocument/2006/relationships" xmlns:p="http://schemas.openxmlformats.org/presentationml/2006/main">
+  <p:cSld>
+    <p:spTree>
+      <p:nvGrpSpPr>
+        <p:cNvPr id="1" name="">
+          <a:extLst>
+            <a:ext uri="{FF2B5EF4-FFF2-40B4-BE49-F238E27FC236}">
+              <a16:creationId xmlns:a16="http://schemas.microsoft.com/office/drawing/2014/main" id="{5925313C-DB9F-349B-86EC-B0F9BF09803E}"/>
+            </a:ext>
+          </a:extLst>
+        </p:cNvPr>
+        <p:cNvGrpSpPr/>
+        <p:nvPr/>
+      </p:nvGrpSpPr>
+      <p:grpSpPr>
+        <a:xfrm>
+          <a:off x="0" y="0"/>
+          <a:ext cx="0" cy="0"/>
+          <a:chOff x="0" y="0"/>
+          <a:chExt cx="0" cy="0"/>
+        </a:xfrm>
+      </p:grpSpPr>
+      <p:sp>
+        <p:nvSpPr>
+          <p:cNvPr id="2" name="Slide Image Placeholder 1">
+            <a:extLst>
+              <a:ext uri="{FF2B5EF4-FFF2-40B4-BE49-F238E27FC236}">
+                <a16:creationId xmlns:a16="http://schemas.microsoft.com/office/drawing/2014/main" id="{2014B599-D64F-E154-9D1B-F78ABC518542}"/>
+              </a:ext>
+            </a:extLst>
+          </p:cNvPr>
+          <p:cNvSpPr>
+            <a:spLocks noGrp="1" noRot="1" noChangeAspect="1"/>
+          </p:cNvSpPr>
+          <p:nvPr>
+            <p:ph type="sldImg"/>
+          </p:nvPr>
+        </p:nvSpPr>
+        <p:spPr>
+          <a:xfrm>
+            <a:off x="381000" y="685800"/>
+            <a:ext cx="6096000" cy="3429000"/>
+          </a:xfrm>
+        </p:spPr>
+      </p:sp>
+      <p:sp>
+        <p:nvSpPr>
+          <p:cNvPr id="3" name="Notes Placeholder 2">
+            <a:extLst>
+              <a:ext uri="{FF2B5EF4-FFF2-40B4-BE49-F238E27FC236}">
+                <a16:creationId xmlns:a16="http://schemas.microsoft.com/office/drawing/2014/main" id="{182F4977-3198-2C2E-77EA-F0967B550F92}"/>
+              </a:ext>
+            </a:extLst>
+          </p:cNvPr>
+          <p:cNvSpPr>
+            <a:spLocks noGrp="1"/>
+          </p:cNvSpPr>
+          <p:nvPr>
+            <p:ph type="body" idx="1"/>
+          </p:nvPr>
+        </p:nvSpPr>
+        <p:spPr/>
+        <p:txBody>
+          <a:bodyPr>
+            <a:normAutofit/>
+          </a:bodyPr>
+          <a:lstStyle/>
+          <a:p>
+            <a:pPr marL="0" marR="0" lvl="0" indent="0" algn="l" defTabSz="914400" rtl="0" eaLnBrk="1" fontAlgn="auto" latinLnBrk="0" hangingPunct="1">
+              <a:lnSpc>
+                <a:spcPct val="100000"/>
+              </a:lnSpc>
+              <a:spcBef>
+                <a:spcPts val="0"/>
+              </a:spcBef>
+              <a:spcAft>
+                <a:spcPts val="0"/>
+              </a:spcAft>
+              <a:buClrTx/>
+              <a:buSzTx/>
+              <a:buFontTx/>
+              <a:buNone/>
+              <a:tabLst/>
+              <a:defRPr/>
+            </a:pPr>
+            <a:r>
+              <a:rPr lang="en-US" dirty="0"/>
+              <a:t>GLOBAL MODULE INDEX</a:t>
+            </a:r>
+          </a:p>
+          <a:p>
+            <a:endParaRPr lang="en-US" dirty="0"/>
+          </a:p>
+        </p:txBody>
+      </p:sp>
+      <p:sp>
+        <p:nvSpPr>
+          <p:cNvPr id="4" name="Slide Number Placeholder 3">
+            <a:extLst>
+              <a:ext uri="{FF2B5EF4-FFF2-40B4-BE49-F238E27FC236}">
+                <a16:creationId xmlns:a16="http://schemas.microsoft.com/office/drawing/2014/main" id="{7C637CF6-050D-7D06-3BE1-992D37497F86}"/>
+              </a:ext>
+            </a:extLst>
+          </p:cNvPr>
+          <p:cNvSpPr>
+            <a:spLocks noGrp="1"/>
+          </p:cNvSpPr>
+          <p:nvPr>
+            <p:ph type="sldNum" sz="quarter" idx="5"/>
+          </p:nvPr>
+        </p:nvSpPr>
+        <p:spPr/>
+        <p:txBody>
+          <a:bodyPr/>
+          <a:lstStyle/>
+          <a:p>
+            <a:pPr>
+              <a:defRPr/>
+            </a:pPr>
+            <a:fld id="{18B4ECCA-5441-478E-8672-6AB21BB71BD9}" type="slidenum">
+              <a:rPr lang="en-US" altLang="en-US" smtClean="0"/>
+              <a:pPr>
+                <a:defRPr/>
+              </a:pPr>
+              <a:t>12</a:t>
+            </a:fld>
+            <a:endParaRPr lang="en-US" altLang="en-US"/>
+          </a:p>
+        </p:txBody>
+      </p:sp>
+    </p:spTree>
+    <p:extLst>
+      <p:ext uri="{BB962C8B-B14F-4D97-AF65-F5344CB8AC3E}">
+        <p14:creationId xmlns:p14="http://schemas.microsoft.com/office/powerpoint/2010/main" val="2507659018"/>
+      </p:ext>
+    </p:extLst>
+  </p:cSld>
+  <p:clrMapOvr>
+    <a:masterClrMapping/>
+  </p:clrMapOvr>
+</p:notes>
+</file>
+
+<file path=ppt/notesSlides/notesSlide13.xml><?xml version="1.0" encoding="utf-8"?>
+<p:notes xmlns:a="http://schemas.openxmlformats.org/drawingml/2006/main" xmlns:r="http://schemas.openxmlformats.org/officeDocument/2006/relationships" xmlns:p="http://schemas.openxmlformats.org/presentationml/2006/main">
+  <p:cSld>
+    <p:spTree>
+      <p:nvGrpSpPr>
+        <p:cNvPr id="1" name=""/>
+        <p:cNvGrpSpPr/>
+        <p:nvPr/>
+      </p:nvGrpSpPr>
+      <p:grpSpPr>
+        <a:xfrm>
+          <a:off x="0" y="0"/>
+          <a:ext cx="0" cy="0"/>
+          <a:chOff x="0" y="0"/>
+          <a:chExt cx="0" cy="0"/>
+        </a:xfrm>
+      </p:grpSpPr>
+      <p:sp>
+        <p:nvSpPr>
+          <p:cNvPr id="2" name="Slide Image Placeholder 1"/>
+          <p:cNvSpPr>
+            <a:spLocks noGrp="1" noRot="1" noChangeAspect="1"/>
+          </p:cNvSpPr>
+          <p:nvPr>
+            <p:ph type="sldImg"/>
+          </p:nvPr>
+        </p:nvSpPr>
+        <p:spPr>
+          <a:xfrm>
+            <a:off x="381000" y="685800"/>
+            <a:ext cx="6096000" cy="3429000"/>
+          </a:xfrm>
+        </p:spPr>
+      </p:sp>
+      <p:sp>
+        <p:nvSpPr>
+          <p:cNvPr id="3" name="Notes Placeholder 2"/>
+          <p:cNvSpPr>
+            <a:spLocks noGrp="1"/>
+          </p:cNvSpPr>
+          <p:nvPr>
+            <p:ph type="body" idx="1"/>
+          </p:nvPr>
+        </p:nvSpPr>
+        <p:spPr/>
+        <p:txBody>
+          <a:bodyPr>
+            <a:normAutofit/>
+          </a:bodyPr>
+          <a:lstStyle/>
+          <a:p>
+            <a:pPr marL="0" marR="0" lvl="0" indent="0" algn="l" defTabSz="914400" rtl="0" eaLnBrk="1" fontAlgn="auto" latinLnBrk="0" hangingPunct="1">
+              <a:lnSpc>
+                <a:spcPct val="100000"/>
+              </a:lnSpc>
+              <a:spcBef>
+                <a:spcPts val="0"/>
+              </a:spcBef>
+              <a:spcAft>
+                <a:spcPts val="0"/>
+              </a:spcAft>
+              <a:buClrTx/>
+              <a:buSzTx/>
+              <a:buFontTx/>
+              <a:buNone/>
+              <a:tabLst/>
+              <a:defRPr/>
+            </a:pPr>
+            <a:r>
+              <a:rPr lang="en-US" dirty="0"/>
+              <a:t>GLOBAL MODULE INDEX</a:t>
+            </a:r>
+          </a:p>
+          <a:p>
+            <a:endParaRPr lang="en-US" dirty="0"/>
+          </a:p>
+        </p:txBody>
+      </p:sp>
+      <p:sp>
+        <p:nvSpPr>
+          <p:cNvPr id="4" name="Slide Number Placeholder 3"/>
+          <p:cNvSpPr>
+            <a:spLocks noGrp="1"/>
+          </p:cNvSpPr>
+          <p:nvPr>
+            <p:ph type="sldNum" sz="quarter" idx="5"/>
+          </p:nvPr>
+        </p:nvSpPr>
+        <p:spPr/>
+        <p:txBody>
+          <a:bodyPr/>
+          <a:lstStyle/>
+          <a:p>
+            <a:pPr>
+              <a:defRPr/>
+            </a:pPr>
+            <a:fld id="{18B4ECCA-5441-478E-8672-6AB21BB71BD9}" type="slidenum">
+              <a:rPr lang="en-US" altLang="en-US" smtClean="0"/>
+              <a:pPr>
+                <a:defRPr/>
+              </a:pPr>
+              <a:t>13</a:t>
+            </a:fld>
+            <a:endParaRPr lang="en-US" altLang="en-US"/>
+          </a:p>
+        </p:txBody>
+      </p:sp>
+    </p:spTree>
+    <p:extLst>
+      <p:ext uri="{BB962C8B-B14F-4D97-AF65-F5344CB8AC3E}">
+        <p14:creationId xmlns:p14="http://schemas.microsoft.com/office/powerpoint/2010/main" val="1752505049"/>
+      </p:ext>
+    </p:extLst>
+  </p:cSld>
+  <p:clrMapOvr>
+    <a:masterClrMapping/>
+  </p:clrMapOvr>
+</p:notes>
+</file>
+
+<file path=ppt/notesSlides/notesSlide14.xml><?xml version="1.0" encoding="utf-8"?>
+<p:notes xmlns:a="http://schemas.openxmlformats.org/drawingml/2006/main" xmlns:r="http://schemas.openxmlformats.org/officeDocument/2006/relationships" xmlns:p="http://schemas.openxmlformats.org/presentationml/2006/main">
+  <p:cSld>
+    <p:spTree>
+      <p:nvGrpSpPr>
+        <p:cNvPr id="1" name="">
+          <a:extLst>
+            <a:ext uri="{FF2B5EF4-FFF2-40B4-BE49-F238E27FC236}">
+              <a16:creationId xmlns:a16="http://schemas.microsoft.com/office/drawing/2014/main" id="{36D90AB5-23E9-CA5C-2B77-9BAC28C1B18B}"/>
+            </a:ext>
+          </a:extLst>
+        </p:cNvPr>
+        <p:cNvGrpSpPr/>
+        <p:nvPr/>
+      </p:nvGrpSpPr>
+      <p:grpSpPr>
+        <a:xfrm>
+          <a:off x="0" y="0"/>
+          <a:ext cx="0" cy="0"/>
+          <a:chOff x="0" y="0"/>
+          <a:chExt cx="0" cy="0"/>
+        </a:xfrm>
+      </p:grpSpPr>
+      <p:sp>
+        <p:nvSpPr>
+          <p:cNvPr id="2" name="Slide Image Placeholder 1">
+            <a:extLst>
+              <a:ext uri="{FF2B5EF4-FFF2-40B4-BE49-F238E27FC236}">
+                <a16:creationId xmlns:a16="http://schemas.microsoft.com/office/drawing/2014/main" id="{2F725DC7-10E8-6DE1-7C61-BA1EC1DB904F}"/>
+              </a:ext>
+            </a:extLst>
+          </p:cNvPr>
+          <p:cNvSpPr>
+            <a:spLocks noGrp="1" noRot="1" noChangeAspect="1"/>
+          </p:cNvSpPr>
+          <p:nvPr>
+            <p:ph type="sldImg"/>
+          </p:nvPr>
+        </p:nvSpPr>
+        <p:spPr>
+          <a:xfrm>
+            <a:off x="381000" y="685800"/>
+            <a:ext cx="6096000" cy="3429000"/>
+          </a:xfrm>
+        </p:spPr>
+      </p:sp>
+      <p:sp>
+        <p:nvSpPr>
+          <p:cNvPr id="3" name="Notes Placeholder 2">
+            <a:extLst>
+              <a:ext uri="{FF2B5EF4-FFF2-40B4-BE49-F238E27FC236}">
+                <a16:creationId xmlns:a16="http://schemas.microsoft.com/office/drawing/2014/main" id="{3EE3DFB6-8223-031D-FB20-B7BE90CCFFF5}"/>
+              </a:ext>
+            </a:extLst>
+          </p:cNvPr>
+          <p:cNvSpPr>
+            <a:spLocks noGrp="1"/>
+          </p:cNvSpPr>
+          <p:nvPr>
+            <p:ph type="body" idx="1"/>
+          </p:nvPr>
+        </p:nvSpPr>
+        <p:spPr/>
+        <p:txBody>
+          <a:bodyPr>
+            <a:normAutofit/>
+          </a:bodyPr>
+          <a:lstStyle/>
+          <a:p>
+            <a:pPr marL="0" marR="0" lvl="0" indent="0" algn="l" defTabSz="914400" rtl="0" eaLnBrk="1" fontAlgn="auto" latinLnBrk="0" hangingPunct="1">
+              <a:lnSpc>
+                <a:spcPct val="100000"/>
+              </a:lnSpc>
+              <a:spcBef>
+                <a:spcPts val="0"/>
+              </a:spcBef>
+              <a:spcAft>
+                <a:spcPts val="0"/>
+              </a:spcAft>
+              <a:buClrTx/>
+              <a:buSzTx/>
+              <a:buFontTx/>
+              <a:buNone/>
+              <a:tabLst/>
+              <a:defRPr/>
+            </a:pPr>
+            <a:r>
+              <a:rPr lang="en-US" dirty="0"/>
+              <a:t>GLOBAL MODULE INDEX</a:t>
+            </a:r>
+          </a:p>
+          <a:p>
+            <a:endParaRPr lang="en-US" dirty="0"/>
+          </a:p>
+        </p:txBody>
+      </p:sp>
+      <p:sp>
+        <p:nvSpPr>
+          <p:cNvPr id="4" name="Slide Number Placeholder 3">
+            <a:extLst>
+              <a:ext uri="{FF2B5EF4-FFF2-40B4-BE49-F238E27FC236}">
+                <a16:creationId xmlns:a16="http://schemas.microsoft.com/office/drawing/2014/main" id="{DA3E8269-8055-A099-2A42-6C1048CB8546}"/>
+              </a:ext>
+            </a:extLst>
+          </p:cNvPr>
+          <p:cNvSpPr>
+            <a:spLocks noGrp="1"/>
+          </p:cNvSpPr>
+          <p:nvPr>
+            <p:ph type="sldNum" sz="quarter" idx="5"/>
+          </p:nvPr>
+        </p:nvSpPr>
+        <p:spPr/>
+        <p:txBody>
+          <a:bodyPr/>
+          <a:lstStyle/>
+          <a:p>
+            <a:pPr>
+              <a:defRPr/>
+            </a:pPr>
+            <a:fld id="{18B4ECCA-5441-478E-8672-6AB21BB71BD9}" type="slidenum">
+              <a:rPr lang="en-US" altLang="en-US" smtClean="0"/>
+              <a:pPr>
+                <a:defRPr/>
+              </a:pPr>
+              <a:t>14</a:t>
+            </a:fld>
+            <a:endParaRPr lang="en-US" altLang="en-US"/>
+          </a:p>
+        </p:txBody>
+      </p:sp>
+    </p:spTree>
+    <p:extLst>
+      <p:ext uri="{BB962C8B-B14F-4D97-AF65-F5344CB8AC3E}">
+        <p14:creationId xmlns:p14="http://schemas.microsoft.com/office/powerpoint/2010/main" val="3927837898"/>
+      </p:ext>
+    </p:extLst>
+  </p:cSld>
+  <p:clrMapOvr>
+    <a:masterClrMapping/>
+  </p:clrMapOvr>
+</p:notes>
+</file>
+
+<file path=ppt/notesSlides/notesSlide15.xml><?xml version="1.0" encoding="utf-8"?>
+<p:notes xmlns:a="http://schemas.openxmlformats.org/drawingml/2006/main" xmlns:r="http://schemas.openxmlformats.org/officeDocument/2006/relationships" xmlns:p="http://schemas.openxmlformats.org/presentationml/2006/main">
+  <p:cSld>
+    <p:spTree>
+      <p:nvGrpSpPr>
+        <p:cNvPr id="1" name="">
+          <a:extLst>
+            <a:ext uri="{FF2B5EF4-FFF2-40B4-BE49-F238E27FC236}">
+              <a16:creationId xmlns:a16="http://schemas.microsoft.com/office/drawing/2014/main" id="{95173805-3B52-946A-2396-451F779C752D}"/>
+            </a:ext>
+          </a:extLst>
+        </p:cNvPr>
+        <p:cNvGrpSpPr/>
+        <p:nvPr/>
+      </p:nvGrpSpPr>
+      <p:grpSpPr>
+        <a:xfrm>
+          <a:off x="0" y="0"/>
+          <a:ext cx="0" cy="0"/>
+          <a:chOff x="0" y="0"/>
+          <a:chExt cx="0" cy="0"/>
+        </a:xfrm>
+      </p:grpSpPr>
+      <p:sp>
+        <p:nvSpPr>
+          <p:cNvPr id="2" name="Slide Image Placeholder 1">
+            <a:extLst>
+              <a:ext uri="{FF2B5EF4-FFF2-40B4-BE49-F238E27FC236}">
+                <a16:creationId xmlns:a16="http://schemas.microsoft.com/office/drawing/2014/main" id="{7BE9AD7B-162B-9EB9-70B7-ACB2EDDC9526}"/>
+              </a:ext>
+            </a:extLst>
+          </p:cNvPr>
+          <p:cNvSpPr>
+            <a:spLocks noGrp="1" noRot="1" noChangeAspect="1"/>
+          </p:cNvSpPr>
+          <p:nvPr>
+            <p:ph type="sldImg"/>
+          </p:nvPr>
+        </p:nvSpPr>
+        <p:spPr>
+          <a:xfrm>
+            <a:off x="381000" y="685800"/>
+            <a:ext cx="6096000" cy="3429000"/>
+          </a:xfrm>
+        </p:spPr>
+      </p:sp>
+      <p:sp>
+        <p:nvSpPr>
+          <p:cNvPr id="3" name="Notes Placeholder 2">
+            <a:extLst>
+              <a:ext uri="{FF2B5EF4-FFF2-40B4-BE49-F238E27FC236}">
+                <a16:creationId xmlns:a16="http://schemas.microsoft.com/office/drawing/2014/main" id="{F48175A3-16B9-550C-B08F-1A4A9AB4455B}"/>
+              </a:ext>
+            </a:extLst>
+          </p:cNvPr>
+          <p:cNvSpPr>
+            <a:spLocks noGrp="1"/>
+          </p:cNvSpPr>
+          <p:nvPr>
+            <p:ph type="body" idx="1"/>
+          </p:nvPr>
+        </p:nvSpPr>
+        <p:spPr/>
+        <p:txBody>
+          <a:bodyPr>
+            <a:normAutofit/>
+          </a:bodyPr>
+          <a:lstStyle/>
+          <a:p>
+            <a:pPr marL="0" marR="0" lvl="0" indent="0" algn="l" defTabSz="914400" rtl="0" eaLnBrk="1" fontAlgn="auto" latinLnBrk="0" hangingPunct="1">
+              <a:lnSpc>
+                <a:spcPct val="100000"/>
+              </a:lnSpc>
+              <a:spcBef>
+                <a:spcPts val="0"/>
+              </a:spcBef>
+              <a:spcAft>
+                <a:spcPts val="0"/>
+              </a:spcAft>
+              <a:buClrTx/>
+              <a:buSzTx/>
+              <a:buFontTx/>
+              <a:buNone/>
+              <a:tabLst/>
+              <a:defRPr/>
+            </a:pPr>
+            <a:r>
+              <a:rPr lang="en-US" dirty="0"/>
+              <a:t>GLOBAL MODULE INDEX</a:t>
+            </a:r>
+          </a:p>
+          <a:p>
+            <a:endParaRPr lang="en-US" dirty="0"/>
+          </a:p>
+        </p:txBody>
+      </p:sp>
+      <p:sp>
+        <p:nvSpPr>
+          <p:cNvPr id="4" name="Slide Number Placeholder 3">
+            <a:extLst>
+              <a:ext uri="{FF2B5EF4-FFF2-40B4-BE49-F238E27FC236}">
+                <a16:creationId xmlns:a16="http://schemas.microsoft.com/office/drawing/2014/main" id="{B808C330-679C-7987-7CC2-C2F49F3C40BA}"/>
+              </a:ext>
+            </a:extLst>
+          </p:cNvPr>
+          <p:cNvSpPr>
+            <a:spLocks noGrp="1"/>
+          </p:cNvSpPr>
+          <p:nvPr>
+            <p:ph type="sldNum" sz="quarter" idx="5"/>
+          </p:nvPr>
+        </p:nvSpPr>
+        <p:spPr/>
+        <p:txBody>
+          <a:bodyPr/>
+          <a:lstStyle/>
+          <a:p>
+            <a:pPr>
+              <a:defRPr/>
+            </a:pPr>
+            <a:fld id="{18B4ECCA-5441-478E-8672-6AB21BB71BD9}" type="slidenum">
+              <a:rPr lang="en-US" altLang="en-US" smtClean="0"/>
+              <a:pPr>
+                <a:defRPr/>
+              </a:pPr>
+              <a:t>15</a:t>
+            </a:fld>
+            <a:endParaRPr lang="en-US" altLang="en-US"/>
+          </a:p>
+        </p:txBody>
+      </p:sp>
+    </p:spTree>
+    <p:extLst>
+      <p:ext uri="{BB962C8B-B14F-4D97-AF65-F5344CB8AC3E}">
+        <p14:creationId xmlns:p14="http://schemas.microsoft.com/office/powerpoint/2010/main" val="338127410"/>
+      </p:ext>
+    </p:extLst>
+  </p:cSld>
+  <p:clrMapOvr>
+    <a:masterClrMapping/>
+  </p:clrMapOvr>
+</p:notes>
+</file>
+
+<file path=ppt/notesSlides/notesSlide16.xml><?xml version="1.0" encoding="utf-8"?>
+<p:notes xmlns:a="http://schemas.openxmlformats.org/drawingml/2006/main" xmlns:r="http://schemas.openxmlformats.org/officeDocument/2006/relationships" xmlns:p="http://schemas.openxmlformats.org/presentationml/2006/main">
+  <p:cSld>
+    <p:spTree>
+      <p:nvGrpSpPr>
+        <p:cNvPr id="1" name=""/>
+        <p:cNvGrpSpPr/>
+        <p:nvPr/>
+      </p:nvGrpSpPr>
+      <p:grpSpPr>
+        <a:xfrm>
+          <a:off x="0" y="0"/>
+          <a:ext cx="0" cy="0"/>
+          <a:chOff x="0" y="0"/>
+          <a:chExt cx="0" cy="0"/>
+        </a:xfrm>
+      </p:grpSpPr>
+      <p:sp>
+        <p:nvSpPr>
+          <p:cNvPr id="2" name="Slide Image Placeholder 1"/>
+          <p:cNvSpPr>
+            <a:spLocks noGrp="1" noRot="1" noChangeAspect="1"/>
+          </p:cNvSpPr>
+          <p:nvPr>
+            <p:ph type="sldImg"/>
+          </p:nvPr>
+        </p:nvSpPr>
+        <p:spPr>
+          <a:xfrm>
+            <a:off x="381000" y="685800"/>
+            <a:ext cx="6096000" cy="3429000"/>
+          </a:xfrm>
+        </p:spPr>
+      </p:sp>
+      <p:sp>
+        <p:nvSpPr>
+          <p:cNvPr id="3" name="Notes Placeholder 2"/>
+          <p:cNvSpPr>
+            <a:spLocks noGrp="1"/>
+          </p:cNvSpPr>
+          <p:nvPr>
+            <p:ph type="body" idx="1"/>
+          </p:nvPr>
+        </p:nvSpPr>
+        <p:spPr/>
+        <p:txBody>
+          <a:bodyPr>
+            <a:normAutofit/>
+          </a:bodyPr>
+          <a:lstStyle/>
+          <a:p>
+            <a:endParaRPr lang="en-US" dirty="0"/>
+          </a:p>
+        </p:txBody>
+      </p:sp>
+      <p:sp>
+        <p:nvSpPr>
+          <p:cNvPr id="4" name="Slide Number Placeholder 3"/>
+          <p:cNvSpPr>
+            <a:spLocks noGrp="1"/>
+          </p:cNvSpPr>
+          <p:nvPr>
+            <p:ph type="sldNum" sz="quarter" idx="5"/>
+          </p:nvPr>
+        </p:nvSpPr>
+        <p:spPr/>
+        <p:txBody>
+          <a:bodyPr/>
+          <a:lstStyle/>
+          <a:p>
+            <a:pPr>
+              <a:defRPr/>
+            </a:pPr>
+            <a:fld id="{18B4ECCA-5441-478E-8672-6AB21BB71BD9}" type="slidenum">
+              <a:rPr lang="en-US" altLang="en-US" smtClean="0"/>
+              <a:pPr>
+                <a:defRPr/>
+              </a:pPr>
+              <a:t>16</a:t>
+            </a:fld>
+            <a:endParaRPr lang="en-US" altLang="en-US"/>
+          </a:p>
+        </p:txBody>
+      </p:sp>
+    </p:spTree>
+    <p:extLst>
+      <p:ext uri="{BB962C8B-B14F-4D97-AF65-F5344CB8AC3E}">
+        <p14:creationId xmlns:p14="http://schemas.microsoft.com/office/powerpoint/2010/main" val="3644848044"/>
+      </p:ext>
+    </p:extLst>
+  </p:cSld>
+  <p:clrMapOvr>
+    <a:masterClrMapping/>
+  </p:clrMapOvr>
+</p:notes>
+</file>
+
+<file path=ppt/notesSlides/notesSlide17.xml><?xml version="1.0" encoding="utf-8"?>
+<p:notes xmlns:a="http://schemas.openxmlformats.org/drawingml/2006/main" xmlns:r="http://schemas.openxmlformats.org/officeDocument/2006/relationships" xmlns:p="http://schemas.openxmlformats.org/presentationml/2006/main">
+  <p:cSld>
+    <p:spTree>
+      <p:nvGrpSpPr>
+        <p:cNvPr id="1" name="">
+          <a:extLst>
+            <a:ext uri="{FF2B5EF4-FFF2-40B4-BE49-F238E27FC236}">
+              <a16:creationId xmlns:a16="http://schemas.microsoft.com/office/drawing/2014/main" id="{50E2F3D4-857E-E286-490E-469D6F6D61E5}"/>
+            </a:ext>
+          </a:extLst>
+        </p:cNvPr>
+        <p:cNvGrpSpPr/>
+        <p:nvPr/>
+      </p:nvGrpSpPr>
+      <p:grpSpPr>
+        <a:xfrm>
+          <a:off x="0" y="0"/>
+          <a:ext cx="0" cy="0"/>
+          <a:chOff x="0" y="0"/>
+          <a:chExt cx="0" cy="0"/>
+        </a:xfrm>
+      </p:grpSpPr>
+      <p:sp>
+        <p:nvSpPr>
+          <p:cNvPr id="2" name="Slide Image Placeholder 1">
+            <a:extLst>
+              <a:ext uri="{FF2B5EF4-FFF2-40B4-BE49-F238E27FC236}">
+                <a16:creationId xmlns:a16="http://schemas.microsoft.com/office/drawing/2014/main" id="{E8CAF169-CC9A-3577-4B8C-5FF4B07C80AD}"/>
+              </a:ext>
+            </a:extLst>
+          </p:cNvPr>
+          <p:cNvSpPr>
+            <a:spLocks noGrp="1" noRot="1" noChangeAspect="1"/>
+          </p:cNvSpPr>
+          <p:nvPr>
+            <p:ph type="sldImg"/>
+          </p:nvPr>
+        </p:nvSpPr>
+        <p:spPr>
+          <a:xfrm>
+            <a:off x="381000" y="685800"/>
+            <a:ext cx="6096000" cy="3429000"/>
+          </a:xfrm>
+        </p:spPr>
+      </p:sp>
+      <p:sp>
+        <p:nvSpPr>
+          <p:cNvPr id="3" name="Notes Placeholder 2">
+            <a:extLst>
+              <a:ext uri="{FF2B5EF4-FFF2-40B4-BE49-F238E27FC236}">
+                <a16:creationId xmlns:a16="http://schemas.microsoft.com/office/drawing/2014/main" id="{0050851C-BCCD-2F68-623E-DFC6561BE4DA}"/>
+              </a:ext>
+            </a:extLst>
+          </p:cNvPr>
+          <p:cNvSpPr>
+            <a:spLocks noGrp="1"/>
+          </p:cNvSpPr>
+          <p:nvPr>
+            <p:ph type="body" idx="1"/>
+          </p:nvPr>
+        </p:nvSpPr>
+        <p:spPr/>
+        <p:txBody>
+          <a:bodyPr>
+            <a:normAutofit/>
+          </a:bodyPr>
+          <a:lstStyle/>
+          <a:p>
+            <a:endParaRPr lang="en-US" dirty="0"/>
+          </a:p>
+        </p:txBody>
+      </p:sp>
+      <p:sp>
+        <p:nvSpPr>
+          <p:cNvPr id="4" name="Slide Number Placeholder 3">
+            <a:extLst>
+              <a:ext uri="{FF2B5EF4-FFF2-40B4-BE49-F238E27FC236}">
+                <a16:creationId xmlns:a16="http://schemas.microsoft.com/office/drawing/2014/main" id="{48BFE58C-5680-25E0-97D7-1076338AE434}"/>
+              </a:ext>
+            </a:extLst>
+          </p:cNvPr>
+          <p:cNvSpPr>
+            <a:spLocks noGrp="1"/>
+          </p:cNvSpPr>
+          <p:nvPr>
+            <p:ph type="sldNum" sz="quarter" idx="5"/>
+          </p:nvPr>
+        </p:nvSpPr>
+        <p:spPr/>
+        <p:txBody>
+          <a:bodyPr/>
+          <a:lstStyle/>
+          <a:p>
+            <a:pPr>
+              <a:defRPr/>
+            </a:pPr>
+            <a:fld id="{18B4ECCA-5441-478E-8672-6AB21BB71BD9}" type="slidenum">
+              <a:rPr lang="en-US" altLang="en-US" smtClean="0"/>
+              <a:pPr>
+                <a:defRPr/>
+              </a:pPr>
+              <a:t>17</a:t>
+            </a:fld>
+            <a:endParaRPr lang="en-US" altLang="en-US"/>
+          </a:p>
+        </p:txBody>
+      </p:sp>
+    </p:spTree>
+    <p:extLst>
+      <p:ext uri="{BB962C8B-B14F-4D97-AF65-F5344CB8AC3E}">
+        <p14:creationId xmlns:p14="http://schemas.microsoft.com/office/powerpoint/2010/main" val="2943109935"/>
+      </p:ext>
+    </p:extLst>
+  </p:cSld>
+  <p:clrMapOvr>
+    <a:masterClrMapping/>
+  </p:clrMapOvr>
+</p:notes>
+</file>
+
+<file path=ppt/notesSlides/notesSlide18.xml><?xml version="1.0" encoding="utf-8"?>
+<p:notes xmlns:a="http://schemas.openxmlformats.org/drawingml/2006/main" xmlns:r="http://schemas.openxmlformats.org/officeDocument/2006/relationships" xmlns:p="http://schemas.openxmlformats.org/presentationml/2006/main">
+  <p:cSld>
+    <p:spTree>
+      <p:nvGrpSpPr>
+        <p:cNvPr id="1" name="">
+          <a:extLst>
+            <a:ext uri="{FF2B5EF4-FFF2-40B4-BE49-F238E27FC236}">
+              <a16:creationId xmlns:a16="http://schemas.microsoft.com/office/drawing/2014/main" id="{39547280-395D-A58C-201B-58FBC8EFC9D9}"/>
+            </a:ext>
+          </a:extLst>
+        </p:cNvPr>
+        <p:cNvGrpSpPr/>
+        <p:nvPr/>
+      </p:nvGrpSpPr>
+      <p:grpSpPr>
+        <a:xfrm>
+          <a:off x="0" y="0"/>
+          <a:ext cx="0" cy="0"/>
+          <a:chOff x="0" y="0"/>
+          <a:chExt cx="0" cy="0"/>
+        </a:xfrm>
+      </p:grpSpPr>
+      <p:sp>
+        <p:nvSpPr>
+          <p:cNvPr id="2" name="Slide Image Placeholder 1">
+            <a:extLst>
+              <a:ext uri="{FF2B5EF4-FFF2-40B4-BE49-F238E27FC236}">
+                <a16:creationId xmlns:a16="http://schemas.microsoft.com/office/drawing/2014/main" id="{A3E9609A-5E5C-923B-41F7-1EE364D074FF}"/>
+              </a:ext>
+            </a:extLst>
+          </p:cNvPr>
+          <p:cNvSpPr>
+            <a:spLocks noGrp="1" noRot="1" noChangeAspect="1"/>
+          </p:cNvSpPr>
+          <p:nvPr>
+            <p:ph type="sldImg"/>
+          </p:nvPr>
+        </p:nvSpPr>
+        <p:spPr>
+          <a:xfrm>
+            <a:off x="381000" y="685800"/>
+            <a:ext cx="6096000" cy="3429000"/>
+          </a:xfrm>
+        </p:spPr>
+      </p:sp>
+      <p:sp>
+        <p:nvSpPr>
+          <p:cNvPr id="3" name="Notes Placeholder 2">
+            <a:extLst>
+              <a:ext uri="{FF2B5EF4-FFF2-40B4-BE49-F238E27FC236}">
+                <a16:creationId xmlns:a16="http://schemas.microsoft.com/office/drawing/2014/main" id="{779B5A87-6287-1181-39B9-DC90F7C8F37D}"/>
+              </a:ext>
+            </a:extLst>
+          </p:cNvPr>
+          <p:cNvSpPr>
+            <a:spLocks noGrp="1"/>
+          </p:cNvSpPr>
+          <p:nvPr>
+            <p:ph type="body" idx="1"/>
+          </p:nvPr>
+        </p:nvSpPr>
+        <p:spPr/>
+        <p:txBody>
+          <a:bodyPr>
+            <a:normAutofit/>
+          </a:bodyPr>
+          <a:lstStyle/>
+          <a:p>
+            <a:pPr marL="0" marR="0" lvl="0" indent="0" algn="l" defTabSz="914400" rtl="0" eaLnBrk="1" fontAlgn="auto" latinLnBrk="0" hangingPunct="1">
+              <a:lnSpc>
+                <a:spcPct val="100000"/>
+              </a:lnSpc>
+              <a:spcBef>
+                <a:spcPts val="0"/>
+              </a:spcBef>
+              <a:spcAft>
+                <a:spcPts val="0"/>
+              </a:spcAft>
+              <a:buClrTx/>
+              <a:buSzTx/>
+              <a:buFontTx/>
+              <a:buNone/>
+              <a:tabLst/>
+              <a:defRPr/>
+            </a:pPr>
+            <a:r>
+              <a:rPr lang="en-US" dirty="0"/>
+              <a:t>GLOBAL MODULE INDEX</a:t>
+            </a:r>
+          </a:p>
+          <a:p>
+            <a:endParaRPr lang="en-US" dirty="0"/>
+          </a:p>
+        </p:txBody>
+      </p:sp>
+      <p:sp>
+        <p:nvSpPr>
+          <p:cNvPr id="4" name="Slide Number Placeholder 3">
+            <a:extLst>
+              <a:ext uri="{FF2B5EF4-FFF2-40B4-BE49-F238E27FC236}">
+                <a16:creationId xmlns:a16="http://schemas.microsoft.com/office/drawing/2014/main" id="{7E630F40-F312-201B-AB09-3C30F01CAFCB}"/>
+              </a:ext>
+            </a:extLst>
+          </p:cNvPr>
+          <p:cNvSpPr>
+            <a:spLocks noGrp="1"/>
+          </p:cNvSpPr>
+          <p:nvPr>
+            <p:ph type="sldNum" sz="quarter" idx="5"/>
+          </p:nvPr>
+        </p:nvSpPr>
+        <p:spPr/>
+        <p:txBody>
+          <a:bodyPr/>
+          <a:lstStyle/>
+          <a:p>
+            <a:pPr>
+              <a:defRPr/>
+            </a:pPr>
+            <a:fld id="{18B4ECCA-5441-478E-8672-6AB21BB71BD9}" type="slidenum">
+              <a:rPr lang="en-US" altLang="en-US" smtClean="0"/>
+              <a:pPr>
+                <a:defRPr/>
+              </a:pPr>
+              <a:t>18</a:t>
+            </a:fld>
+            <a:endParaRPr lang="en-US" altLang="en-US"/>
+          </a:p>
+        </p:txBody>
+      </p:sp>
+    </p:spTree>
+    <p:extLst>
+      <p:ext uri="{BB962C8B-B14F-4D97-AF65-F5344CB8AC3E}">
+        <p14:creationId xmlns:p14="http://schemas.microsoft.com/office/powerpoint/2010/main" val="1275523317"/>
+      </p:ext>
+    </p:extLst>
+  </p:cSld>
+  <p:clrMapOvr>
+    <a:masterClrMapping/>
+  </p:clrMapOvr>
+</p:notes>
+</file>
+
+<file path=ppt/notesSlides/notesSlide19.xml><?xml version="1.0" encoding="utf-8"?>
+<p:notes xmlns:a="http://schemas.openxmlformats.org/drawingml/2006/main" xmlns:r="http://schemas.openxmlformats.org/officeDocument/2006/relationships" xmlns:p="http://schemas.openxmlformats.org/presentationml/2006/main">
+  <p:cSld>
+    <p:spTree>
+      <p:nvGrpSpPr>
+        <p:cNvPr id="1" name=""/>
+        <p:cNvGrpSpPr/>
+        <p:nvPr/>
+      </p:nvGrpSpPr>
+      <p:grpSpPr>
+        <a:xfrm>
+          <a:off x="0" y="0"/>
+          <a:ext cx="0" cy="0"/>
+          <a:chOff x="0" y="0"/>
+          <a:chExt cx="0" cy="0"/>
+        </a:xfrm>
+      </p:grpSpPr>
+      <p:sp>
+        <p:nvSpPr>
+          <p:cNvPr id="2" name="Slide Image Placeholder 1"/>
+          <p:cNvSpPr>
+            <a:spLocks noGrp="1" noRot="1" noChangeAspect="1"/>
+          </p:cNvSpPr>
+          <p:nvPr>
+            <p:ph type="sldImg"/>
+          </p:nvPr>
+        </p:nvSpPr>
+        <p:spPr>
+          <a:xfrm>
+            <a:off x="381000" y="685800"/>
+            <a:ext cx="6096000" cy="3429000"/>
+          </a:xfrm>
+        </p:spPr>
+      </p:sp>
+      <p:sp>
+        <p:nvSpPr>
+          <p:cNvPr id="3" name="Notes Placeholder 2"/>
+          <p:cNvSpPr>
+            <a:spLocks noGrp="1"/>
+          </p:cNvSpPr>
+          <p:nvPr>
+            <p:ph type="body" idx="1"/>
+          </p:nvPr>
+        </p:nvSpPr>
+        <p:spPr/>
+        <p:txBody>
+          <a:bodyPr>
+            <a:normAutofit/>
+          </a:bodyPr>
+          <a:lstStyle/>
+          <a:p>
+            <a:endParaRPr lang="en-US" dirty="0"/>
+          </a:p>
+        </p:txBody>
+      </p:sp>
+      <p:sp>
+        <p:nvSpPr>
+          <p:cNvPr id="4" name="Slide Number Placeholder 3"/>
+          <p:cNvSpPr>
+            <a:spLocks noGrp="1"/>
+          </p:cNvSpPr>
+          <p:nvPr>
+            <p:ph type="sldNum" sz="quarter" idx="5"/>
+          </p:nvPr>
+        </p:nvSpPr>
+        <p:spPr/>
+        <p:txBody>
+          <a:bodyPr/>
+          <a:lstStyle/>
+          <a:p>
+            <a:pPr>
+              <a:defRPr/>
+            </a:pPr>
+            <a:fld id="{18B4ECCA-5441-478E-8672-6AB21BB71BD9}" type="slidenum">
+              <a:rPr lang="en-US" altLang="en-US" smtClean="0"/>
+              <a:pPr>
+                <a:defRPr/>
+              </a:pPr>
+              <a:t>19</a:t>
+            </a:fld>
+            <a:endParaRPr lang="en-US" altLang="en-US"/>
+          </a:p>
+        </p:txBody>
+      </p:sp>
+    </p:spTree>
+    <p:extLst>
+      <p:ext uri="{BB962C8B-B14F-4D97-AF65-F5344CB8AC3E}">
+        <p14:creationId xmlns:p14="http://schemas.microsoft.com/office/powerpoint/2010/main" val="3468020539"/>
+      </p:ext>
+    </p:extLst>
+  </p:cSld>
+  <p:clrMapOvr>
+    <a:masterClrMapping/>
+  </p:clrMapOvr>
+</p:notes>
+</file>
+
+<file path=ppt/notesSlides/notesSlide2.xml><?xml version="1.0" encoding="utf-8"?>
+<p:notes xmlns:a="http://schemas.openxmlformats.org/drawingml/2006/main" xmlns:r="http://schemas.openxmlformats.org/officeDocument/2006/relationships" xmlns:p="http://schemas.openxmlformats.org/presentationml/2006/main">
+  <p:cSld>
+    <p:spTree>
+      <p:nvGrpSpPr>
+        <p:cNvPr id="1" name="">
+          <a:extLst>
+            <a:ext uri="{FF2B5EF4-FFF2-40B4-BE49-F238E27FC236}">
+              <a16:creationId xmlns:a16="http://schemas.microsoft.com/office/drawing/2014/main" id="{BE770A4C-6580-9B96-AD9C-7B89F40C2006}"/>
+            </a:ext>
+          </a:extLst>
+        </p:cNvPr>
+        <p:cNvGrpSpPr/>
+        <p:nvPr/>
+      </p:nvGrpSpPr>
+      <p:grpSpPr>
+        <a:xfrm>
+          <a:off x="0" y="0"/>
+          <a:ext cx="0" cy="0"/>
+          <a:chOff x="0" y="0"/>
+          <a:chExt cx="0" cy="0"/>
+        </a:xfrm>
+      </p:grpSpPr>
+      <p:sp>
+        <p:nvSpPr>
+          <p:cNvPr id="2" name="Slide Image Placeholder 1">
+            <a:extLst>
+              <a:ext uri="{FF2B5EF4-FFF2-40B4-BE49-F238E27FC236}">
+                <a16:creationId xmlns:a16="http://schemas.microsoft.com/office/drawing/2014/main" id="{B2BC750F-D722-5702-D396-607F3EB383EF}"/>
+              </a:ext>
+            </a:extLst>
+          </p:cNvPr>
+          <p:cNvSpPr>
+            <a:spLocks noGrp="1" noRot="1" noChangeAspect="1"/>
+          </p:cNvSpPr>
+          <p:nvPr>
+            <p:ph type="sldImg"/>
+          </p:nvPr>
+        </p:nvSpPr>
+        <p:spPr>
+          <a:xfrm>
+            <a:off x="381000" y="685800"/>
+            <a:ext cx="6096000" cy="3429000"/>
+          </a:xfrm>
+        </p:spPr>
+      </p:sp>
+      <p:sp>
+        <p:nvSpPr>
+          <p:cNvPr id="3" name="Notes Placeholder 2">
+            <a:extLst>
+              <a:ext uri="{FF2B5EF4-FFF2-40B4-BE49-F238E27FC236}">
+                <a16:creationId xmlns:a16="http://schemas.microsoft.com/office/drawing/2014/main" id="{8E743D21-3E28-75DD-6B79-50F7034E1905}"/>
+              </a:ext>
+            </a:extLst>
+          </p:cNvPr>
+          <p:cNvSpPr>
+            <a:spLocks noGrp="1"/>
+          </p:cNvSpPr>
+          <p:nvPr>
+            <p:ph type="body" idx="1"/>
+          </p:nvPr>
+        </p:nvSpPr>
+        <p:spPr/>
+        <p:txBody>
+          <a:bodyPr/>
+          <a:lstStyle/>
+          <a:p>
+            <a:endParaRPr lang="en-US" dirty="0"/>
+          </a:p>
+        </p:txBody>
+      </p:sp>
+      <p:sp>
+        <p:nvSpPr>
+          <p:cNvPr id="4" name="Slide Number Placeholder 3">
+            <a:extLst>
+              <a:ext uri="{FF2B5EF4-FFF2-40B4-BE49-F238E27FC236}">
+                <a16:creationId xmlns:a16="http://schemas.microsoft.com/office/drawing/2014/main" id="{41804FB5-1C20-6F5F-93AF-A0AA5723923A}"/>
+              </a:ext>
+            </a:extLst>
+          </p:cNvPr>
+          <p:cNvSpPr>
+            <a:spLocks noGrp="1"/>
+          </p:cNvSpPr>
+          <p:nvPr>
+            <p:ph type="sldNum" sz="quarter" idx="5"/>
+          </p:nvPr>
+        </p:nvSpPr>
+        <p:spPr/>
+        <p:txBody>
+          <a:bodyPr/>
+          <a:lstStyle/>
+          <a:p>
+            <a:fld id="{292570D5-C374-43AE-876B-55C2A221664E}" type="slidenum">
+              <a:rPr lang="en-US" smtClean="0"/>
+              <a:t>2</a:t>
+            </a:fld>
+            <a:endParaRPr lang="en-US"/>
+          </a:p>
+        </p:txBody>
+      </p:sp>
+    </p:spTree>
+    <p:extLst>
+      <p:ext uri="{BB962C8B-B14F-4D97-AF65-F5344CB8AC3E}">
+        <p14:creationId xmlns:p14="http://schemas.microsoft.com/office/powerpoint/2010/main" val="2022225923"/>
+      </p:ext>
+    </p:extLst>
+  </p:cSld>
+  <p:clrMapOvr>
+    <a:masterClrMapping/>
+  </p:clrMapOvr>
+</p:notes>
+</file>
+
+<file path=ppt/notesSlides/notesSlide20.xml><?xml version="1.0" encoding="utf-8"?>
+<p:notes xmlns:a="http://schemas.openxmlformats.org/drawingml/2006/main" xmlns:r="http://schemas.openxmlformats.org/officeDocument/2006/relationships" xmlns:p="http://schemas.openxmlformats.org/presentationml/2006/main">
+  <p:cSld>
+    <p:spTree>
+      <p:nvGrpSpPr>
+        <p:cNvPr id="1" name="">
+          <a:extLst>
+            <a:ext uri="{FF2B5EF4-FFF2-40B4-BE49-F238E27FC236}">
+              <a16:creationId xmlns:a16="http://schemas.microsoft.com/office/drawing/2014/main" id="{9D231A53-26E7-27EB-AA77-6BCAD42501D1}"/>
+            </a:ext>
+          </a:extLst>
+        </p:cNvPr>
+        <p:cNvGrpSpPr/>
+        <p:nvPr/>
+      </p:nvGrpSpPr>
+      <p:grpSpPr>
+        <a:xfrm>
+          <a:off x="0" y="0"/>
+          <a:ext cx="0" cy="0"/>
+          <a:chOff x="0" y="0"/>
+          <a:chExt cx="0" cy="0"/>
+        </a:xfrm>
+      </p:grpSpPr>
+      <p:sp>
+        <p:nvSpPr>
+          <p:cNvPr id="2" name="Slide Image Placeholder 1">
+            <a:extLst>
+              <a:ext uri="{FF2B5EF4-FFF2-40B4-BE49-F238E27FC236}">
+                <a16:creationId xmlns:a16="http://schemas.microsoft.com/office/drawing/2014/main" id="{13AC93BE-7C9F-D9BE-A094-8FE37C74F4C6}"/>
+              </a:ext>
+            </a:extLst>
+          </p:cNvPr>
+          <p:cNvSpPr>
+            <a:spLocks noGrp="1" noRot="1" noChangeAspect="1"/>
+          </p:cNvSpPr>
+          <p:nvPr>
+            <p:ph type="sldImg"/>
+          </p:nvPr>
+        </p:nvSpPr>
+        <p:spPr>
+          <a:xfrm>
+            <a:off x="381000" y="685800"/>
+            <a:ext cx="6096000" cy="3429000"/>
+          </a:xfrm>
+        </p:spPr>
+      </p:sp>
+      <p:sp>
+        <p:nvSpPr>
+          <p:cNvPr id="3" name="Notes Placeholder 2">
+            <a:extLst>
+              <a:ext uri="{FF2B5EF4-FFF2-40B4-BE49-F238E27FC236}">
+                <a16:creationId xmlns:a16="http://schemas.microsoft.com/office/drawing/2014/main" id="{338D7B24-32A6-C22F-412A-88974C0172DA}"/>
+              </a:ext>
+            </a:extLst>
+          </p:cNvPr>
+          <p:cNvSpPr>
+            <a:spLocks noGrp="1"/>
+          </p:cNvSpPr>
+          <p:nvPr>
+            <p:ph type="body" idx="1"/>
+          </p:nvPr>
+        </p:nvSpPr>
+        <p:spPr/>
+        <p:txBody>
+          <a:bodyPr/>
+          <a:lstStyle/>
+          <a:p>
+            <a:endParaRPr lang="en-US" dirty="0"/>
+          </a:p>
+        </p:txBody>
+      </p:sp>
+      <p:sp>
+        <p:nvSpPr>
+          <p:cNvPr id="4" name="Slide Number Placeholder 3">
+            <a:extLst>
+              <a:ext uri="{FF2B5EF4-FFF2-40B4-BE49-F238E27FC236}">
+                <a16:creationId xmlns:a16="http://schemas.microsoft.com/office/drawing/2014/main" id="{73195394-049D-95B4-D2CD-04ED0AFEEFDA}"/>
+              </a:ext>
+            </a:extLst>
+          </p:cNvPr>
+          <p:cNvSpPr>
+            <a:spLocks noGrp="1"/>
+          </p:cNvSpPr>
+          <p:nvPr>
+            <p:ph type="sldNum" sz="quarter" idx="5"/>
+          </p:nvPr>
+        </p:nvSpPr>
+        <p:spPr/>
+        <p:txBody>
+          <a:bodyPr/>
+          <a:lstStyle/>
+          <a:p>
+            <a:fld id="{292570D5-C374-43AE-876B-55C2A221664E}" type="slidenum">
+              <a:rPr lang="en-US" smtClean="0"/>
+              <a:t>20</a:t>
+            </a:fld>
+            <a:endParaRPr lang="en-US"/>
+          </a:p>
+        </p:txBody>
+      </p:sp>
+    </p:spTree>
+    <p:extLst>
+      <p:ext uri="{BB962C8B-B14F-4D97-AF65-F5344CB8AC3E}">
+        <p14:creationId xmlns:p14="http://schemas.microsoft.com/office/powerpoint/2010/main" val="997511759"/>
+      </p:ext>
+    </p:extLst>
+  </p:cSld>
+  <p:clrMapOvr>
+    <a:masterClrMapping/>
+  </p:clrMapOvr>
+</p:notes>
+</file>
+
+<file path=ppt/notesSlides/notesSlide21.xml><?xml version="1.0" encoding="utf-8"?>
+<p:notes xmlns:a="http://schemas.openxmlformats.org/drawingml/2006/main" xmlns:r="http://schemas.openxmlformats.org/officeDocument/2006/relationships" xmlns:p="http://schemas.openxmlformats.org/presentationml/2006/main">
+  <p:cSld>
+    <p:spTree>
+      <p:nvGrpSpPr>
+        <p:cNvPr id="1" name=""/>
+        <p:cNvGrpSpPr/>
+        <p:nvPr/>
+      </p:nvGrpSpPr>
+      <p:grpSpPr>
+        <a:xfrm>
+          <a:off x="0" y="0"/>
+          <a:ext cx="0" cy="0"/>
+          <a:chOff x="0" y="0"/>
+          <a:chExt cx="0" cy="0"/>
+        </a:xfrm>
+      </p:grpSpPr>
+      <p:sp>
+        <p:nvSpPr>
+          <p:cNvPr id="2" name="Slide Image Placeholder 1"/>
+          <p:cNvSpPr>
+            <a:spLocks noGrp="1" noRot="1" noChangeAspect="1"/>
+          </p:cNvSpPr>
+          <p:nvPr>
+            <p:ph type="sldImg"/>
+          </p:nvPr>
+        </p:nvSpPr>
+        <p:spPr>
+          <a:xfrm>
+            <a:off x="381000" y="685800"/>
+            <a:ext cx="6096000" cy="3429000"/>
+          </a:xfrm>
+        </p:spPr>
+      </p:sp>
+      <p:sp>
+        <p:nvSpPr>
+          <p:cNvPr id="3" name="Notes Placeholder 2"/>
+          <p:cNvSpPr>
+            <a:spLocks noGrp="1"/>
+          </p:cNvSpPr>
+          <p:nvPr>
+            <p:ph type="body" idx="1"/>
+          </p:nvPr>
+        </p:nvSpPr>
+        <p:spPr/>
+        <p:txBody>
+          <a:bodyPr/>
+          <a:lstStyle/>
+          <a:p>
+            <a:r>
+              <a:rPr lang="en-US" dirty="0"/>
+              <a:t>Sous </a:t>
+            </a:r>
+            <a:r>
+              <a:rPr lang="en-US"/>
+              <a:t>Chef Example</a:t>
+            </a:r>
+            <a:endParaRPr lang="en-US" dirty="0"/>
+          </a:p>
+        </p:txBody>
+      </p:sp>
+      <p:sp>
+        <p:nvSpPr>
+          <p:cNvPr id="4" name="Slide Number Placeholder 3"/>
+          <p:cNvSpPr>
+            <a:spLocks noGrp="1"/>
+          </p:cNvSpPr>
+          <p:nvPr>
+            <p:ph type="sldNum" sz="quarter" idx="5"/>
+          </p:nvPr>
+        </p:nvSpPr>
+        <p:spPr/>
+        <p:txBody>
+          <a:bodyPr/>
+          <a:lstStyle/>
+          <a:p>
+            <a:fld id="{292570D5-C374-43AE-876B-55C2A221664E}" type="slidenum">
+              <a:rPr lang="en-US" smtClean="0"/>
+              <a:t>21</a:t>
+            </a:fld>
+            <a:endParaRPr lang="en-US"/>
+          </a:p>
+        </p:txBody>
+      </p:sp>
+    </p:spTree>
+    <p:extLst>
+      <p:ext uri="{BB962C8B-B14F-4D97-AF65-F5344CB8AC3E}">
+        <p14:creationId xmlns:p14="http://schemas.microsoft.com/office/powerpoint/2010/main" val="3851621045"/>
+      </p:ext>
+    </p:extLst>
+  </p:cSld>
+  <p:clrMapOvr>
+    <a:masterClrMapping/>
+  </p:clrMapOvr>
+</p:notes>
+</file>
+
+<file path=ppt/notesSlides/notesSlide22.xml><?xml version="1.0" encoding="utf-8"?>
+<p:notes xmlns:a="http://schemas.openxmlformats.org/drawingml/2006/main" xmlns:r="http://schemas.openxmlformats.org/officeDocument/2006/relationships" xmlns:p="http://schemas.openxmlformats.org/presentationml/2006/main">
+  <p:cSld>
+    <p:spTree>
+      <p:nvGrpSpPr>
+        <p:cNvPr id="1" name=""/>
+        <p:cNvGrpSpPr/>
+        <p:nvPr/>
+      </p:nvGrpSpPr>
+      <p:grpSpPr>
+        <a:xfrm>
+          <a:off x="0" y="0"/>
+          <a:ext cx="0" cy="0"/>
+          <a:chOff x="0" y="0"/>
+          <a:chExt cx="0" cy="0"/>
+        </a:xfrm>
+      </p:grpSpPr>
+      <p:sp>
+        <p:nvSpPr>
+          <p:cNvPr id="2" name="Slide Image Placeholder 1"/>
+          <p:cNvSpPr>
+            <a:spLocks noGrp="1" noRot="1" noChangeAspect="1"/>
+          </p:cNvSpPr>
+          <p:nvPr>
+            <p:ph type="sldImg"/>
+          </p:nvPr>
+        </p:nvSpPr>
+        <p:spPr>
+          <a:xfrm>
+            <a:off x="381000" y="685800"/>
+            <a:ext cx="6096000" cy="3429000"/>
+          </a:xfrm>
+        </p:spPr>
+      </p:sp>
+      <p:sp>
+        <p:nvSpPr>
+          <p:cNvPr id="3" name="Notes Placeholder 2"/>
+          <p:cNvSpPr>
+            <a:spLocks noGrp="1"/>
+          </p:cNvSpPr>
+          <p:nvPr>
+            <p:ph type="body" idx="1"/>
+          </p:nvPr>
+        </p:nvSpPr>
+        <p:spPr/>
+        <p:txBody>
+          <a:bodyPr/>
+          <a:lstStyle/>
+          <a:p>
+            <a:endParaRPr lang="en-US" dirty="0"/>
+          </a:p>
+        </p:txBody>
+      </p:sp>
+      <p:sp>
+        <p:nvSpPr>
+          <p:cNvPr id="4" name="Slide Number Placeholder 3"/>
+          <p:cNvSpPr>
+            <a:spLocks noGrp="1"/>
+          </p:cNvSpPr>
+          <p:nvPr>
+            <p:ph type="sldNum" sz="quarter" idx="5"/>
+          </p:nvPr>
+        </p:nvSpPr>
+        <p:spPr/>
+        <p:txBody>
+          <a:bodyPr/>
+          <a:lstStyle/>
+          <a:p>
+            <a:fld id="{292570D5-C374-43AE-876B-55C2A221664E}" type="slidenum">
+              <a:rPr lang="en-US" smtClean="0"/>
+              <a:t>22</a:t>
+            </a:fld>
+            <a:endParaRPr lang="en-US"/>
+          </a:p>
+        </p:txBody>
+      </p:sp>
+    </p:spTree>
+    <p:extLst>
+      <p:ext uri="{BB962C8B-B14F-4D97-AF65-F5344CB8AC3E}">
+        <p14:creationId xmlns:p14="http://schemas.microsoft.com/office/powerpoint/2010/main" val="3229056280"/>
+      </p:ext>
+    </p:extLst>
+  </p:cSld>
+  <p:clrMapOvr>
+    <a:masterClrMapping/>
+  </p:clrMapOvr>
+</p:notes>
+</file>
+
+<file path=ppt/notesSlides/notesSlide23.xml><?xml version="1.0" encoding="utf-8"?>
+<p:notes xmlns:a="http://schemas.openxmlformats.org/drawingml/2006/main" xmlns:r="http://schemas.openxmlformats.org/officeDocument/2006/relationships" xmlns:p="http://schemas.openxmlformats.org/presentationml/2006/main">
+  <p:cSld>
+    <p:spTree>
+      <p:nvGrpSpPr>
+        <p:cNvPr id="1" name=""/>
+        <p:cNvGrpSpPr/>
+        <p:nvPr/>
+      </p:nvGrpSpPr>
+      <p:grpSpPr>
+        <a:xfrm>
+          <a:off x="0" y="0"/>
+          <a:ext cx="0" cy="0"/>
+          <a:chOff x="0" y="0"/>
+          <a:chExt cx="0" cy="0"/>
+        </a:xfrm>
+      </p:grpSpPr>
+      <p:sp>
+        <p:nvSpPr>
+          <p:cNvPr id="2" name="Slide Image Placeholder 1"/>
+          <p:cNvSpPr>
+            <a:spLocks noGrp="1" noRot="1" noChangeAspect="1"/>
+          </p:cNvSpPr>
+          <p:nvPr>
+            <p:ph type="sldImg"/>
+          </p:nvPr>
+        </p:nvSpPr>
+        <p:spPr>
+          <a:xfrm>
+            <a:off x="381000" y="685800"/>
+            <a:ext cx="6096000" cy="3429000"/>
+          </a:xfrm>
+        </p:spPr>
+      </p:sp>
+      <p:sp>
+        <p:nvSpPr>
+          <p:cNvPr id="3" name="Notes Placeholder 2"/>
+          <p:cNvSpPr>
+            <a:spLocks noGrp="1"/>
+          </p:cNvSpPr>
+          <p:nvPr>
+            <p:ph type="body" idx="1"/>
+          </p:nvPr>
+        </p:nvSpPr>
+        <p:spPr/>
+        <p:txBody>
+          <a:bodyPr/>
+          <a:lstStyle/>
+          <a:p>
+            <a:endParaRPr lang="en-US" dirty="0"/>
+          </a:p>
+        </p:txBody>
+      </p:sp>
+      <p:sp>
+        <p:nvSpPr>
+          <p:cNvPr id="4" name="Slide Number Placeholder 3"/>
+          <p:cNvSpPr>
+            <a:spLocks noGrp="1"/>
+          </p:cNvSpPr>
+          <p:nvPr>
+            <p:ph type="sldNum" sz="quarter" idx="5"/>
+          </p:nvPr>
+        </p:nvSpPr>
+        <p:spPr/>
+        <p:txBody>
+          <a:bodyPr/>
+          <a:lstStyle/>
+          <a:p>
+            <a:fld id="{292570D5-C374-43AE-876B-55C2A221664E}" type="slidenum">
+              <a:rPr lang="en-US" smtClean="0"/>
+              <a:t>23</a:t>
+            </a:fld>
+            <a:endParaRPr lang="en-US"/>
+          </a:p>
+        </p:txBody>
+      </p:sp>
+    </p:spTree>
+    <p:extLst>
+      <p:ext uri="{BB962C8B-B14F-4D97-AF65-F5344CB8AC3E}">
+        <p14:creationId xmlns:p14="http://schemas.microsoft.com/office/powerpoint/2010/main" val="3857445432"/>
+      </p:ext>
+    </p:extLst>
+  </p:cSld>
+  <p:clrMapOvr>
+    <a:masterClrMapping/>
+  </p:clrMapOvr>
+</p:notes>
+</file>
+
+<file path=ppt/notesSlides/notesSlide24.xml><?xml version="1.0" encoding="utf-8"?>
+<p:notes xmlns:a="http://schemas.openxmlformats.org/drawingml/2006/main" xmlns:r="http://schemas.openxmlformats.org/officeDocument/2006/relationships" xmlns:p="http://schemas.openxmlformats.org/presentationml/2006/main">
+  <p:cSld>
+    <p:spTree>
+      <p:nvGrpSpPr>
+        <p:cNvPr id="1" name=""/>
+        <p:cNvGrpSpPr/>
+        <p:nvPr/>
+      </p:nvGrpSpPr>
+      <p:grpSpPr>
+        <a:xfrm>
+          <a:off x="0" y="0"/>
+          <a:ext cx="0" cy="0"/>
+          <a:chOff x="0" y="0"/>
+          <a:chExt cx="0" cy="0"/>
+        </a:xfrm>
+      </p:grpSpPr>
+      <p:sp>
+        <p:nvSpPr>
+          <p:cNvPr id="2" name="Slide Image Placeholder 1"/>
+          <p:cNvSpPr>
+            <a:spLocks noGrp="1" noRot="1" noChangeAspect="1"/>
+          </p:cNvSpPr>
+          <p:nvPr>
+            <p:ph type="sldImg"/>
+          </p:nvPr>
+        </p:nvSpPr>
+        <p:spPr/>
+      </p:sp>
+      <p:sp>
+        <p:nvSpPr>
+          <p:cNvPr id="3" name="Notes Placeholder 2"/>
+          <p:cNvSpPr>
+            <a:spLocks noGrp="1"/>
+          </p:cNvSpPr>
+          <p:nvPr>
+            <p:ph type="body" idx="1"/>
+          </p:nvPr>
+        </p:nvSpPr>
+        <p:spPr/>
+        <p:txBody>
+          <a:bodyPr/>
+          <a:lstStyle/>
+          <a:p>
+            <a:endParaRPr lang="en-US" dirty="0"/>
+          </a:p>
+        </p:txBody>
+      </p:sp>
+      <p:sp>
+        <p:nvSpPr>
+          <p:cNvPr id="4" name="Slide Number Placeholder 3"/>
+          <p:cNvSpPr>
+            <a:spLocks noGrp="1"/>
+          </p:cNvSpPr>
+          <p:nvPr>
+            <p:ph type="sldNum" sz="quarter" idx="5"/>
+          </p:nvPr>
+        </p:nvSpPr>
+        <p:spPr/>
+        <p:txBody>
+          <a:bodyPr/>
+          <a:lstStyle/>
+          <a:p>
+            <a:fld id="{292570D5-C374-43AE-876B-55C2A221664E}" type="slidenum">
+              <a:rPr lang="en-US" smtClean="0"/>
+              <a:t>24</a:t>
+            </a:fld>
+            <a:endParaRPr lang="en-US"/>
+          </a:p>
+        </p:txBody>
+      </p:sp>
+    </p:spTree>
+    <p:extLst>
+      <p:ext uri="{BB962C8B-B14F-4D97-AF65-F5344CB8AC3E}">
+        <p14:creationId xmlns:p14="http://schemas.microsoft.com/office/powerpoint/2010/main" val="516859315"/>
+      </p:ext>
+    </p:extLst>
+  </p:cSld>
+  <p:clrMapOvr>
+    <a:masterClrMapping/>
+  </p:clrMapOvr>
+</p:notes>
+</file>
+
+<file path=ppt/notesSlides/notesSlide25.xml><?xml version="1.0" encoding="utf-8"?>
+<p:notes xmlns:a="http://schemas.openxmlformats.org/drawingml/2006/main" xmlns:r="http://schemas.openxmlformats.org/officeDocument/2006/relationships" xmlns:p="http://schemas.openxmlformats.org/presentationml/2006/main">
+  <p:cSld>
+    <p:spTree>
+      <p:nvGrpSpPr>
+        <p:cNvPr id="1" name=""/>
+        <p:cNvGrpSpPr/>
+        <p:nvPr/>
+      </p:nvGrpSpPr>
+      <p:grpSpPr>
+        <a:xfrm>
+          <a:off x="0" y="0"/>
+          <a:ext cx="0" cy="0"/>
+          <a:chOff x="0" y="0"/>
+          <a:chExt cx="0" cy="0"/>
+        </a:xfrm>
+      </p:grpSpPr>
+      <p:sp>
+        <p:nvSpPr>
+          <p:cNvPr id="2" name="Slide Image Placeholder 1"/>
+          <p:cNvSpPr>
+            <a:spLocks noGrp="1" noRot="1" noChangeAspect="1"/>
+          </p:cNvSpPr>
+          <p:nvPr>
+            <p:ph type="sldImg"/>
+          </p:nvPr>
+        </p:nvSpPr>
+        <p:spPr>
+          <a:xfrm>
+            <a:off x="381000" y="685800"/>
+            <a:ext cx="6096000" cy="3429000"/>
+          </a:xfrm>
+        </p:spPr>
+      </p:sp>
+      <p:sp>
+        <p:nvSpPr>
+          <p:cNvPr id="3" name="Notes Placeholder 2"/>
+          <p:cNvSpPr>
+            <a:spLocks noGrp="1"/>
+          </p:cNvSpPr>
+          <p:nvPr>
+            <p:ph type="body" idx="1"/>
+          </p:nvPr>
+        </p:nvSpPr>
+        <p:spPr/>
+        <p:txBody>
+          <a:bodyPr/>
+          <a:lstStyle/>
+          <a:p>
+            <a:r>
+              <a:rPr lang="en-US" dirty="0"/>
+              <a:t>15 min left</a:t>
+            </a:r>
+          </a:p>
+        </p:txBody>
+      </p:sp>
+      <p:sp>
+        <p:nvSpPr>
+          <p:cNvPr id="4" name="Slide Number Placeholder 3"/>
+          <p:cNvSpPr>
+            <a:spLocks noGrp="1"/>
+          </p:cNvSpPr>
+          <p:nvPr>
+            <p:ph type="sldNum" sz="quarter" idx="5"/>
+          </p:nvPr>
+        </p:nvSpPr>
+        <p:spPr/>
+        <p:txBody>
+          <a:bodyPr/>
+          <a:lstStyle/>
+          <a:p>
+            <a:fld id="{292570D5-C374-43AE-876B-55C2A221664E}" type="slidenum">
+              <a:rPr lang="en-US" smtClean="0"/>
+              <a:t>25</a:t>
+            </a:fld>
+            <a:endParaRPr lang="en-US"/>
+          </a:p>
+        </p:txBody>
+      </p:sp>
+    </p:spTree>
+    <p:extLst>
+      <p:ext uri="{BB962C8B-B14F-4D97-AF65-F5344CB8AC3E}">
+        <p14:creationId xmlns:p14="http://schemas.microsoft.com/office/powerpoint/2010/main" val="4004051242"/>
+      </p:ext>
+    </p:extLst>
+  </p:cSld>
+  <p:clrMapOvr>
+    <a:masterClrMapping/>
+  </p:clrMapOvr>
+</p:notes>
+</file>
+
+<file path=ppt/notesSlides/notesSlide26.xml><?xml version="1.0" encoding="utf-8"?>
+<p:notes xmlns:a="http://schemas.openxmlformats.org/drawingml/2006/main" xmlns:r="http://schemas.openxmlformats.org/officeDocument/2006/relationships" xmlns:p="http://schemas.openxmlformats.org/presentationml/2006/main">
+  <p:cSld>
+    <p:spTree>
+      <p:nvGrpSpPr>
+        <p:cNvPr id="1" name=""/>
+        <p:cNvGrpSpPr/>
+        <p:nvPr/>
+      </p:nvGrpSpPr>
+      <p:grpSpPr>
+        <a:xfrm>
+          <a:off x="0" y="0"/>
+          <a:ext cx="0" cy="0"/>
+          <a:chOff x="0" y="0"/>
+          <a:chExt cx="0" cy="0"/>
+        </a:xfrm>
+      </p:grpSpPr>
+      <p:sp>
+        <p:nvSpPr>
+          <p:cNvPr id="2" name="Slide Image Placeholder 1"/>
+          <p:cNvSpPr>
+            <a:spLocks noGrp="1" noRot="1" noChangeAspect="1"/>
+          </p:cNvSpPr>
+          <p:nvPr>
+            <p:ph type="sldImg"/>
+          </p:nvPr>
+        </p:nvSpPr>
+        <p:spPr>
+          <a:xfrm>
+            <a:off x="381000" y="685800"/>
+            <a:ext cx="6096000" cy="3429000"/>
+          </a:xfrm>
+        </p:spPr>
+      </p:sp>
+      <p:sp>
+        <p:nvSpPr>
+          <p:cNvPr id="3" name="Notes Placeholder 2"/>
+          <p:cNvSpPr>
+            <a:spLocks noGrp="1"/>
+          </p:cNvSpPr>
+          <p:nvPr>
+            <p:ph type="body" idx="1"/>
+          </p:nvPr>
+        </p:nvSpPr>
+        <p:spPr/>
+        <p:txBody>
+          <a:bodyPr/>
+          <a:lstStyle/>
+          <a:p>
+            <a:endParaRPr lang="en-US" dirty="0"/>
+          </a:p>
+        </p:txBody>
+      </p:sp>
+      <p:sp>
+        <p:nvSpPr>
+          <p:cNvPr id="4" name="Slide Number Placeholder 3"/>
+          <p:cNvSpPr>
+            <a:spLocks noGrp="1"/>
+          </p:cNvSpPr>
+          <p:nvPr>
+            <p:ph type="sldNum" sz="quarter" idx="5"/>
+          </p:nvPr>
+        </p:nvSpPr>
+        <p:spPr/>
+        <p:txBody>
+          <a:bodyPr/>
+          <a:lstStyle/>
+          <a:p>
+            <a:fld id="{292570D5-C374-43AE-876B-55C2A221664E}" type="slidenum">
+              <a:rPr lang="en-US" smtClean="0"/>
+              <a:t>26</a:t>
+            </a:fld>
+            <a:endParaRPr lang="en-US"/>
+          </a:p>
+        </p:txBody>
+      </p:sp>
+    </p:spTree>
+    <p:extLst>
+      <p:ext uri="{BB962C8B-B14F-4D97-AF65-F5344CB8AC3E}">
+        <p14:creationId xmlns:p14="http://schemas.microsoft.com/office/powerpoint/2010/main" val="1300406290"/>
+      </p:ext>
+    </p:extLst>
+  </p:cSld>
+  <p:clrMapOvr>
+    <a:masterClrMapping/>
+  </p:clrMapOvr>
+</p:notes>
+</file>
+
+<file path=ppt/notesSlides/notesSlide27.xml><?xml version="1.0" encoding="utf-8"?>
+<p:notes xmlns:a="http://schemas.openxmlformats.org/drawingml/2006/main" xmlns:r="http://schemas.openxmlformats.org/officeDocument/2006/relationships" xmlns:p="http://schemas.openxmlformats.org/presentationml/2006/main">
+  <p:cSld>
+    <p:spTree>
+      <p:nvGrpSpPr>
+        <p:cNvPr id="1" name=""/>
+        <p:cNvGrpSpPr/>
+        <p:nvPr/>
+      </p:nvGrpSpPr>
+      <p:grpSpPr>
+        <a:xfrm>
+          <a:off x="0" y="0"/>
+          <a:ext cx="0" cy="0"/>
+          <a:chOff x="0" y="0"/>
+          <a:chExt cx="0" cy="0"/>
+        </a:xfrm>
+      </p:grpSpPr>
+      <p:sp>
+        <p:nvSpPr>
+          <p:cNvPr id="2" name="Slide Image Placeholder 1"/>
+          <p:cNvSpPr>
+            <a:spLocks noGrp="1" noRot="1" noChangeAspect="1"/>
+          </p:cNvSpPr>
+          <p:nvPr>
+            <p:ph type="sldImg"/>
+          </p:nvPr>
+        </p:nvSpPr>
+        <p:spPr>
+          <a:xfrm>
+            <a:off x="381000" y="685800"/>
+            <a:ext cx="6096000" cy="3429000"/>
+          </a:xfrm>
+        </p:spPr>
+      </p:sp>
+      <p:sp>
+        <p:nvSpPr>
+          <p:cNvPr id="3" name="Notes Placeholder 2"/>
+          <p:cNvSpPr>
+            <a:spLocks noGrp="1"/>
+          </p:cNvSpPr>
+          <p:nvPr>
+            <p:ph type="body" idx="1"/>
+          </p:nvPr>
+        </p:nvSpPr>
+        <p:spPr/>
+        <p:txBody>
+          <a:bodyPr/>
+          <a:lstStyle/>
+          <a:p>
+            <a:endParaRPr lang="en-US" dirty="0"/>
+          </a:p>
+        </p:txBody>
+      </p:sp>
+      <p:sp>
+        <p:nvSpPr>
+          <p:cNvPr id="4" name="Slide Number Placeholder 3"/>
+          <p:cNvSpPr>
+            <a:spLocks noGrp="1"/>
+          </p:cNvSpPr>
+          <p:nvPr>
+            <p:ph type="sldNum" sz="quarter" idx="10"/>
+          </p:nvPr>
+        </p:nvSpPr>
+        <p:spPr/>
+        <p:txBody>
+          <a:bodyPr/>
+          <a:lstStyle/>
+          <a:p>
+            <a:pPr>
+              <a:defRPr/>
+            </a:pPr>
+            <a:fld id="{9BF26720-795C-40C0-8D4A-669747B4E216}" type="slidenum">
+              <a:rPr lang="en-US" altLang="en-US" smtClean="0"/>
+              <a:pPr>
+                <a:defRPr/>
+              </a:pPr>
+              <a:t>28</a:t>
+            </a:fld>
+            <a:endParaRPr lang="en-US" altLang="en-US" dirty="0"/>
+          </a:p>
+        </p:txBody>
+      </p:sp>
+    </p:spTree>
+    <p:extLst>
+      <p:ext uri="{BB962C8B-B14F-4D97-AF65-F5344CB8AC3E}">
+        <p14:creationId xmlns:p14="http://schemas.microsoft.com/office/powerpoint/2010/main" val="2218293498"/>
+      </p:ext>
+    </p:extLst>
+  </p:cSld>
+  <p:clrMapOvr>
+    <a:masterClrMapping/>
+  </p:clrMapOvr>
+</p:notes>
+</file>
+
+<file path=ppt/notesSlides/notesSlide3.xml><?xml version="1.0" encoding="utf-8"?>
+<p:notes xmlns:a="http://schemas.openxmlformats.org/drawingml/2006/main" xmlns:r="http://schemas.openxmlformats.org/officeDocument/2006/relationships" xmlns:p="http://schemas.openxmlformats.org/presentationml/2006/main">
+  <p:cSld>
+    <p:spTree>
+      <p:nvGrpSpPr>
+        <p:cNvPr id="1" name="">
+          <a:extLst>
+            <a:ext uri="{FF2B5EF4-FFF2-40B4-BE49-F238E27FC236}">
+              <a16:creationId xmlns:a16="http://schemas.microsoft.com/office/drawing/2014/main" id="{9809D1F0-1663-A3D8-D3FE-0F12D34ACBA0}"/>
+            </a:ext>
+          </a:extLst>
+        </p:cNvPr>
+        <p:cNvGrpSpPr/>
+        <p:nvPr/>
+      </p:nvGrpSpPr>
+      <p:grpSpPr>
+        <a:xfrm>
+          <a:off x="0" y="0"/>
+          <a:ext cx="0" cy="0"/>
+          <a:chOff x="0" y="0"/>
+          <a:chExt cx="0" cy="0"/>
+        </a:xfrm>
+      </p:grpSpPr>
+      <p:sp>
+        <p:nvSpPr>
+          <p:cNvPr id="2" name="Slide Image Placeholder 1">
+            <a:extLst>
+              <a:ext uri="{FF2B5EF4-FFF2-40B4-BE49-F238E27FC236}">
+                <a16:creationId xmlns:a16="http://schemas.microsoft.com/office/drawing/2014/main" id="{C920AA97-E26C-EE77-4301-B8C008CE3EB9}"/>
+              </a:ext>
+            </a:extLst>
+          </p:cNvPr>
+          <p:cNvSpPr>
+            <a:spLocks noGrp="1" noRot="1" noChangeAspect="1"/>
+          </p:cNvSpPr>
+          <p:nvPr>
+            <p:ph type="sldImg"/>
+          </p:nvPr>
+        </p:nvSpPr>
+        <p:spPr>
+          <a:xfrm>
+            <a:off x="381000" y="685800"/>
+            <a:ext cx="6096000" cy="3429000"/>
+          </a:xfrm>
+        </p:spPr>
+      </p:sp>
+      <p:sp>
+        <p:nvSpPr>
+          <p:cNvPr id="3" name="Notes Placeholder 2">
+            <a:extLst>
+              <a:ext uri="{FF2B5EF4-FFF2-40B4-BE49-F238E27FC236}">
+                <a16:creationId xmlns:a16="http://schemas.microsoft.com/office/drawing/2014/main" id="{493BA083-2E5E-7639-557D-28E277AD2F6D}"/>
+              </a:ext>
+            </a:extLst>
+          </p:cNvPr>
+          <p:cNvSpPr>
+            <a:spLocks noGrp="1"/>
+          </p:cNvSpPr>
+          <p:nvPr>
+            <p:ph type="body" idx="1"/>
+          </p:nvPr>
+        </p:nvSpPr>
+        <p:spPr/>
+        <p:txBody>
+          <a:bodyPr/>
+          <a:lstStyle/>
+          <a:p>
+            <a:endParaRPr lang="en-US" dirty="0"/>
+          </a:p>
+        </p:txBody>
+      </p:sp>
+      <p:sp>
+        <p:nvSpPr>
+          <p:cNvPr id="4" name="Slide Number Placeholder 3">
+            <a:extLst>
+              <a:ext uri="{FF2B5EF4-FFF2-40B4-BE49-F238E27FC236}">
+                <a16:creationId xmlns:a16="http://schemas.microsoft.com/office/drawing/2014/main" id="{56A4E88A-61CA-05F5-DA63-0ABF75293206}"/>
+              </a:ext>
+            </a:extLst>
+          </p:cNvPr>
+          <p:cNvSpPr>
+            <a:spLocks noGrp="1"/>
+          </p:cNvSpPr>
+          <p:nvPr>
+            <p:ph type="sldNum" sz="quarter" idx="5"/>
+          </p:nvPr>
+        </p:nvSpPr>
+        <p:spPr/>
+        <p:txBody>
+          <a:bodyPr/>
+          <a:lstStyle/>
+          <a:p>
+            <a:fld id="{292570D5-C374-43AE-876B-55C2A221664E}" type="slidenum">
+              <a:rPr lang="en-US" smtClean="0"/>
+              <a:t>3</a:t>
+            </a:fld>
+            <a:endParaRPr lang="en-US"/>
+          </a:p>
+        </p:txBody>
+      </p:sp>
+    </p:spTree>
+    <p:extLst>
+      <p:ext uri="{BB962C8B-B14F-4D97-AF65-F5344CB8AC3E}">
+        <p14:creationId xmlns:p14="http://schemas.microsoft.com/office/powerpoint/2010/main" val="2796393908"/>
+      </p:ext>
+    </p:extLst>
+  </p:cSld>
+  <p:clrMapOvr>
+    <a:masterClrMapping/>
+  </p:clrMapOvr>
+</p:notes>
+</file>
+
+<file path=ppt/notesSlides/notesSlide4.xml><?xml version="1.0" encoding="utf-8"?>
+<p:notes xmlns:a="http://schemas.openxmlformats.org/drawingml/2006/main" xmlns:r="http://schemas.openxmlformats.org/officeDocument/2006/relationships" xmlns:p="http://schemas.openxmlformats.org/presentationml/2006/main">
+  <p:cSld>
+    <p:spTree>
+      <p:nvGrpSpPr>
+        <p:cNvPr id="1" name="">
+          <a:extLst>
+            <a:ext uri="{FF2B5EF4-FFF2-40B4-BE49-F238E27FC236}">
+              <a16:creationId xmlns:a16="http://schemas.microsoft.com/office/drawing/2014/main" id="{1CD64719-007A-9D20-6D43-3A4FCAADACE1}"/>
+            </a:ext>
+          </a:extLst>
+        </p:cNvPr>
+        <p:cNvGrpSpPr/>
+        <p:nvPr/>
+      </p:nvGrpSpPr>
+      <p:grpSpPr>
+        <a:xfrm>
+          <a:off x="0" y="0"/>
+          <a:ext cx="0" cy="0"/>
+          <a:chOff x="0" y="0"/>
+          <a:chExt cx="0" cy="0"/>
+        </a:xfrm>
+      </p:grpSpPr>
+      <p:sp>
+        <p:nvSpPr>
+          <p:cNvPr id="2" name="Slide Image Placeholder 1">
+            <a:extLst>
+              <a:ext uri="{FF2B5EF4-FFF2-40B4-BE49-F238E27FC236}">
+                <a16:creationId xmlns:a16="http://schemas.microsoft.com/office/drawing/2014/main" id="{E432F23C-3B6C-06AD-FDEF-F55DEF812C1E}"/>
+              </a:ext>
+            </a:extLst>
+          </p:cNvPr>
+          <p:cNvSpPr>
+            <a:spLocks noGrp="1" noRot="1" noChangeAspect="1"/>
+          </p:cNvSpPr>
+          <p:nvPr>
+            <p:ph type="sldImg"/>
+          </p:nvPr>
+        </p:nvSpPr>
+        <p:spPr>
+          <a:xfrm>
+            <a:off x="381000" y="685800"/>
+            <a:ext cx="6096000" cy="3429000"/>
+          </a:xfrm>
+        </p:spPr>
+      </p:sp>
+      <p:sp>
+        <p:nvSpPr>
+          <p:cNvPr id="3" name="Notes Placeholder 2">
+            <a:extLst>
+              <a:ext uri="{FF2B5EF4-FFF2-40B4-BE49-F238E27FC236}">
+                <a16:creationId xmlns:a16="http://schemas.microsoft.com/office/drawing/2014/main" id="{0784E9A6-CB51-3C7D-DF18-0DDEC1AC4207}"/>
+              </a:ext>
+            </a:extLst>
+          </p:cNvPr>
+          <p:cNvSpPr>
+            <a:spLocks noGrp="1"/>
+          </p:cNvSpPr>
+          <p:nvPr>
+            <p:ph type="body" idx="1"/>
+          </p:nvPr>
+        </p:nvSpPr>
+        <p:spPr/>
+        <p:txBody>
+          <a:bodyPr/>
+          <a:lstStyle/>
+          <a:p>
+            <a:endParaRPr lang="en-US" dirty="0"/>
+          </a:p>
+        </p:txBody>
+      </p:sp>
+      <p:sp>
+        <p:nvSpPr>
+          <p:cNvPr id="4" name="Slide Number Placeholder 3">
+            <a:extLst>
+              <a:ext uri="{FF2B5EF4-FFF2-40B4-BE49-F238E27FC236}">
+                <a16:creationId xmlns:a16="http://schemas.microsoft.com/office/drawing/2014/main" id="{D045C7A3-AEE3-A283-A203-B801AB559F92}"/>
+              </a:ext>
+            </a:extLst>
+          </p:cNvPr>
+          <p:cNvSpPr>
+            <a:spLocks noGrp="1"/>
+          </p:cNvSpPr>
+          <p:nvPr>
+            <p:ph type="sldNum" sz="quarter" idx="5"/>
+          </p:nvPr>
+        </p:nvSpPr>
+        <p:spPr/>
+        <p:txBody>
+          <a:bodyPr/>
+          <a:lstStyle/>
+          <a:p>
+            <a:fld id="{292570D5-C374-43AE-876B-55C2A221664E}" type="slidenum">
+              <a:rPr lang="en-US" smtClean="0"/>
+              <a:t>4</a:t>
+            </a:fld>
+            <a:endParaRPr lang="en-US"/>
+          </a:p>
+        </p:txBody>
+      </p:sp>
+    </p:spTree>
+    <p:extLst>
+      <p:ext uri="{BB962C8B-B14F-4D97-AF65-F5344CB8AC3E}">
+        <p14:creationId xmlns:p14="http://schemas.microsoft.com/office/powerpoint/2010/main" val="2731214060"/>
+      </p:ext>
+    </p:extLst>
+  </p:cSld>
+  <p:clrMapOvr>
+    <a:masterClrMapping/>
+  </p:clrMapOvr>
+</p:notes>
+</file>
+
+<file path=ppt/notesSlides/notesSlide5.xml><?xml version="1.0" encoding="utf-8"?>
+<p:notes xmlns:a="http://schemas.openxmlformats.org/drawingml/2006/main" xmlns:r="http://schemas.openxmlformats.org/officeDocument/2006/relationships" xmlns:p="http://schemas.openxmlformats.org/presentationml/2006/main">
+  <p:cSld>
+    <p:spTree>
+      <p:nvGrpSpPr>
+        <p:cNvPr id="1" name="">
+          <a:extLst>
+            <a:ext uri="{FF2B5EF4-FFF2-40B4-BE49-F238E27FC236}">
+              <a16:creationId xmlns:a16="http://schemas.microsoft.com/office/drawing/2014/main" id="{8F7FD7E6-9378-263A-EC10-412A02CBCEE0}"/>
+            </a:ext>
+          </a:extLst>
+        </p:cNvPr>
+        <p:cNvGrpSpPr/>
+        <p:nvPr/>
+      </p:nvGrpSpPr>
+      <p:grpSpPr>
+        <a:xfrm>
+          <a:off x="0" y="0"/>
+          <a:ext cx="0" cy="0"/>
+          <a:chOff x="0" y="0"/>
+          <a:chExt cx="0" cy="0"/>
+        </a:xfrm>
+      </p:grpSpPr>
+      <p:sp>
+        <p:nvSpPr>
+          <p:cNvPr id="2" name="Slide Image Placeholder 1">
+            <a:extLst>
+              <a:ext uri="{FF2B5EF4-FFF2-40B4-BE49-F238E27FC236}">
+                <a16:creationId xmlns:a16="http://schemas.microsoft.com/office/drawing/2014/main" id="{143A103B-85B0-E208-6061-CF80516F0A45}"/>
+              </a:ext>
+            </a:extLst>
+          </p:cNvPr>
+          <p:cNvSpPr>
+            <a:spLocks noGrp="1" noRot="1" noChangeAspect="1"/>
+          </p:cNvSpPr>
+          <p:nvPr>
+            <p:ph type="sldImg"/>
+          </p:nvPr>
+        </p:nvSpPr>
+        <p:spPr>
+          <a:xfrm>
+            <a:off x="381000" y="685800"/>
+            <a:ext cx="6096000" cy="3429000"/>
+          </a:xfrm>
+        </p:spPr>
+      </p:sp>
+      <p:sp>
+        <p:nvSpPr>
+          <p:cNvPr id="3" name="Notes Placeholder 2">
+            <a:extLst>
+              <a:ext uri="{FF2B5EF4-FFF2-40B4-BE49-F238E27FC236}">
+                <a16:creationId xmlns:a16="http://schemas.microsoft.com/office/drawing/2014/main" id="{448FB0F2-B5C0-3ABE-C3C6-2B1D8239830F}"/>
+              </a:ext>
+            </a:extLst>
+          </p:cNvPr>
+          <p:cNvSpPr>
+            <a:spLocks noGrp="1"/>
+          </p:cNvSpPr>
+          <p:nvPr>
+            <p:ph type="body" idx="1"/>
+          </p:nvPr>
+        </p:nvSpPr>
+        <p:spPr/>
+        <p:txBody>
+          <a:bodyPr/>
+          <a:lstStyle/>
+          <a:p>
+            <a:endParaRPr lang="en-US" dirty="0"/>
+          </a:p>
+        </p:txBody>
+      </p:sp>
+      <p:sp>
+        <p:nvSpPr>
+          <p:cNvPr id="4" name="Slide Number Placeholder 3">
+            <a:extLst>
+              <a:ext uri="{FF2B5EF4-FFF2-40B4-BE49-F238E27FC236}">
+                <a16:creationId xmlns:a16="http://schemas.microsoft.com/office/drawing/2014/main" id="{9D06EB43-F4ED-79BD-FD95-5B1538063BFA}"/>
+              </a:ext>
+            </a:extLst>
+          </p:cNvPr>
+          <p:cNvSpPr>
+            <a:spLocks noGrp="1"/>
+          </p:cNvSpPr>
+          <p:nvPr>
+            <p:ph type="sldNum" sz="quarter" idx="5"/>
+          </p:nvPr>
+        </p:nvSpPr>
+        <p:spPr/>
+        <p:txBody>
+          <a:bodyPr/>
+          <a:lstStyle/>
+          <a:p>
+            <a:fld id="{292570D5-C374-43AE-876B-55C2A221664E}" type="slidenum">
+              <a:rPr lang="en-US" smtClean="0"/>
+              <a:t>5</a:t>
+            </a:fld>
+            <a:endParaRPr lang="en-US"/>
+          </a:p>
+        </p:txBody>
+      </p:sp>
+    </p:spTree>
+    <p:extLst>
+      <p:ext uri="{BB962C8B-B14F-4D97-AF65-F5344CB8AC3E}">
+        <p14:creationId xmlns:p14="http://schemas.microsoft.com/office/powerpoint/2010/main" val="4052764927"/>
+      </p:ext>
+    </p:extLst>
+  </p:cSld>
+  <p:clrMapOvr>
+    <a:masterClrMapping/>
+  </p:clrMapOvr>
+</p:notes>
+</file>
+
+<file path=ppt/notesSlides/notesSlide6.xml><?xml version="1.0" encoding="utf-8"?>
+<p:notes xmlns:a="http://schemas.openxmlformats.org/drawingml/2006/main" xmlns:r="http://schemas.openxmlformats.org/officeDocument/2006/relationships" xmlns:p="http://schemas.openxmlformats.org/presentationml/2006/main" showMasterSp="0" showMasterPhAnim="0">
+  <p:cSld>
+    <p:spTree>
+      <p:nvGrpSpPr>
+        <p:cNvPr id="1" name="Shape 56"/>
+        <p:cNvGrpSpPr/>
+        <p:nvPr/>
+      </p:nvGrpSpPr>
+      <p:grpSpPr>
+        <a:xfrm>
+          <a:off x="0" y="0"/>
+          <a:ext cx="0" cy="0"/>
+          <a:chOff x="0" y="0"/>
+          <a:chExt cx="0" cy="0"/>
+        </a:xfrm>
+      </p:grpSpPr>
+      <p:sp>
+        <p:nvSpPr>
+          <p:cNvPr id="57" name="Google Shape;57;g37105969b97_0_0:notes"/>
+          <p:cNvSpPr>
+            <a:spLocks noGrp="1" noRot="1" noChangeAspect="1"/>
+          </p:cNvSpPr>
+          <p:nvPr>
+            <p:ph type="sldImg" idx="2"/>
+          </p:nvPr>
+        </p:nvSpPr>
+        <p:spPr>
+          <a:xfrm>
+            <a:off x="381000" y="685800"/>
+            <a:ext cx="6096000" cy="3429000"/>
+          </a:xfrm>
+          <a:custGeom>
+            <a:avLst/>
+            <a:gdLst/>
+            <a:ahLst/>
+            <a:cxnLst/>
+            <a:rect l="l" t="t" r="r" b="b"/>
+            <a:pathLst>
+              <a:path w="120000" h="120000" extrusionOk="0">
+                <a:moveTo>
+                  <a:pt x="0" y="0"/>
+                </a:moveTo>
+                <a:lnTo>
+                  <a:pt x="120000" y="0"/>
+                </a:lnTo>
+                <a:lnTo>
+                  <a:pt x="120000" y="120000"/>
+                </a:lnTo>
+                <a:lnTo>
+                  <a:pt x="0" y="120000"/>
+                </a:lnTo>
+                <a:close/>
+              </a:path>
+            </a:pathLst>
+          </a:custGeom>
+        </p:spPr>
+      </p:sp>
+      <p:sp>
+        <p:nvSpPr>
+          <p:cNvPr id="58" name="Google Shape;58;g37105969b97_0_0:notes"/>
+          <p:cNvSpPr txBox="1">
+            <a:spLocks noGrp="1"/>
+          </p:cNvSpPr>
+          <p:nvPr>
+            <p:ph type="body" idx="1"/>
+          </p:nvPr>
+        </p:nvSpPr>
+        <p:spPr>
+          <a:xfrm>
+            <a:off x="685800" y="4343400"/>
+            <a:ext cx="5486400" cy="4114800"/>
+          </a:xfrm>
+          <a:prstGeom prst="rect">
+            <a:avLst/>
+          </a:prstGeom>
+        </p:spPr>
+        <p:txBody>
+          <a:bodyPr spcFirstLastPara="1" wrap="square" lIns="91425" tIns="91425" rIns="91425" bIns="91425" anchor="t" anchorCtr="0">
+            <a:noAutofit/>
+          </a:bodyPr>
+          <a:lstStyle/>
+          <a:p>
+            <a:pPr marL="0" lvl="0" indent="0" algn="l" rtl="0">
+              <a:spcBef>
+                <a:spcPts val="0"/>
+              </a:spcBef>
+              <a:spcAft>
+                <a:spcPts val="0"/>
+              </a:spcAft>
+              <a:buNone/>
+            </a:pPr>
+            <a:endParaRPr/>
+          </a:p>
+        </p:txBody>
+      </p:sp>
+    </p:spTree>
+  </p:cSld>
+  <p:clrMapOvr>
+    <a:masterClrMapping/>
+  </p:clrMapOvr>
+</p:notes>
+</file>
+
+<file path=ppt/notesSlides/notesSlide7.xml><?xml version="1.0" encoding="utf-8"?>
+<p:notes xmlns:a="http://schemas.openxmlformats.org/drawingml/2006/main" xmlns:r="http://schemas.openxmlformats.org/officeDocument/2006/relationships" xmlns:p="http://schemas.openxmlformats.org/presentationml/2006/main" showMasterSp="0" showMasterPhAnim="0">
+  <p:cSld>
+    <p:spTree>
+      <p:nvGrpSpPr>
+        <p:cNvPr id="1" name="Shape 61"/>
+        <p:cNvGrpSpPr/>
+        <p:nvPr/>
+      </p:nvGrpSpPr>
+      <p:grpSpPr>
+        <a:xfrm>
+          <a:off x="0" y="0"/>
+          <a:ext cx="0" cy="0"/>
+          <a:chOff x="0" y="0"/>
+          <a:chExt cx="0" cy="0"/>
+        </a:xfrm>
+      </p:grpSpPr>
+      <p:sp>
+        <p:nvSpPr>
+          <p:cNvPr id="62" name="Google Shape;62;g37105969b97_1_0:notes"/>
+          <p:cNvSpPr>
+            <a:spLocks noGrp="1" noRot="1" noChangeAspect="1"/>
+          </p:cNvSpPr>
+          <p:nvPr>
+            <p:ph type="sldImg" idx="2"/>
+          </p:nvPr>
+        </p:nvSpPr>
+        <p:spPr>
+          <a:xfrm>
+            <a:off x="381300" y="685800"/>
+            <a:ext cx="6096000" cy="3429000"/>
+          </a:xfrm>
+          <a:custGeom>
+            <a:avLst/>
+            <a:gdLst/>
+            <a:ahLst/>
+            <a:cxnLst/>
+            <a:rect l="l" t="t" r="r" b="b"/>
+            <a:pathLst>
+              <a:path w="120000" h="120000" extrusionOk="0">
+                <a:moveTo>
+                  <a:pt x="0" y="0"/>
+                </a:moveTo>
+                <a:lnTo>
+                  <a:pt x="120000" y="0"/>
+                </a:lnTo>
+                <a:lnTo>
+                  <a:pt x="120000" y="120000"/>
+                </a:lnTo>
+                <a:lnTo>
+                  <a:pt x="0" y="120000"/>
+                </a:lnTo>
+                <a:close/>
+              </a:path>
+            </a:pathLst>
+          </a:custGeom>
+        </p:spPr>
+      </p:sp>
+      <p:sp>
+        <p:nvSpPr>
+          <p:cNvPr id="63" name="Google Shape;63;g37105969b97_1_0:notes"/>
+          <p:cNvSpPr txBox="1">
+            <a:spLocks noGrp="1"/>
+          </p:cNvSpPr>
+          <p:nvPr>
+            <p:ph type="body" idx="1"/>
+          </p:nvPr>
+        </p:nvSpPr>
+        <p:spPr>
+          <a:xfrm>
+            <a:off x="685800" y="4343400"/>
+            <a:ext cx="5486400" cy="4114800"/>
+          </a:xfrm>
+          <a:prstGeom prst="rect">
+            <a:avLst/>
+          </a:prstGeom>
+        </p:spPr>
+        <p:txBody>
+          <a:bodyPr spcFirstLastPara="1" wrap="square" lIns="91425" tIns="91425" rIns="91425" bIns="91425" anchor="t" anchorCtr="0">
+            <a:noAutofit/>
+          </a:bodyPr>
+          <a:lstStyle/>
+          <a:p>
+            <a:pPr marL="0" lvl="0" indent="0" algn="l" rtl="0">
+              <a:spcBef>
+                <a:spcPts val="0"/>
+              </a:spcBef>
+              <a:spcAft>
+                <a:spcPts val="0"/>
+              </a:spcAft>
+              <a:buNone/>
+            </a:pPr>
+            <a:endParaRPr/>
+          </a:p>
+        </p:txBody>
+      </p:sp>
+    </p:spTree>
+  </p:cSld>
+  <p:clrMapOvr>
+    <a:masterClrMapping/>
+  </p:clrMapOvr>
+</p:notes>
+</file>
+
+<file path=ppt/notesSlides/notesSlide8.xml><?xml version="1.0" encoding="utf-8"?>
+<p:notes xmlns:a="http://schemas.openxmlformats.org/drawingml/2006/main" xmlns:r="http://schemas.openxmlformats.org/officeDocument/2006/relationships" xmlns:p="http://schemas.openxmlformats.org/presentationml/2006/main">
+  <p:cSld>
+    <p:spTree>
+      <p:nvGrpSpPr>
+        <p:cNvPr id="1" name="">
+          <a:extLst>
+            <a:ext uri="{FF2B5EF4-FFF2-40B4-BE49-F238E27FC236}">
+              <a16:creationId xmlns:a16="http://schemas.microsoft.com/office/drawing/2014/main" id="{6CF3D38C-9460-DC53-88CA-B5F165B61144}"/>
+            </a:ext>
+          </a:extLst>
+        </p:cNvPr>
+        <p:cNvGrpSpPr/>
+        <p:nvPr/>
+      </p:nvGrpSpPr>
+      <p:grpSpPr>
+        <a:xfrm>
+          <a:off x="0" y="0"/>
+          <a:ext cx="0" cy="0"/>
+          <a:chOff x="0" y="0"/>
+          <a:chExt cx="0" cy="0"/>
+        </a:xfrm>
+      </p:grpSpPr>
+      <p:sp>
+        <p:nvSpPr>
+          <p:cNvPr id="2" name="Slide Image Placeholder 1">
+            <a:extLst>
+              <a:ext uri="{FF2B5EF4-FFF2-40B4-BE49-F238E27FC236}">
+                <a16:creationId xmlns:a16="http://schemas.microsoft.com/office/drawing/2014/main" id="{6445B4D7-B5DA-2852-3424-CEE824E4DD88}"/>
+              </a:ext>
+            </a:extLst>
+          </p:cNvPr>
+          <p:cNvSpPr>
+            <a:spLocks noGrp="1" noRot="1" noChangeAspect="1"/>
+          </p:cNvSpPr>
+          <p:nvPr>
+            <p:ph type="sldImg"/>
+          </p:nvPr>
+        </p:nvSpPr>
+        <p:spPr>
+          <a:xfrm>
+            <a:off x="381000" y="685800"/>
+            <a:ext cx="6096000" cy="3429000"/>
+          </a:xfrm>
+        </p:spPr>
+      </p:sp>
+      <p:sp>
+        <p:nvSpPr>
+          <p:cNvPr id="3" name="Notes Placeholder 2">
+            <a:extLst>
+              <a:ext uri="{FF2B5EF4-FFF2-40B4-BE49-F238E27FC236}">
+                <a16:creationId xmlns:a16="http://schemas.microsoft.com/office/drawing/2014/main" id="{4A32141D-8E9C-DC88-7E8E-758B8BA5E8C7}"/>
+              </a:ext>
+            </a:extLst>
+          </p:cNvPr>
+          <p:cNvSpPr>
+            <a:spLocks noGrp="1"/>
+          </p:cNvSpPr>
+          <p:nvPr>
+            <p:ph type="body" idx="1"/>
+          </p:nvPr>
+        </p:nvSpPr>
+        <p:spPr/>
+        <p:txBody>
+          <a:bodyPr/>
+          <a:lstStyle/>
+          <a:p>
+            <a:endParaRPr lang="en-US" dirty="0"/>
+          </a:p>
+        </p:txBody>
+      </p:sp>
+      <p:sp>
+        <p:nvSpPr>
+          <p:cNvPr id="4" name="Slide Number Placeholder 3">
+            <a:extLst>
+              <a:ext uri="{FF2B5EF4-FFF2-40B4-BE49-F238E27FC236}">
+                <a16:creationId xmlns:a16="http://schemas.microsoft.com/office/drawing/2014/main" id="{81A42DEA-2D46-9CFD-2B4F-AFF7E8D3C9BB}"/>
+              </a:ext>
+            </a:extLst>
+          </p:cNvPr>
+          <p:cNvSpPr>
+            <a:spLocks noGrp="1"/>
+          </p:cNvSpPr>
+          <p:nvPr>
+            <p:ph type="sldNum" sz="quarter" idx="5"/>
+          </p:nvPr>
+        </p:nvSpPr>
+        <p:spPr/>
+        <p:txBody>
+          <a:bodyPr/>
+          <a:lstStyle/>
+          <a:p>
+            <a:fld id="{292570D5-C374-43AE-876B-55C2A221664E}" type="slidenum">
+              <a:rPr lang="en-US" smtClean="0"/>
+              <a:t>8</a:t>
+            </a:fld>
+            <a:endParaRPr lang="en-US"/>
+          </a:p>
+        </p:txBody>
+      </p:sp>
+    </p:spTree>
+    <p:extLst>
+      <p:ext uri="{BB962C8B-B14F-4D97-AF65-F5344CB8AC3E}">
+        <p14:creationId xmlns:p14="http://schemas.microsoft.com/office/powerpoint/2010/main" val="3132268845"/>
+      </p:ext>
+    </p:extLst>
+  </p:cSld>
+  <p:clrMapOvr>
+    <a:masterClrMapping/>
+  </p:clrMapOvr>
+</p:notes>
+</file>
+
+<file path=ppt/notesSlides/notesSlide9.xml><?xml version="1.0" encoding="utf-8"?>
+<p:notes xmlns:a="http://schemas.openxmlformats.org/drawingml/2006/main" xmlns:r="http://schemas.openxmlformats.org/officeDocument/2006/relationships" xmlns:p="http://schemas.openxmlformats.org/presentationml/2006/main">
+  <p:cSld>
+    <p:spTree>
+      <p:nvGrpSpPr>
+        <p:cNvPr id="1" name=""/>
+        <p:cNvGrpSpPr/>
+        <p:nvPr/>
+      </p:nvGrpSpPr>
+      <p:grpSpPr>
+        <a:xfrm>
+          <a:off x="0" y="0"/>
+          <a:ext cx="0" cy="0"/>
+          <a:chOff x="0" y="0"/>
+          <a:chExt cx="0" cy="0"/>
+        </a:xfrm>
+      </p:grpSpPr>
+      <p:sp>
+        <p:nvSpPr>
+          <p:cNvPr id="2" name="Slide Image Placeholder 1"/>
+          <p:cNvSpPr>
+            <a:spLocks noGrp="1" noRot="1" noChangeAspect="1"/>
+          </p:cNvSpPr>
+          <p:nvPr>
+            <p:ph type="sldImg"/>
+          </p:nvPr>
+        </p:nvSpPr>
+        <p:spPr>
+          <a:xfrm>
+            <a:off x="381000" y="685800"/>
+            <a:ext cx="6096000" cy="3429000"/>
+          </a:xfrm>
+        </p:spPr>
+      </p:sp>
+      <p:sp>
+        <p:nvSpPr>
+          <p:cNvPr id="3" name="Notes Placeholder 2"/>
+          <p:cNvSpPr>
+            <a:spLocks noGrp="1"/>
+          </p:cNvSpPr>
+          <p:nvPr>
+            <p:ph type="body" idx="1"/>
+          </p:nvPr>
+        </p:nvSpPr>
+        <p:spPr/>
+        <p:txBody>
+          <a:bodyPr>
+            <a:normAutofit/>
+          </a:bodyPr>
+          <a:lstStyle/>
+          <a:p>
+            <a:endParaRPr lang="en-US" dirty="0"/>
+          </a:p>
+        </p:txBody>
+      </p:sp>
+      <p:sp>
+        <p:nvSpPr>
+          <p:cNvPr id="4" name="Slide Number Placeholder 3"/>
+          <p:cNvSpPr>
+            <a:spLocks noGrp="1"/>
+          </p:cNvSpPr>
+          <p:nvPr>
+            <p:ph type="sldNum" sz="quarter" idx="5"/>
+          </p:nvPr>
+        </p:nvSpPr>
+        <p:spPr/>
+        <p:txBody>
+          <a:bodyPr/>
+          <a:lstStyle/>
+          <a:p>
+            <a:pPr>
+              <a:defRPr/>
+            </a:pPr>
+            <a:fld id="{18B4ECCA-5441-478E-8672-6AB21BB71BD9}" type="slidenum">
+              <a:rPr lang="en-US" altLang="en-US" smtClean="0"/>
+              <a:pPr>
+                <a:defRPr/>
+              </a:pPr>
+              <a:t>9</a:t>
+            </a:fld>
+            <a:endParaRPr lang="en-US" altLang="en-US"/>
+          </a:p>
+        </p:txBody>
+      </p:sp>
+    </p:spTree>
+    <p:extLst>
+      <p:ext uri="{BB962C8B-B14F-4D97-AF65-F5344CB8AC3E}">
+        <p14:creationId xmlns:p14="http://schemas.microsoft.com/office/powerpoint/2010/main" val="1589424273"/>
+      </p:ext>
+    </p:extLst>
+  </p:cSld>
+  <p:clrMapOvr>
+    <a:masterClrMapping/>
+  </p:clrMapOvr>
+</p:notes>
+</file>
+
 <file path=ppt/slideLayouts/slideLayout1.xml><?xml version="1.0" encoding="utf-8"?>
 <p:sldLayout xmlns:a="http://schemas.openxmlformats.org/drawingml/2006/main" xmlns:r="http://schemas.openxmlformats.org/officeDocument/2006/relationships" xmlns:p="http://schemas.openxmlformats.org/presentationml/2006/main" matchingName="Title slide" type="title">
   <p:cSld name="TITLE">
@@ -31155,6 +34076,168 @@
 </p:sldLayout>
 </file>
 
+<file path=ppt/slideLayouts/slideLayout34.xml><?xml version="1.0" encoding="utf-8"?>
+<p:sldLayout xmlns:a="http://schemas.openxmlformats.org/drawingml/2006/main" xmlns:r="http://schemas.openxmlformats.org/officeDocument/2006/relationships" xmlns:p="http://schemas.openxmlformats.org/presentationml/2006/main" type="obj">
+  <p:cSld name="Title and Content">
+    <p:spTree>
+      <p:nvGrpSpPr>
+        <p:cNvPr id="1" name=""/>
+        <p:cNvGrpSpPr/>
+        <p:nvPr/>
+      </p:nvGrpSpPr>
+      <p:grpSpPr>
+        <a:xfrm>
+          <a:off x="0" y="0"/>
+          <a:ext cx="0" cy="0"/>
+          <a:chOff x="0" y="0"/>
+          <a:chExt cx="0" cy="0"/>
+        </a:xfrm>
+      </p:grpSpPr>
+      <p:sp>
+        <p:nvSpPr>
+          <p:cNvPr id="2" name="Title 1"/>
+          <p:cNvSpPr>
+            <a:spLocks noGrp="1"/>
+          </p:cNvSpPr>
+          <p:nvPr>
+            <p:ph type="title"/>
+          </p:nvPr>
+        </p:nvSpPr>
+        <p:spPr>
+          <a:xfrm>
+            <a:off x="381000" y="0"/>
+            <a:ext cx="8382000" cy="857250"/>
+          </a:xfrm>
+        </p:spPr>
+        <p:txBody>
+          <a:bodyPr/>
+          <a:lstStyle/>
+          <a:p>
+            <a:r>
+              <a:rPr lang="en-US"/>
+              <a:t>Click to edit Master title style</a:t>
+            </a:r>
+          </a:p>
+        </p:txBody>
+      </p:sp>
+      <p:sp>
+        <p:nvSpPr>
+          <p:cNvPr id="3" name="Content Placeholder 2"/>
+          <p:cNvSpPr>
+            <a:spLocks noGrp="1"/>
+          </p:cNvSpPr>
+          <p:nvPr>
+            <p:ph idx="1"/>
+          </p:nvPr>
+        </p:nvSpPr>
+        <p:spPr>
+          <a:xfrm>
+            <a:off x="381000" y="857250"/>
+            <a:ext cx="8382000" cy="3771900"/>
+          </a:xfrm>
+        </p:spPr>
+        <p:txBody>
+          <a:bodyPr/>
+          <a:lstStyle/>
+          <a:p>
+            <a:pPr lvl="0"/>
+            <a:r>
+              <a:rPr lang="en-US"/>
+              <a:t>Click to edit Master text styles</a:t>
+            </a:r>
+          </a:p>
+          <a:p>
+            <a:pPr lvl="1"/>
+            <a:r>
+              <a:rPr lang="en-US"/>
+              <a:t>Second level</a:t>
+            </a:r>
+          </a:p>
+          <a:p>
+            <a:pPr lvl="2"/>
+            <a:r>
+              <a:rPr lang="en-US"/>
+              <a:t>Third level</a:t>
+            </a:r>
+          </a:p>
+          <a:p>
+            <a:pPr lvl="3"/>
+            <a:r>
+              <a:rPr lang="en-US"/>
+              <a:t>Fourth level</a:t>
+            </a:r>
+          </a:p>
+          <a:p>
+            <a:pPr lvl="4"/>
+            <a:r>
+              <a:rPr lang="en-US"/>
+              <a:t>Fifth level</a:t>
+            </a:r>
+            <a:endParaRPr lang="en-US" dirty="0"/>
+          </a:p>
+        </p:txBody>
+      </p:sp>
+      <p:sp>
+        <p:nvSpPr>
+          <p:cNvPr id="4" name="Slide Number Placeholder 1">
+            <a:extLst>
+              <a:ext uri="{FF2B5EF4-FFF2-40B4-BE49-F238E27FC236}">
+                <a16:creationId xmlns:a16="http://schemas.microsoft.com/office/drawing/2014/main" id="{BF840045-53C2-449D-82F0-164420CD5D22}"/>
+              </a:ext>
+            </a:extLst>
+          </p:cNvPr>
+          <p:cNvSpPr>
+            <a:spLocks noGrp="1"/>
+          </p:cNvSpPr>
+          <p:nvPr>
+            <p:ph type="sldNum" sz="quarter" idx="4"/>
+          </p:nvPr>
+        </p:nvSpPr>
+        <p:spPr>
+          <a:xfrm>
+            <a:off x="7086600" y="-2164"/>
+            <a:ext cx="2057400" cy="273844"/>
+          </a:xfrm>
+          <a:prstGeom prst="rect">
+            <a:avLst/>
+          </a:prstGeom>
+        </p:spPr>
+        <p:txBody>
+          <a:bodyPr vert="horz" lIns="91440" tIns="45720" rIns="91440" bIns="45720" rtlCol="0" anchor="ctr"/>
+          <a:lstStyle>
+            <a:lvl1pPr algn="r">
+              <a:defRPr sz="900">
+                <a:solidFill>
+                  <a:schemeClr val="tx1">
+                    <a:tint val="75000"/>
+                  </a:schemeClr>
+                </a:solidFill>
+                <a:latin typeface="+mn-lt"/>
+              </a:defRPr>
+            </a:lvl1pPr>
+          </a:lstStyle>
+          <a:p>
+            <a:fld id="{A48AF087-BD35-42CD-BDE1-5464FFCAAE3F}" type="slidenum">
+              <a:rPr lang="en-US" smtClean="0"/>
+              <a:t>‹#›</a:t>
+            </a:fld>
+            <a:endParaRPr lang="en-US"/>
+          </a:p>
+        </p:txBody>
+      </p:sp>
+    </p:spTree>
+    <p:extLst>
+      <p:ext uri="{BB962C8B-B14F-4D97-AF65-F5344CB8AC3E}">
+        <p14:creationId xmlns:p14="http://schemas.microsoft.com/office/powerpoint/2010/main" val="2549300845"/>
+      </p:ext>
+    </p:extLst>
+  </p:cSld>
+  <p:clrMapOvr>
+    <a:masterClrMapping/>
+  </p:clrMapOvr>
+</p:sldLayout>
+</file>
+
 <file path=ppt/slideLayouts/slideLayout4.xml><?xml version="1.0" encoding="utf-8"?>
 <p:sldLayout xmlns:a="http://schemas.openxmlformats.org/drawingml/2006/main" xmlns:r="http://schemas.openxmlformats.org/officeDocument/2006/relationships" xmlns:p="http://schemas.openxmlformats.org/presentationml/2006/main" showMasterSp="0" matchingName="Title Slide - Image">
   <p:cSld name="Title Slide - Image">
@@ -41031,7 +44114,7 @@
           <p:nvPr/>
         </p:nvPicPr>
         <p:blipFill rotWithShape="1">
-          <a:blip r:embed="rId35">
+          <a:blip r:embed="rId36">
             <a:alphaModFix/>
           </a:blip>
           <a:srcRect l="26274" t="67"/>
@@ -42033,7 +45116,7 @@
           <p:nvPr/>
         </p:nvPicPr>
         <p:blipFill rotWithShape="1">
-          <a:blip r:embed="rId36">
+          <a:blip r:embed="rId37">
             <a:alphaModFix/>
           </a:blip>
           <a:srcRect/>
@@ -42090,6 +45173,7 @@
     <p:sldLayoutId id="2147483680" r:id="rId31"/>
     <p:sldLayoutId id="2147483681" r:id="rId32"/>
     <p:sldLayoutId id="2147483682" r:id="rId33"/>
+    <p:sldLayoutId id="2147483685" r:id="rId34"/>
   </p:sldLayoutIdLst>
   <p:hf sldNum="0" hdr="0" ftr="0" dt="0"/>
   <p:txStyles>
@@ -43239,6 +46323,6014 @@
 </p:sld>
 </file>
 
+<file path=ppt/slides/slide10.xml><?xml version="1.0" encoding="utf-8"?>
+<p:sld xmlns:a="http://schemas.openxmlformats.org/drawingml/2006/main" xmlns:r="http://schemas.openxmlformats.org/officeDocument/2006/relationships" xmlns:p="http://schemas.openxmlformats.org/presentationml/2006/main">
+  <p:cSld>
+    <p:spTree>
+      <p:nvGrpSpPr>
+        <p:cNvPr id="1" name="">
+          <a:extLst>
+            <a:ext uri="{FF2B5EF4-FFF2-40B4-BE49-F238E27FC236}">
+              <a16:creationId xmlns:a16="http://schemas.microsoft.com/office/drawing/2014/main" id="{D97F20AC-5077-D85E-BCA1-2B4A57EC1540}"/>
+            </a:ext>
+          </a:extLst>
+        </p:cNvPr>
+        <p:cNvGrpSpPr/>
+        <p:nvPr/>
+      </p:nvGrpSpPr>
+      <p:grpSpPr>
+        <a:xfrm>
+          <a:off x="0" y="0"/>
+          <a:ext cx="0" cy="0"/>
+          <a:chOff x="0" y="0"/>
+          <a:chExt cx="0" cy="0"/>
+        </a:xfrm>
+      </p:grpSpPr>
+      <p:sp>
+        <p:nvSpPr>
+          <p:cNvPr id="4" name="Slide Number Placeholder 3">
+            <a:extLst>
+              <a:ext uri="{FF2B5EF4-FFF2-40B4-BE49-F238E27FC236}">
+                <a16:creationId xmlns:a16="http://schemas.microsoft.com/office/drawing/2014/main" id="{7638265D-0575-AC88-F7A0-071259C3C8D2}"/>
+              </a:ext>
+            </a:extLst>
+          </p:cNvPr>
+          <p:cNvSpPr>
+            <a:spLocks noGrp="1"/>
+          </p:cNvSpPr>
+          <p:nvPr>
+            <p:ph type="sldNum" sz="quarter" idx="4"/>
+          </p:nvPr>
+        </p:nvSpPr>
+        <p:spPr/>
+        <p:txBody>
+          <a:bodyPr/>
+          <a:lstStyle/>
+          <a:p>
+            <a:fld id="{71B8893A-F325-44A6-8EFB-883C20332CFE}" type="slidenum">
+              <a:rPr lang="en-US" smtClean="0"/>
+              <a:pPr/>
+              <a:t>10</a:t>
+            </a:fld>
+            <a:endParaRPr lang="en-US"/>
+          </a:p>
+        </p:txBody>
+      </p:sp>
+      <p:sp>
+        <p:nvSpPr>
+          <p:cNvPr id="3" name="Title 2">
+            <a:extLst>
+              <a:ext uri="{FF2B5EF4-FFF2-40B4-BE49-F238E27FC236}">
+                <a16:creationId xmlns:a16="http://schemas.microsoft.com/office/drawing/2014/main" id="{4296F6CA-B942-A6FD-6B04-8BA82FB5C406}"/>
+              </a:ext>
+            </a:extLst>
+          </p:cNvPr>
+          <p:cNvSpPr>
+            <a:spLocks noGrp="1"/>
+          </p:cNvSpPr>
+          <p:nvPr>
+            <p:ph type="title"/>
+          </p:nvPr>
+        </p:nvSpPr>
+        <p:spPr>
+          <a:xfrm>
+            <a:off x="381000" y="1857375"/>
+            <a:ext cx="8382000" cy="857250"/>
+          </a:xfrm>
+        </p:spPr>
+        <p:txBody>
+          <a:bodyPr/>
+          <a:lstStyle/>
+          <a:p>
+            <a:r>
+              <a:rPr lang="en-US" dirty="0"/>
+              <a:t>What if we want to add in some extra functionality to Python?  Give it a little boost?</a:t>
+            </a:r>
+          </a:p>
+        </p:txBody>
+      </p:sp>
+    </p:spTree>
+    <p:extLst>
+      <p:ext uri="{BB962C8B-B14F-4D97-AF65-F5344CB8AC3E}">
+        <p14:creationId xmlns:p14="http://schemas.microsoft.com/office/powerpoint/2010/main" val="1397559169"/>
+      </p:ext>
+    </p:extLst>
+  </p:cSld>
+  <p:clrMapOvr>
+    <a:masterClrMapping/>
+  </p:clrMapOvr>
+</p:sld>
+</file>
+
+<file path=ppt/slides/slide11.xml><?xml version="1.0" encoding="utf-8"?>
+<p:sld xmlns:a="http://schemas.openxmlformats.org/drawingml/2006/main" xmlns:r="http://schemas.openxmlformats.org/officeDocument/2006/relationships" xmlns:p="http://schemas.openxmlformats.org/presentationml/2006/main">
+  <p:cSld>
+    <p:spTree>
+      <p:nvGrpSpPr>
+        <p:cNvPr id="1" name="">
+          <a:extLst>
+            <a:ext uri="{FF2B5EF4-FFF2-40B4-BE49-F238E27FC236}">
+              <a16:creationId xmlns:a16="http://schemas.microsoft.com/office/drawing/2014/main" id="{2C90E72A-6256-EEE8-D541-9E5AB2BD7476}"/>
+            </a:ext>
+          </a:extLst>
+        </p:cNvPr>
+        <p:cNvGrpSpPr/>
+        <p:nvPr/>
+      </p:nvGrpSpPr>
+      <p:grpSpPr>
+        <a:xfrm>
+          <a:off x="0" y="0"/>
+          <a:ext cx="0" cy="0"/>
+          <a:chOff x="0" y="0"/>
+          <a:chExt cx="0" cy="0"/>
+        </a:xfrm>
+      </p:grpSpPr>
+      <p:sp>
+        <p:nvSpPr>
+          <p:cNvPr id="4" name="Slide Number Placeholder 3">
+            <a:extLst>
+              <a:ext uri="{FF2B5EF4-FFF2-40B4-BE49-F238E27FC236}">
+                <a16:creationId xmlns:a16="http://schemas.microsoft.com/office/drawing/2014/main" id="{AE35AC38-EE35-8424-9735-AE15C89EF0D7}"/>
+              </a:ext>
+            </a:extLst>
+          </p:cNvPr>
+          <p:cNvSpPr>
+            <a:spLocks noGrp="1"/>
+          </p:cNvSpPr>
+          <p:nvPr>
+            <p:ph type="sldNum" sz="quarter" idx="4"/>
+          </p:nvPr>
+        </p:nvSpPr>
+        <p:spPr/>
+        <p:txBody>
+          <a:bodyPr/>
+          <a:lstStyle/>
+          <a:p>
+            <a:fld id="{71B8893A-F325-44A6-8EFB-883C20332CFE}" type="slidenum">
+              <a:rPr lang="en-US" smtClean="0"/>
+              <a:pPr/>
+              <a:t>11</a:t>
+            </a:fld>
+            <a:endParaRPr lang="en-US"/>
+          </a:p>
+        </p:txBody>
+      </p:sp>
+      <p:sp>
+        <p:nvSpPr>
+          <p:cNvPr id="3" name="Title 2">
+            <a:extLst>
+              <a:ext uri="{FF2B5EF4-FFF2-40B4-BE49-F238E27FC236}">
+                <a16:creationId xmlns:a16="http://schemas.microsoft.com/office/drawing/2014/main" id="{BFE6CBFB-96F7-529F-498E-D8F119ACF161}"/>
+              </a:ext>
+            </a:extLst>
+          </p:cNvPr>
+          <p:cNvSpPr>
+            <a:spLocks noGrp="1"/>
+          </p:cNvSpPr>
+          <p:nvPr>
+            <p:ph type="title"/>
+          </p:nvPr>
+        </p:nvSpPr>
+        <p:spPr>
+          <a:xfrm>
+            <a:off x="381000" y="556399"/>
+            <a:ext cx="8382000" cy="857250"/>
+          </a:xfrm>
+        </p:spPr>
+        <p:txBody>
+          <a:bodyPr/>
+          <a:lstStyle/>
+          <a:p>
+            <a:r>
+              <a:rPr lang="en-US" dirty="0"/>
+              <a:t>What are modules?</a:t>
+            </a:r>
+            <a:br>
+              <a:rPr lang="en-US" dirty="0"/>
+            </a:br>
+            <a:br>
+              <a:rPr lang="en-US" dirty="0"/>
+            </a:br>
+            <a:br>
+              <a:rPr lang="en-US" dirty="0"/>
+            </a:br>
+            <a:endParaRPr lang="en-US" dirty="0"/>
+          </a:p>
+        </p:txBody>
+      </p:sp>
+      <p:sp>
+        <p:nvSpPr>
+          <p:cNvPr id="5" name="TextBox 4">
+            <a:extLst>
+              <a:ext uri="{FF2B5EF4-FFF2-40B4-BE49-F238E27FC236}">
+                <a16:creationId xmlns:a16="http://schemas.microsoft.com/office/drawing/2014/main" id="{A0D08983-ACED-93E8-C04E-7B209ACAF471}"/>
+              </a:ext>
+            </a:extLst>
+          </p:cNvPr>
+          <p:cNvSpPr txBox="1"/>
+          <p:nvPr/>
+        </p:nvSpPr>
+        <p:spPr>
+          <a:xfrm>
+            <a:off x="464633" y="1190536"/>
+            <a:ext cx="7921083" cy="1015663"/>
+          </a:xfrm>
+          <a:prstGeom prst="rect">
+            <a:avLst/>
+          </a:prstGeom>
+          <a:noFill/>
+        </p:spPr>
+        <p:txBody>
+          <a:bodyPr wrap="square">
+            <a:spAutoFit/>
+          </a:bodyPr>
+          <a:lstStyle/>
+          <a:p>
+            <a:r>
+              <a:rPr lang="en-US" sz="2000" dirty="0"/>
+              <a:t>A Python module is simply a file containing Python code — variables, functions, or classes— that you can import and use in other files.</a:t>
+            </a:r>
+          </a:p>
+        </p:txBody>
+      </p:sp>
+    </p:spTree>
+    <p:extLst>
+      <p:ext uri="{BB962C8B-B14F-4D97-AF65-F5344CB8AC3E}">
+        <p14:creationId xmlns:p14="http://schemas.microsoft.com/office/powerpoint/2010/main" val="2488558611"/>
+      </p:ext>
+    </p:extLst>
+  </p:cSld>
+  <p:clrMapOvr>
+    <a:masterClrMapping/>
+  </p:clrMapOvr>
+  <p:timing>
+    <p:tnLst>
+      <p:par>
+        <p:cTn id="1" dur="indefinite" restart="never" nodeType="tmRoot">
+          <p:childTnLst>
+            <p:seq concurrent="1" nextAc="seek">
+              <p:cTn id="2" dur="indefinite" nodeType="mainSeq">
+                <p:childTnLst>
+                  <p:par>
+                    <p:cTn id="3" fill="hold">
+                      <p:stCondLst>
+                        <p:cond delay="indefinite"/>
+                      </p:stCondLst>
+                      <p:childTnLst>
+                        <p:par>
+                          <p:cTn id="4" fill="hold">
+                            <p:stCondLst>
+                              <p:cond delay="0"/>
+                            </p:stCondLst>
+                            <p:childTnLst>
+                              <p:par>
+                                <p:cTn id="5" presetID="1" presetClass="entr" presetSubtype="0" fill="hold" grpId="0" nodeType="clickEffect">
+                                  <p:stCondLst>
+                                    <p:cond delay="0"/>
+                                  </p:stCondLst>
+                                  <p:childTnLst>
+                                    <p:set>
+                                      <p:cBhvr>
+                                        <p:cTn id="6" dur="1" fill="hold">
+                                          <p:stCondLst>
+                                            <p:cond delay="0"/>
+                                          </p:stCondLst>
+                                        </p:cTn>
+                                        <p:tgtEl>
+                                          <p:spTgt spid="5"/>
+                                        </p:tgtEl>
+                                        <p:attrNameLst>
+                                          <p:attrName>style.visibility</p:attrName>
+                                        </p:attrNameLst>
+                                      </p:cBhvr>
+                                      <p:to>
+                                        <p:strVal val="visible"/>
+                                      </p:to>
+                                    </p:set>
+                                  </p:childTnLst>
+                                </p:cTn>
+                              </p:par>
+                            </p:childTnLst>
+                          </p:cTn>
+                        </p:par>
+                      </p:childTnLst>
+                    </p:cTn>
+                  </p:par>
+                </p:childTnLst>
+              </p:cTn>
+              <p:prevCondLst>
+                <p:cond evt="onPrev" delay="0">
+                  <p:tgtEl>
+                    <p:sldTgt/>
+                  </p:tgtEl>
+                </p:cond>
+              </p:prevCondLst>
+              <p:nextCondLst>
+                <p:cond evt="onNext" delay="0">
+                  <p:tgtEl>
+                    <p:sldTgt/>
+                  </p:tgtEl>
+                </p:cond>
+              </p:nextCondLst>
+            </p:seq>
+          </p:childTnLst>
+        </p:cTn>
+      </p:par>
+    </p:tnLst>
+    <p:bldLst>
+      <p:bldP spid="5" grpId="0"/>
+    </p:bldLst>
+  </p:timing>
+</p:sld>
+</file>
+
+<file path=ppt/slides/slide12.xml><?xml version="1.0" encoding="utf-8"?>
+<p:sld xmlns:a="http://schemas.openxmlformats.org/drawingml/2006/main" xmlns:r="http://schemas.openxmlformats.org/officeDocument/2006/relationships" xmlns:p="http://schemas.openxmlformats.org/presentationml/2006/main">
+  <p:cSld>
+    <p:spTree>
+      <p:nvGrpSpPr>
+        <p:cNvPr id="1" name="">
+          <a:extLst>
+            <a:ext uri="{FF2B5EF4-FFF2-40B4-BE49-F238E27FC236}">
+              <a16:creationId xmlns:a16="http://schemas.microsoft.com/office/drawing/2014/main" id="{83A50C06-9317-0D71-FECA-5A21D88F4622}"/>
+            </a:ext>
+          </a:extLst>
+        </p:cNvPr>
+        <p:cNvGrpSpPr/>
+        <p:nvPr/>
+      </p:nvGrpSpPr>
+      <p:grpSpPr>
+        <a:xfrm>
+          <a:off x="0" y="0"/>
+          <a:ext cx="0" cy="0"/>
+          <a:chOff x="0" y="0"/>
+          <a:chExt cx="0" cy="0"/>
+        </a:xfrm>
+      </p:grpSpPr>
+      <p:sp>
+        <p:nvSpPr>
+          <p:cNvPr id="4" name="Slide Number Placeholder 3">
+            <a:extLst>
+              <a:ext uri="{FF2B5EF4-FFF2-40B4-BE49-F238E27FC236}">
+                <a16:creationId xmlns:a16="http://schemas.microsoft.com/office/drawing/2014/main" id="{C019EBD0-5071-8560-F3BE-960E914FC48C}"/>
+              </a:ext>
+            </a:extLst>
+          </p:cNvPr>
+          <p:cNvSpPr>
+            <a:spLocks noGrp="1"/>
+          </p:cNvSpPr>
+          <p:nvPr>
+            <p:ph type="sldNum" sz="quarter" idx="4"/>
+          </p:nvPr>
+        </p:nvSpPr>
+        <p:spPr/>
+        <p:txBody>
+          <a:bodyPr/>
+          <a:lstStyle/>
+          <a:p>
+            <a:fld id="{71B8893A-F325-44A6-8EFB-883C20332CFE}" type="slidenum">
+              <a:rPr lang="en-US" smtClean="0"/>
+              <a:pPr/>
+              <a:t>12</a:t>
+            </a:fld>
+            <a:endParaRPr lang="en-US"/>
+          </a:p>
+        </p:txBody>
+      </p:sp>
+      <p:sp>
+        <p:nvSpPr>
+          <p:cNvPr id="3" name="Title 2">
+            <a:extLst>
+              <a:ext uri="{FF2B5EF4-FFF2-40B4-BE49-F238E27FC236}">
+                <a16:creationId xmlns:a16="http://schemas.microsoft.com/office/drawing/2014/main" id="{C1C2E383-13B1-1593-D976-0AA8AB9AE573}"/>
+              </a:ext>
+            </a:extLst>
+          </p:cNvPr>
+          <p:cNvSpPr>
+            <a:spLocks noGrp="1"/>
+          </p:cNvSpPr>
+          <p:nvPr>
+            <p:ph type="title"/>
+          </p:nvPr>
+        </p:nvSpPr>
+        <p:spPr>
+          <a:xfrm>
+            <a:off x="381000" y="556399"/>
+            <a:ext cx="8382000" cy="857250"/>
+          </a:xfrm>
+        </p:spPr>
+        <p:txBody>
+          <a:bodyPr/>
+          <a:lstStyle/>
+          <a:p>
+            <a:r>
+              <a:rPr lang="en-US" dirty="0"/>
+              <a:t>3 types of modules</a:t>
+            </a:r>
+            <a:br>
+              <a:rPr lang="en-US" dirty="0"/>
+            </a:br>
+            <a:br>
+              <a:rPr lang="en-US" dirty="0"/>
+            </a:br>
+            <a:br>
+              <a:rPr lang="en-US" dirty="0"/>
+            </a:br>
+            <a:endParaRPr lang="en-US" dirty="0"/>
+          </a:p>
+        </p:txBody>
+      </p:sp>
+      <p:sp>
+        <p:nvSpPr>
+          <p:cNvPr id="5" name="TextBox 4">
+            <a:extLst>
+              <a:ext uri="{FF2B5EF4-FFF2-40B4-BE49-F238E27FC236}">
+                <a16:creationId xmlns:a16="http://schemas.microsoft.com/office/drawing/2014/main" id="{DA7C2BBE-6A68-4E5F-A4D8-A2533829260E}"/>
+              </a:ext>
+            </a:extLst>
+          </p:cNvPr>
+          <p:cNvSpPr txBox="1"/>
+          <p:nvPr/>
+        </p:nvSpPr>
+        <p:spPr>
+          <a:xfrm>
+            <a:off x="472067" y="1698368"/>
+            <a:ext cx="7921083" cy="2862322"/>
+          </a:xfrm>
+          <a:prstGeom prst="rect">
+            <a:avLst/>
+          </a:prstGeom>
+          <a:noFill/>
+        </p:spPr>
+        <p:txBody>
+          <a:bodyPr wrap="square">
+            <a:spAutoFit/>
+          </a:bodyPr>
+          <a:lstStyle/>
+          <a:p>
+            <a:pPr marL="457200" indent="-457200">
+              <a:buFont typeface="+mj-lt"/>
+              <a:buAutoNum type="arabicPeriod"/>
+            </a:pPr>
+            <a:r>
+              <a:rPr lang="en-US" sz="2000" dirty="0"/>
+              <a:t>Built-in Modules – they come with Python, no installation necessary</a:t>
+            </a:r>
+          </a:p>
+          <a:p>
+            <a:pPr marL="457200" indent="-457200">
+              <a:buFont typeface="+mj-lt"/>
+              <a:buAutoNum type="arabicPeriod"/>
+            </a:pPr>
+            <a:endParaRPr lang="en-US" sz="2000" dirty="0"/>
+          </a:p>
+          <a:p>
+            <a:pPr marL="457200" indent="-457200">
+              <a:buFont typeface="+mj-lt"/>
+              <a:buAutoNum type="arabicPeriod"/>
+            </a:pPr>
+            <a:r>
+              <a:rPr lang="en-US" sz="2000" dirty="0"/>
+              <a:t>Your own modules – any .</a:t>
+            </a:r>
+            <a:r>
+              <a:rPr lang="en-US" sz="2000" dirty="0" err="1"/>
+              <a:t>py</a:t>
+            </a:r>
+            <a:r>
+              <a:rPr lang="en-US" sz="2000" dirty="0"/>
+              <a:t> file you write yourself</a:t>
+            </a:r>
+          </a:p>
+          <a:p>
+            <a:pPr marL="457200" indent="-457200">
+              <a:buFont typeface="+mj-lt"/>
+              <a:buAutoNum type="arabicPeriod"/>
+            </a:pPr>
+            <a:endParaRPr lang="en-US" sz="2000" dirty="0"/>
+          </a:p>
+          <a:p>
+            <a:pPr marL="457200" indent="-457200">
+              <a:buFont typeface="+mj-lt"/>
+              <a:buAutoNum type="arabicPeriod"/>
+            </a:pPr>
+            <a:r>
+              <a:rPr lang="en-US" sz="2000" dirty="0"/>
+              <a:t>Third-party modules – installed via pip</a:t>
+            </a:r>
+          </a:p>
+          <a:p>
+            <a:endParaRPr lang="en-US" sz="2000" dirty="0"/>
+          </a:p>
+          <a:p>
+            <a:endParaRPr lang="en-US" sz="2000" dirty="0"/>
+          </a:p>
+          <a:p>
+            <a:endParaRPr lang="en-US" sz="2000" dirty="0"/>
+          </a:p>
+        </p:txBody>
+      </p:sp>
+    </p:spTree>
+    <p:extLst>
+      <p:ext uri="{BB962C8B-B14F-4D97-AF65-F5344CB8AC3E}">
+        <p14:creationId xmlns:p14="http://schemas.microsoft.com/office/powerpoint/2010/main" val="1541683252"/>
+      </p:ext>
+    </p:extLst>
+  </p:cSld>
+  <p:clrMapOvr>
+    <a:masterClrMapping/>
+  </p:clrMapOvr>
+  <p:timing>
+    <p:tnLst>
+      <p:par>
+        <p:cTn id="1" dur="indefinite" restart="never" nodeType="tmRoot">
+          <p:childTnLst>
+            <p:seq concurrent="1" nextAc="seek">
+              <p:cTn id="2" dur="indefinite" nodeType="mainSeq">
+                <p:childTnLst>
+                  <p:par>
+                    <p:cTn id="3" fill="hold">
+                      <p:stCondLst>
+                        <p:cond delay="indefinite"/>
+                      </p:stCondLst>
+                      <p:childTnLst>
+                        <p:par>
+                          <p:cTn id="4" fill="hold">
+                            <p:stCondLst>
+                              <p:cond delay="0"/>
+                            </p:stCondLst>
+                            <p:childTnLst>
+                              <p:par>
+                                <p:cTn id="5" presetID="1" presetClass="entr" presetSubtype="0" fill="hold" nodeType="clickEffect">
+                                  <p:stCondLst>
+                                    <p:cond delay="0"/>
+                                  </p:stCondLst>
+                                  <p:childTnLst>
+                                    <p:set>
+                                      <p:cBhvr>
+                                        <p:cTn id="6" dur="1" fill="hold">
+                                          <p:stCondLst>
+                                            <p:cond delay="0"/>
+                                          </p:stCondLst>
+                                        </p:cTn>
+                                        <p:tgtEl>
+                                          <p:spTgt spid="5">
+                                            <p:txEl>
+                                              <p:pRg st="0" end="0"/>
+                                            </p:txEl>
+                                          </p:spTgt>
+                                        </p:tgtEl>
+                                        <p:attrNameLst>
+                                          <p:attrName>style.visibility</p:attrName>
+                                        </p:attrNameLst>
+                                      </p:cBhvr>
+                                      <p:to>
+                                        <p:strVal val="visible"/>
+                                      </p:to>
+                                    </p:set>
+                                  </p:childTnLst>
+                                </p:cTn>
+                              </p:par>
+                            </p:childTnLst>
+                          </p:cTn>
+                        </p:par>
+                      </p:childTnLst>
+                    </p:cTn>
+                  </p:par>
+                  <p:par>
+                    <p:cTn id="7" fill="hold">
+                      <p:stCondLst>
+                        <p:cond delay="indefinite"/>
+                      </p:stCondLst>
+                      <p:childTnLst>
+                        <p:par>
+                          <p:cTn id="8" fill="hold">
+                            <p:stCondLst>
+                              <p:cond delay="0"/>
+                            </p:stCondLst>
+                            <p:childTnLst>
+                              <p:par>
+                                <p:cTn id="9" presetID="1" presetClass="entr" presetSubtype="0" fill="hold" nodeType="clickEffect">
+                                  <p:stCondLst>
+                                    <p:cond delay="0"/>
+                                  </p:stCondLst>
+                                  <p:childTnLst>
+                                    <p:set>
+                                      <p:cBhvr>
+                                        <p:cTn id="10" dur="1" fill="hold">
+                                          <p:stCondLst>
+                                            <p:cond delay="0"/>
+                                          </p:stCondLst>
+                                        </p:cTn>
+                                        <p:tgtEl>
+                                          <p:spTgt spid="5">
+                                            <p:txEl>
+                                              <p:pRg st="2" end="2"/>
+                                            </p:txEl>
+                                          </p:spTgt>
+                                        </p:tgtEl>
+                                        <p:attrNameLst>
+                                          <p:attrName>style.visibility</p:attrName>
+                                        </p:attrNameLst>
+                                      </p:cBhvr>
+                                      <p:to>
+                                        <p:strVal val="visible"/>
+                                      </p:to>
+                                    </p:set>
+                                  </p:childTnLst>
+                                </p:cTn>
+                              </p:par>
+                            </p:childTnLst>
+                          </p:cTn>
+                        </p:par>
+                      </p:childTnLst>
+                    </p:cTn>
+                  </p:par>
+                  <p:par>
+                    <p:cTn id="11" fill="hold">
+                      <p:stCondLst>
+                        <p:cond delay="indefinite"/>
+                      </p:stCondLst>
+                      <p:childTnLst>
+                        <p:par>
+                          <p:cTn id="12" fill="hold">
+                            <p:stCondLst>
+                              <p:cond delay="0"/>
+                            </p:stCondLst>
+                            <p:childTnLst>
+                              <p:par>
+                                <p:cTn id="13" presetID="1" presetClass="entr" presetSubtype="0" fill="hold" nodeType="clickEffect">
+                                  <p:stCondLst>
+                                    <p:cond delay="0"/>
+                                  </p:stCondLst>
+                                  <p:childTnLst>
+                                    <p:set>
+                                      <p:cBhvr>
+                                        <p:cTn id="14" dur="1" fill="hold">
+                                          <p:stCondLst>
+                                            <p:cond delay="0"/>
+                                          </p:stCondLst>
+                                        </p:cTn>
+                                        <p:tgtEl>
+                                          <p:spTgt spid="5">
+                                            <p:txEl>
+                                              <p:pRg st="4" end="4"/>
+                                            </p:txEl>
+                                          </p:spTgt>
+                                        </p:tgtEl>
+                                        <p:attrNameLst>
+                                          <p:attrName>style.visibility</p:attrName>
+                                        </p:attrNameLst>
+                                      </p:cBhvr>
+                                      <p:to>
+                                        <p:strVal val="visible"/>
+                                      </p:to>
+                                    </p:set>
+                                  </p:childTnLst>
+                                </p:cTn>
+                              </p:par>
+                            </p:childTnLst>
+                          </p:cTn>
+                        </p:par>
+                      </p:childTnLst>
+                    </p:cTn>
+                  </p:par>
+                </p:childTnLst>
+              </p:cTn>
+              <p:prevCondLst>
+                <p:cond evt="onPrev" delay="0">
+                  <p:tgtEl>
+                    <p:sldTgt/>
+                  </p:tgtEl>
+                </p:cond>
+              </p:prevCondLst>
+              <p:nextCondLst>
+                <p:cond evt="onNext" delay="0">
+                  <p:tgtEl>
+                    <p:sldTgt/>
+                  </p:tgtEl>
+                </p:cond>
+              </p:nextCondLst>
+            </p:seq>
+          </p:childTnLst>
+        </p:cTn>
+      </p:par>
+    </p:tnLst>
+  </p:timing>
+</p:sld>
+</file>
+
+<file path=ppt/slides/slide13.xml><?xml version="1.0" encoding="utf-8"?>
+<p:sld xmlns:a="http://schemas.openxmlformats.org/drawingml/2006/main" xmlns:r="http://schemas.openxmlformats.org/officeDocument/2006/relationships" xmlns:p="http://schemas.openxmlformats.org/presentationml/2006/main">
+  <p:cSld>
+    <p:spTree>
+      <p:nvGrpSpPr>
+        <p:cNvPr id="1" name=""/>
+        <p:cNvGrpSpPr/>
+        <p:nvPr/>
+      </p:nvGrpSpPr>
+      <p:grpSpPr>
+        <a:xfrm>
+          <a:off x="0" y="0"/>
+          <a:ext cx="0" cy="0"/>
+          <a:chOff x="0" y="0"/>
+          <a:chExt cx="0" cy="0"/>
+        </a:xfrm>
+      </p:grpSpPr>
+      <p:sp>
+        <p:nvSpPr>
+          <p:cNvPr id="4" name="Slide Number Placeholder 3">
+            <a:extLst>
+              <a:ext uri="{FF2B5EF4-FFF2-40B4-BE49-F238E27FC236}">
+                <a16:creationId xmlns:a16="http://schemas.microsoft.com/office/drawing/2014/main" id="{D0F0E6DB-EE9E-45C5-B784-49ED7052A2EB}"/>
+              </a:ext>
+            </a:extLst>
+          </p:cNvPr>
+          <p:cNvSpPr>
+            <a:spLocks noGrp="1"/>
+          </p:cNvSpPr>
+          <p:nvPr>
+            <p:ph type="sldNum" sz="quarter" idx="4"/>
+          </p:nvPr>
+        </p:nvSpPr>
+        <p:spPr/>
+        <p:txBody>
+          <a:bodyPr/>
+          <a:lstStyle/>
+          <a:p>
+            <a:fld id="{71B8893A-F325-44A6-8EFB-883C20332CFE}" type="slidenum">
+              <a:rPr lang="en-US" smtClean="0"/>
+              <a:pPr/>
+              <a:t>13</a:t>
+            </a:fld>
+            <a:endParaRPr lang="en-US"/>
+          </a:p>
+        </p:txBody>
+      </p:sp>
+      <p:pic>
+        <p:nvPicPr>
+          <p:cNvPr id="7" name="Picture 6">
+            <a:extLst>
+              <a:ext uri="{FF2B5EF4-FFF2-40B4-BE49-F238E27FC236}">
+                <a16:creationId xmlns:a16="http://schemas.microsoft.com/office/drawing/2014/main" id="{4E4D1488-7246-E96D-2CBB-734266C92AF2}"/>
+              </a:ext>
+            </a:extLst>
+          </p:cNvPr>
+          <p:cNvPicPr>
+            <a:picLocks noChangeAspect="1"/>
+          </p:cNvPicPr>
+          <p:nvPr/>
+        </p:nvPicPr>
+        <p:blipFill>
+          <a:blip r:embed="rId3"/>
+          <a:stretch>
+            <a:fillRect/>
+          </a:stretch>
+        </p:blipFill>
+        <p:spPr>
+          <a:xfrm>
+            <a:off x="0" y="1108995"/>
+            <a:ext cx="9144000" cy="2315910"/>
+          </a:xfrm>
+          <a:prstGeom prst="rect">
+            <a:avLst/>
+          </a:prstGeom>
+        </p:spPr>
+      </p:pic>
+      <p:sp>
+        <p:nvSpPr>
+          <p:cNvPr id="11" name="TextBox 10">
+            <a:extLst>
+              <a:ext uri="{FF2B5EF4-FFF2-40B4-BE49-F238E27FC236}">
+                <a16:creationId xmlns:a16="http://schemas.microsoft.com/office/drawing/2014/main" id="{361EF9C1-678D-5616-8596-A542087FDA40}"/>
+              </a:ext>
+            </a:extLst>
+          </p:cNvPr>
+          <p:cNvSpPr txBox="1"/>
+          <p:nvPr/>
+        </p:nvSpPr>
+        <p:spPr>
+          <a:xfrm>
+            <a:off x="2414238" y="3726728"/>
+            <a:ext cx="4315523" cy="307777"/>
+          </a:xfrm>
+          <a:prstGeom prst="rect">
+            <a:avLst/>
+          </a:prstGeom>
+          <a:noFill/>
+        </p:spPr>
+        <p:txBody>
+          <a:bodyPr wrap="square">
+            <a:spAutoFit/>
+          </a:bodyPr>
+          <a:lstStyle/>
+          <a:p>
+            <a:r>
+              <a:rPr lang="en-US" dirty="0"/>
+              <a:t>Import modules at the top of your code!!!!</a:t>
+            </a:r>
+            <a:endParaRPr lang="en-US" sz="1400" dirty="0"/>
+          </a:p>
+        </p:txBody>
+      </p:sp>
+    </p:spTree>
+    <p:extLst>
+      <p:ext uri="{BB962C8B-B14F-4D97-AF65-F5344CB8AC3E}">
+        <p14:creationId xmlns:p14="http://schemas.microsoft.com/office/powerpoint/2010/main" val="3014002859"/>
+      </p:ext>
+    </p:extLst>
+  </p:cSld>
+  <p:clrMapOvr>
+    <a:masterClrMapping/>
+  </p:clrMapOvr>
+</p:sld>
+</file>
+
+<file path=ppt/slides/slide14.xml><?xml version="1.0" encoding="utf-8"?>
+<p:sld xmlns:a="http://schemas.openxmlformats.org/drawingml/2006/main" xmlns:r="http://schemas.openxmlformats.org/officeDocument/2006/relationships" xmlns:p="http://schemas.openxmlformats.org/presentationml/2006/main">
+  <p:cSld>
+    <p:spTree>
+      <p:nvGrpSpPr>
+        <p:cNvPr id="1" name="">
+          <a:extLst>
+            <a:ext uri="{FF2B5EF4-FFF2-40B4-BE49-F238E27FC236}">
+              <a16:creationId xmlns:a16="http://schemas.microsoft.com/office/drawing/2014/main" id="{B265A42C-4404-9EBA-928C-3D6869EFD9DA}"/>
+            </a:ext>
+          </a:extLst>
+        </p:cNvPr>
+        <p:cNvGrpSpPr/>
+        <p:nvPr/>
+      </p:nvGrpSpPr>
+      <p:grpSpPr>
+        <a:xfrm>
+          <a:off x="0" y="0"/>
+          <a:ext cx="0" cy="0"/>
+          <a:chOff x="0" y="0"/>
+          <a:chExt cx="0" cy="0"/>
+        </a:xfrm>
+      </p:grpSpPr>
+      <p:sp>
+        <p:nvSpPr>
+          <p:cNvPr id="4" name="Slide Number Placeholder 3">
+            <a:extLst>
+              <a:ext uri="{FF2B5EF4-FFF2-40B4-BE49-F238E27FC236}">
+                <a16:creationId xmlns:a16="http://schemas.microsoft.com/office/drawing/2014/main" id="{5E911087-9CA2-7142-52B5-71B95C942F3B}"/>
+              </a:ext>
+            </a:extLst>
+          </p:cNvPr>
+          <p:cNvSpPr>
+            <a:spLocks noGrp="1"/>
+          </p:cNvSpPr>
+          <p:nvPr>
+            <p:ph type="sldNum" sz="quarter" idx="4"/>
+          </p:nvPr>
+        </p:nvSpPr>
+        <p:spPr/>
+        <p:txBody>
+          <a:bodyPr/>
+          <a:lstStyle/>
+          <a:p>
+            <a:fld id="{71B8893A-F325-44A6-8EFB-883C20332CFE}" type="slidenum">
+              <a:rPr lang="en-US" smtClean="0"/>
+              <a:pPr/>
+              <a:t>14</a:t>
+            </a:fld>
+            <a:endParaRPr lang="en-US"/>
+          </a:p>
+        </p:txBody>
+      </p:sp>
+      <p:sp>
+        <p:nvSpPr>
+          <p:cNvPr id="3" name="Title 2">
+            <a:extLst>
+              <a:ext uri="{FF2B5EF4-FFF2-40B4-BE49-F238E27FC236}">
+                <a16:creationId xmlns:a16="http://schemas.microsoft.com/office/drawing/2014/main" id="{10F08DE0-0E04-3981-9FE9-B19FE7A316CE}"/>
+              </a:ext>
+            </a:extLst>
+          </p:cNvPr>
+          <p:cNvSpPr>
+            <a:spLocks noGrp="1"/>
+          </p:cNvSpPr>
+          <p:nvPr>
+            <p:ph type="title"/>
+          </p:nvPr>
+        </p:nvSpPr>
+        <p:spPr>
+          <a:xfrm>
+            <a:off x="381000" y="556399"/>
+            <a:ext cx="8382000" cy="857250"/>
+          </a:xfrm>
+        </p:spPr>
+        <p:txBody>
+          <a:bodyPr/>
+          <a:lstStyle/>
+          <a:p>
+            <a:r>
+              <a:rPr lang="en-US" dirty="0"/>
+              <a:t>Built-in Modules</a:t>
+            </a:r>
+            <a:br>
+              <a:rPr lang="en-US" dirty="0"/>
+            </a:br>
+            <a:br>
+              <a:rPr lang="en-US" dirty="0"/>
+            </a:br>
+            <a:br>
+              <a:rPr lang="en-US" dirty="0"/>
+            </a:br>
+            <a:endParaRPr lang="en-US" dirty="0"/>
+          </a:p>
+        </p:txBody>
+      </p:sp>
+      <p:sp>
+        <p:nvSpPr>
+          <p:cNvPr id="5" name="TextBox 4">
+            <a:extLst>
+              <a:ext uri="{FF2B5EF4-FFF2-40B4-BE49-F238E27FC236}">
+                <a16:creationId xmlns:a16="http://schemas.microsoft.com/office/drawing/2014/main" id="{3A14CBAB-D614-26FC-FD85-60F2915D9FB5}"/>
+              </a:ext>
+            </a:extLst>
+          </p:cNvPr>
+          <p:cNvSpPr txBox="1"/>
+          <p:nvPr/>
+        </p:nvSpPr>
+        <p:spPr>
+          <a:xfrm>
+            <a:off x="472067" y="1698368"/>
+            <a:ext cx="7921083" cy="2554545"/>
+          </a:xfrm>
+          <a:prstGeom prst="rect">
+            <a:avLst/>
+          </a:prstGeom>
+          <a:noFill/>
+        </p:spPr>
+        <p:txBody>
+          <a:bodyPr wrap="square">
+            <a:spAutoFit/>
+          </a:bodyPr>
+          <a:lstStyle/>
+          <a:p>
+            <a:r>
+              <a:rPr lang="en-US" sz="2000" dirty="0"/>
+              <a:t>There are many built-in modules, but we are going to look at two…</a:t>
+            </a:r>
+          </a:p>
+          <a:p>
+            <a:endParaRPr lang="en-US" sz="2000" dirty="0"/>
+          </a:p>
+          <a:p>
+            <a:pPr marL="457200" indent="-457200">
+              <a:buFont typeface="+mj-lt"/>
+              <a:buAutoNum type="arabicPeriod"/>
+            </a:pPr>
+            <a:r>
+              <a:rPr lang="en-US" sz="2000" dirty="0"/>
+              <a:t>random module</a:t>
+            </a:r>
+          </a:p>
+          <a:p>
+            <a:pPr marL="457200" indent="-457200">
+              <a:buFont typeface="+mj-lt"/>
+              <a:buAutoNum type="arabicPeriod"/>
+            </a:pPr>
+            <a:endParaRPr lang="en-US" sz="2000" dirty="0"/>
+          </a:p>
+          <a:p>
+            <a:pPr marL="457200" indent="-457200">
+              <a:buFont typeface="+mj-lt"/>
+              <a:buAutoNum type="arabicPeriod"/>
+            </a:pPr>
+            <a:r>
+              <a:rPr lang="en-US" sz="2000" dirty="0"/>
+              <a:t>math module</a:t>
+            </a:r>
+          </a:p>
+          <a:p>
+            <a:endParaRPr lang="en-US" sz="2000" dirty="0"/>
+          </a:p>
+          <a:p>
+            <a:endParaRPr lang="en-US" sz="2000" dirty="0"/>
+          </a:p>
+          <a:p>
+            <a:endParaRPr lang="en-US" sz="2000" dirty="0"/>
+          </a:p>
+        </p:txBody>
+      </p:sp>
+    </p:spTree>
+    <p:extLst>
+      <p:ext uri="{BB962C8B-B14F-4D97-AF65-F5344CB8AC3E}">
+        <p14:creationId xmlns:p14="http://schemas.microsoft.com/office/powerpoint/2010/main" val="2585704384"/>
+      </p:ext>
+    </p:extLst>
+  </p:cSld>
+  <p:clrMapOvr>
+    <a:masterClrMapping/>
+  </p:clrMapOvr>
+  <p:timing>
+    <p:tnLst>
+      <p:par>
+        <p:cTn id="1" dur="indefinite" restart="never" nodeType="tmRoot">
+          <p:childTnLst>
+            <p:seq concurrent="1" nextAc="seek">
+              <p:cTn id="2" dur="indefinite" nodeType="mainSeq">
+                <p:childTnLst>
+                  <p:par>
+                    <p:cTn id="3" fill="hold">
+                      <p:stCondLst>
+                        <p:cond delay="indefinite"/>
+                      </p:stCondLst>
+                      <p:childTnLst>
+                        <p:par>
+                          <p:cTn id="4" fill="hold">
+                            <p:stCondLst>
+                              <p:cond delay="0"/>
+                            </p:stCondLst>
+                            <p:childTnLst>
+                              <p:par>
+                                <p:cTn id="5" presetID="1" presetClass="entr" presetSubtype="0" fill="hold" nodeType="clickEffect">
+                                  <p:stCondLst>
+                                    <p:cond delay="0"/>
+                                  </p:stCondLst>
+                                  <p:childTnLst>
+                                    <p:set>
+                                      <p:cBhvr>
+                                        <p:cTn id="6" dur="1" fill="hold">
+                                          <p:stCondLst>
+                                            <p:cond delay="0"/>
+                                          </p:stCondLst>
+                                        </p:cTn>
+                                        <p:tgtEl>
+                                          <p:spTgt spid="5">
+                                            <p:txEl>
+                                              <p:pRg st="2" end="2"/>
+                                            </p:txEl>
+                                          </p:spTgt>
+                                        </p:tgtEl>
+                                        <p:attrNameLst>
+                                          <p:attrName>style.visibility</p:attrName>
+                                        </p:attrNameLst>
+                                      </p:cBhvr>
+                                      <p:to>
+                                        <p:strVal val="visible"/>
+                                      </p:to>
+                                    </p:set>
+                                  </p:childTnLst>
+                                </p:cTn>
+                              </p:par>
+                            </p:childTnLst>
+                          </p:cTn>
+                        </p:par>
+                      </p:childTnLst>
+                    </p:cTn>
+                  </p:par>
+                  <p:par>
+                    <p:cTn id="7" fill="hold">
+                      <p:stCondLst>
+                        <p:cond delay="indefinite"/>
+                      </p:stCondLst>
+                      <p:childTnLst>
+                        <p:par>
+                          <p:cTn id="8" fill="hold">
+                            <p:stCondLst>
+                              <p:cond delay="0"/>
+                            </p:stCondLst>
+                            <p:childTnLst>
+                              <p:par>
+                                <p:cTn id="9" presetID="1" presetClass="entr" presetSubtype="0" fill="hold" nodeType="clickEffect">
+                                  <p:stCondLst>
+                                    <p:cond delay="0"/>
+                                  </p:stCondLst>
+                                  <p:childTnLst>
+                                    <p:set>
+                                      <p:cBhvr>
+                                        <p:cTn id="10" dur="1" fill="hold">
+                                          <p:stCondLst>
+                                            <p:cond delay="0"/>
+                                          </p:stCondLst>
+                                        </p:cTn>
+                                        <p:tgtEl>
+                                          <p:spTgt spid="5">
+                                            <p:txEl>
+                                              <p:pRg st="4" end="4"/>
+                                            </p:txEl>
+                                          </p:spTgt>
+                                        </p:tgtEl>
+                                        <p:attrNameLst>
+                                          <p:attrName>style.visibility</p:attrName>
+                                        </p:attrNameLst>
+                                      </p:cBhvr>
+                                      <p:to>
+                                        <p:strVal val="visible"/>
+                                      </p:to>
+                                    </p:set>
+                                  </p:childTnLst>
+                                </p:cTn>
+                              </p:par>
+                            </p:childTnLst>
+                          </p:cTn>
+                        </p:par>
+                      </p:childTnLst>
+                    </p:cTn>
+                  </p:par>
+                </p:childTnLst>
+              </p:cTn>
+              <p:prevCondLst>
+                <p:cond evt="onPrev" delay="0">
+                  <p:tgtEl>
+                    <p:sldTgt/>
+                  </p:tgtEl>
+                </p:cond>
+              </p:prevCondLst>
+              <p:nextCondLst>
+                <p:cond evt="onNext" delay="0">
+                  <p:tgtEl>
+                    <p:sldTgt/>
+                  </p:tgtEl>
+                </p:cond>
+              </p:nextCondLst>
+            </p:seq>
+          </p:childTnLst>
+        </p:cTn>
+      </p:par>
+    </p:tnLst>
+  </p:timing>
+</p:sld>
+</file>
+
+<file path=ppt/slides/slide15.xml><?xml version="1.0" encoding="utf-8"?>
+<p:sld xmlns:a="http://schemas.openxmlformats.org/drawingml/2006/main" xmlns:r="http://schemas.openxmlformats.org/officeDocument/2006/relationships" xmlns:p="http://schemas.openxmlformats.org/presentationml/2006/main">
+  <p:cSld>
+    <p:spTree>
+      <p:nvGrpSpPr>
+        <p:cNvPr id="1" name="">
+          <a:extLst>
+            <a:ext uri="{FF2B5EF4-FFF2-40B4-BE49-F238E27FC236}">
+              <a16:creationId xmlns:a16="http://schemas.microsoft.com/office/drawing/2014/main" id="{858C18A4-5230-E62A-3A38-D9B28094513A}"/>
+            </a:ext>
+          </a:extLst>
+        </p:cNvPr>
+        <p:cNvGrpSpPr/>
+        <p:nvPr/>
+      </p:nvGrpSpPr>
+      <p:grpSpPr>
+        <a:xfrm>
+          <a:off x="0" y="0"/>
+          <a:ext cx="0" cy="0"/>
+          <a:chOff x="0" y="0"/>
+          <a:chExt cx="0" cy="0"/>
+        </a:xfrm>
+      </p:grpSpPr>
+      <p:sp>
+        <p:nvSpPr>
+          <p:cNvPr id="4" name="Slide Number Placeholder 3">
+            <a:extLst>
+              <a:ext uri="{FF2B5EF4-FFF2-40B4-BE49-F238E27FC236}">
+                <a16:creationId xmlns:a16="http://schemas.microsoft.com/office/drawing/2014/main" id="{D2952565-BAFC-16E7-3E39-0E0990C6197D}"/>
+              </a:ext>
+            </a:extLst>
+          </p:cNvPr>
+          <p:cNvSpPr>
+            <a:spLocks noGrp="1"/>
+          </p:cNvSpPr>
+          <p:nvPr>
+            <p:ph type="sldNum" sz="quarter" idx="4"/>
+          </p:nvPr>
+        </p:nvSpPr>
+        <p:spPr/>
+        <p:txBody>
+          <a:bodyPr/>
+          <a:lstStyle/>
+          <a:p>
+            <a:fld id="{71B8893A-F325-44A6-8EFB-883C20332CFE}" type="slidenum">
+              <a:rPr lang="en-US" smtClean="0"/>
+              <a:pPr/>
+              <a:t>15</a:t>
+            </a:fld>
+            <a:endParaRPr lang="en-US"/>
+          </a:p>
+        </p:txBody>
+      </p:sp>
+      <p:sp>
+        <p:nvSpPr>
+          <p:cNvPr id="3" name="Title 2">
+            <a:extLst>
+              <a:ext uri="{FF2B5EF4-FFF2-40B4-BE49-F238E27FC236}">
+                <a16:creationId xmlns:a16="http://schemas.microsoft.com/office/drawing/2014/main" id="{C5F83B2B-EDEC-6C13-CE86-734D01512122}"/>
+              </a:ext>
+            </a:extLst>
+          </p:cNvPr>
+          <p:cNvSpPr>
+            <a:spLocks noGrp="1"/>
+          </p:cNvSpPr>
+          <p:nvPr>
+            <p:ph type="title"/>
+          </p:nvPr>
+        </p:nvSpPr>
+        <p:spPr>
+          <a:xfrm>
+            <a:off x="381000" y="556399"/>
+            <a:ext cx="8382000" cy="857250"/>
+          </a:xfrm>
+        </p:spPr>
+        <p:txBody>
+          <a:bodyPr/>
+          <a:lstStyle/>
+          <a:p>
+            <a:r>
+              <a:rPr lang="en-US" dirty="0"/>
+              <a:t>Random Module</a:t>
+            </a:r>
+            <a:br>
+              <a:rPr lang="en-US" dirty="0"/>
+            </a:br>
+            <a:br>
+              <a:rPr lang="en-US" dirty="0"/>
+            </a:br>
+            <a:br>
+              <a:rPr lang="en-US" dirty="0"/>
+            </a:br>
+            <a:br>
+              <a:rPr lang="en-US" dirty="0"/>
+            </a:br>
+            <a:endParaRPr lang="en-US" dirty="0"/>
+          </a:p>
+        </p:txBody>
+      </p:sp>
+      <p:sp>
+        <p:nvSpPr>
+          <p:cNvPr id="5" name="TextBox 4">
+            <a:extLst>
+              <a:ext uri="{FF2B5EF4-FFF2-40B4-BE49-F238E27FC236}">
+                <a16:creationId xmlns:a16="http://schemas.microsoft.com/office/drawing/2014/main" id="{BF30BD29-CC0F-2ECD-C818-AF2BF9AE4191}"/>
+              </a:ext>
+            </a:extLst>
+          </p:cNvPr>
+          <p:cNvSpPr txBox="1"/>
+          <p:nvPr/>
+        </p:nvSpPr>
+        <p:spPr>
+          <a:xfrm>
+            <a:off x="381000" y="1105872"/>
+            <a:ext cx="7921083" cy="3077766"/>
+          </a:xfrm>
+          <a:prstGeom prst="rect">
+            <a:avLst/>
+          </a:prstGeom>
+          <a:noFill/>
+        </p:spPr>
+        <p:txBody>
+          <a:bodyPr wrap="square">
+            <a:spAutoFit/>
+          </a:bodyPr>
+          <a:lstStyle/>
+          <a:p>
+            <a:r>
+              <a:rPr lang="en-US" dirty="0"/>
+              <a:t>This module implements pseudo-random number generators for various distributions.</a:t>
+            </a:r>
+          </a:p>
+          <a:p>
+            <a:endParaRPr lang="en-US" sz="2000" dirty="0"/>
+          </a:p>
+          <a:p>
+            <a:r>
+              <a:rPr lang="en-US" sz="2000" dirty="0"/>
+              <a:t>Go to </a:t>
+            </a:r>
+            <a:r>
+              <a:rPr lang="en-US" sz="2000" dirty="0">
+                <a:hlinkClick r:id="rId3"/>
+              </a:rPr>
+              <a:t>https://docs.python.org/3/library/random.html</a:t>
+            </a:r>
+            <a:r>
+              <a:rPr lang="en-US" sz="2000" dirty="0"/>
+              <a:t> and look at the following functions.  What do they do?</a:t>
+            </a:r>
+          </a:p>
+          <a:p>
+            <a:endParaRPr lang="en-US" sz="2000" dirty="0"/>
+          </a:p>
+          <a:p>
+            <a:r>
+              <a:rPr lang="en-US" sz="2000" dirty="0" err="1"/>
+              <a:t>random.randint</a:t>
+            </a:r>
+            <a:r>
+              <a:rPr lang="en-US" sz="2000" dirty="0"/>
+              <a:t>(</a:t>
+            </a:r>
+            <a:r>
+              <a:rPr lang="en-US" sz="2000" dirty="0" err="1"/>
+              <a:t>a,b</a:t>
+            </a:r>
+            <a:r>
+              <a:rPr lang="en-US" sz="2000" dirty="0"/>
+              <a:t>)</a:t>
+            </a:r>
+          </a:p>
+          <a:p>
+            <a:endParaRPr lang="en-US" sz="2000" dirty="0"/>
+          </a:p>
+          <a:p>
+            <a:r>
+              <a:rPr lang="en-US" sz="2000" dirty="0" err="1"/>
+              <a:t>random.choice</a:t>
+            </a:r>
+            <a:r>
+              <a:rPr lang="en-US" sz="2000" dirty="0"/>
+              <a:t>(seq)</a:t>
+            </a:r>
+          </a:p>
+          <a:p>
+            <a:endParaRPr lang="en-US" sz="2000" dirty="0"/>
+          </a:p>
+          <a:p>
+            <a:r>
+              <a:rPr lang="en-US" sz="2000" dirty="0" err="1"/>
+              <a:t>random.random</a:t>
+            </a:r>
+            <a:r>
+              <a:rPr lang="en-US" sz="2000" dirty="0"/>
+              <a:t>()</a:t>
+            </a:r>
+          </a:p>
+        </p:txBody>
+      </p:sp>
+    </p:spTree>
+    <p:extLst>
+      <p:ext uri="{BB962C8B-B14F-4D97-AF65-F5344CB8AC3E}">
+        <p14:creationId xmlns:p14="http://schemas.microsoft.com/office/powerpoint/2010/main" val="2849010891"/>
+      </p:ext>
+    </p:extLst>
+  </p:cSld>
+  <p:clrMapOvr>
+    <a:masterClrMapping/>
+  </p:clrMapOvr>
+  <p:timing>
+    <p:tnLst>
+      <p:par>
+        <p:cTn id="1" dur="indefinite" restart="never" nodeType="tmRoot">
+          <p:childTnLst>
+            <p:seq concurrent="1" nextAc="seek">
+              <p:cTn id="2" dur="indefinite" nodeType="mainSeq">
+                <p:childTnLst>
+                  <p:par>
+                    <p:cTn id="3" fill="hold">
+                      <p:stCondLst>
+                        <p:cond delay="indefinite"/>
+                      </p:stCondLst>
+                      <p:childTnLst>
+                        <p:par>
+                          <p:cTn id="4" fill="hold">
+                            <p:stCondLst>
+                              <p:cond delay="0"/>
+                            </p:stCondLst>
+                            <p:childTnLst>
+                              <p:par>
+                                <p:cTn id="5" presetID="1" presetClass="entr" presetSubtype="0" fill="hold" nodeType="clickEffect">
+                                  <p:stCondLst>
+                                    <p:cond delay="0"/>
+                                  </p:stCondLst>
+                                  <p:childTnLst>
+                                    <p:set>
+                                      <p:cBhvr>
+                                        <p:cTn id="6" dur="1" fill="hold">
+                                          <p:stCondLst>
+                                            <p:cond delay="0"/>
+                                          </p:stCondLst>
+                                        </p:cTn>
+                                        <p:tgtEl>
+                                          <p:spTgt spid="5">
+                                            <p:txEl>
+                                              <p:pRg st="0" end="0"/>
+                                            </p:txEl>
+                                          </p:spTgt>
+                                        </p:tgtEl>
+                                        <p:attrNameLst>
+                                          <p:attrName>style.visibility</p:attrName>
+                                        </p:attrNameLst>
+                                      </p:cBhvr>
+                                      <p:to>
+                                        <p:strVal val="visible"/>
+                                      </p:to>
+                                    </p:set>
+                                  </p:childTnLst>
+                                </p:cTn>
+                              </p:par>
+                            </p:childTnLst>
+                          </p:cTn>
+                        </p:par>
+                      </p:childTnLst>
+                    </p:cTn>
+                  </p:par>
+                  <p:par>
+                    <p:cTn id="7" fill="hold">
+                      <p:stCondLst>
+                        <p:cond delay="indefinite"/>
+                      </p:stCondLst>
+                      <p:childTnLst>
+                        <p:par>
+                          <p:cTn id="8" fill="hold">
+                            <p:stCondLst>
+                              <p:cond delay="0"/>
+                            </p:stCondLst>
+                            <p:childTnLst>
+                              <p:par>
+                                <p:cTn id="9" presetID="1" presetClass="entr" presetSubtype="0" fill="hold" nodeType="clickEffect">
+                                  <p:stCondLst>
+                                    <p:cond delay="0"/>
+                                  </p:stCondLst>
+                                  <p:childTnLst>
+                                    <p:set>
+                                      <p:cBhvr>
+                                        <p:cTn id="10" dur="1" fill="hold">
+                                          <p:stCondLst>
+                                            <p:cond delay="0"/>
+                                          </p:stCondLst>
+                                        </p:cTn>
+                                        <p:tgtEl>
+                                          <p:spTgt spid="5">
+                                            <p:txEl>
+                                              <p:pRg st="2" end="2"/>
+                                            </p:txEl>
+                                          </p:spTgt>
+                                        </p:tgtEl>
+                                        <p:attrNameLst>
+                                          <p:attrName>style.visibility</p:attrName>
+                                        </p:attrNameLst>
+                                      </p:cBhvr>
+                                      <p:to>
+                                        <p:strVal val="visible"/>
+                                      </p:to>
+                                    </p:set>
+                                  </p:childTnLst>
+                                </p:cTn>
+                              </p:par>
+                            </p:childTnLst>
+                          </p:cTn>
+                        </p:par>
+                      </p:childTnLst>
+                    </p:cTn>
+                  </p:par>
+                  <p:par>
+                    <p:cTn id="11" fill="hold">
+                      <p:stCondLst>
+                        <p:cond delay="indefinite"/>
+                      </p:stCondLst>
+                      <p:childTnLst>
+                        <p:par>
+                          <p:cTn id="12" fill="hold">
+                            <p:stCondLst>
+                              <p:cond delay="0"/>
+                            </p:stCondLst>
+                            <p:childTnLst>
+                              <p:par>
+                                <p:cTn id="13" presetID="1" presetClass="entr" presetSubtype="0" fill="hold" nodeType="clickEffect">
+                                  <p:stCondLst>
+                                    <p:cond delay="0"/>
+                                  </p:stCondLst>
+                                  <p:childTnLst>
+                                    <p:set>
+                                      <p:cBhvr>
+                                        <p:cTn id="14" dur="1" fill="hold">
+                                          <p:stCondLst>
+                                            <p:cond delay="0"/>
+                                          </p:stCondLst>
+                                        </p:cTn>
+                                        <p:tgtEl>
+                                          <p:spTgt spid="5">
+                                            <p:txEl>
+                                              <p:pRg st="4" end="4"/>
+                                            </p:txEl>
+                                          </p:spTgt>
+                                        </p:tgtEl>
+                                        <p:attrNameLst>
+                                          <p:attrName>style.visibility</p:attrName>
+                                        </p:attrNameLst>
+                                      </p:cBhvr>
+                                      <p:to>
+                                        <p:strVal val="visible"/>
+                                      </p:to>
+                                    </p:set>
+                                  </p:childTnLst>
+                                </p:cTn>
+                              </p:par>
+                            </p:childTnLst>
+                          </p:cTn>
+                        </p:par>
+                      </p:childTnLst>
+                    </p:cTn>
+                  </p:par>
+                  <p:par>
+                    <p:cTn id="15" fill="hold">
+                      <p:stCondLst>
+                        <p:cond delay="indefinite"/>
+                      </p:stCondLst>
+                      <p:childTnLst>
+                        <p:par>
+                          <p:cTn id="16" fill="hold">
+                            <p:stCondLst>
+                              <p:cond delay="0"/>
+                            </p:stCondLst>
+                            <p:childTnLst>
+                              <p:par>
+                                <p:cTn id="17" presetID="1" presetClass="entr" presetSubtype="0" fill="hold" nodeType="clickEffect">
+                                  <p:stCondLst>
+                                    <p:cond delay="0"/>
+                                  </p:stCondLst>
+                                  <p:childTnLst>
+                                    <p:set>
+                                      <p:cBhvr>
+                                        <p:cTn id="18" dur="1" fill="hold">
+                                          <p:stCondLst>
+                                            <p:cond delay="0"/>
+                                          </p:stCondLst>
+                                        </p:cTn>
+                                        <p:tgtEl>
+                                          <p:spTgt spid="5">
+                                            <p:txEl>
+                                              <p:pRg st="6" end="6"/>
+                                            </p:txEl>
+                                          </p:spTgt>
+                                        </p:tgtEl>
+                                        <p:attrNameLst>
+                                          <p:attrName>style.visibility</p:attrName>
+                                        </p:attrNameLst>
+                                      </p:cBhvr>
+                                      <p:to>
+                                        <p:strVal val="visible"/>
+                                      </p:to>
+                                    </p:set>
+                                  </p:childTnLst>
+                                </p:cTn>
+                              </p:par>
+                            </p:childTnLst>
+                          </p:cTn>
+                        </p:par>
+                      </p:childTnLst>
+                    </p:cTn>
+                  </p:par>
+                  <p:par>
+                    <p:cTn id="19" fill="hold">
+                      <p:stCondLst>
+                        <p:cond delay="indefinite"/>
+                      </p:stCondLst>
+                      <p:childTnLst>
+                        <p:par>
+                          <p:cTn id="20" fill="hold">
+                            <p:stCondLst>
+                              <p:cond delay="0"/>
+                            </p:stCondLst>
+                            <p:childTnLst>
+                              <p:par>
+                                <p:cTn id="21" presetID="1" presetClass="entr" presetSubtype="0" fill="hold" nodeType="clickEffect">
+                                  <p:stCondLst>
+                                    <p:cond delay="0"/>
+                                  </p:stCondLst>
+                                  <p:childTnLst>
+                                    <p:set>
+                                      <p:cBhvr>
+                                        <p:cTn id="22" dur="1" fill="hold">
+                                          <p:stCondLst>
+                                            <p:cond delay="0"/>
+                                          </p:stCondLst>
+                                        </p:cTn>
+                                        <p:tgtEl>
+                                          <p:spTgt spid="5">
+                                            <p:txEl>
+                                              <p:pRg st="8" end="8"/>
+                                            </p:txEl>
+                                          </p:spTgt>
+                                        </p:tgtEl>
+                                        <p:attrNameLst>
+                                          <p:attrName>style.visibility</p:attrName>
+                                        </p:attrNameLst>
+                                      </p:cBhvr>
+                                      <p:to>
+                                        <p:strVal val="visible"/>
+                                      </p:to>
+                                    </p:set>
+                                  </p:childTnLst>
+                                </p:cTn>
+                              </p:par>
+                            </p:childTnLst>
+                          </p:cTn>
+                        </p:par>
+                      </p:childTnLst>
+                    </p:cTn>
+                  </p:par>
+                </p:childTnLst>
+              </p:cTn>
+              <p:prevCondLst>
+                <p:cond evt="onPrev" delay="0">
+                  <p:tgtEl>
+                    <p:sldTgt/>
+                  </p:tgtEl>
+                </p:cond>
+              </p:prevCondLst>
+              <p:nextCondLst>
+                <p:cond evt="onNext" delay="0">
+                  <p:tgtEl>
+                    <p:sldTgt/>
+                  </p:tgtEl>
+                </p:cond>
+              </p:nextCondLst>
+            </p:seq>
+          </p:childTnLst>
+        </p:cTn>
+      </p:par>
+    </p:tnLst>
+  </p:timing>
+</p:sld>
+</file>
+
+<file path=ppt/slides/slide16.xml><?xml version="1.0" encoding="utf-8"?>
+<p:sld xmlns:a="http://schemas.openxmlformats.org/drawingml/2006/main" xmlns:r="http://schemas.openxmlformats.org/officeDocument/2006/relationships" xmlns:p="http://schemas.openxmlformats.org/presentationml/2006/main">
+  <p:cSld>
+    <p:spTree>
+      <p:nvGrpSpPr>
+        <p:cNvPr id="1" name=""/>
+        <p:cNvGrpSpPr/>
+        <p:nvPr/>
+      </p:nvGrpSpPr>
+      <p:grpSpPr>
+        <a:xfrm>
+          <a:off x="0" y="0"/>
+          <a:ext cx="0" cy="0"/>
+          <a:chOff x="0" y="0"/>
+          <a:chExt cx="0" cy="0"/>
+        </a:xfrm>
+      </p:grpSpPr>
+      <p:sp>
+        <p:nvSpPr>
+          <p:cNvPr id="4" name="Slide Number Placeholder 3">
+            <a:extLst>
+              <a:ext uri="{FF2B5EF4-FFF2-40B4-BE49-F238E27FC236}">
+                <a16:creationId xmlns:a16="http://schemas.microsoft.com/office/drawing/2014/main" id="{D0F0E6DB-EE9E-45C5-B784-49ED7052A2EB}"/>
+              </a:ext>
+            </a:extLst>
+          </p:cNvPr>
+          <p:cNvSpPr>
+            <a:spLocks noGrp="1"/>
+          </p:cNvSpPr>
+          <p:nvPr>
+            <p:ph type="sldNum" sz="quarter" idx="4"/>
+          </p:nvPr>
+        </p:nvSpPr>
+        <p:spPr/>
+        <p:txBody>
+          <a:bodyPr/>
+          <a:lstStyle/>
+          <a:p>
+            <a:fld id="{71B8893A-F325-44A6-8EFB-883C20332CFE}" type="slidenum">
+              <a:rPr lang="en-US" smtClean="0"/>
+              <a:pPr/>
+              <a:t>16</a:t>
+            </a:fld>
+            <a:endParaRPr lang="en-US"/>
+          </a:p>
+        </p:txBody>
+      </p:sp>
+      <p:sp>
+        <p:nvSpPr>
+          <p:cNvPr id="3" name="Title 2">
+            <a:extLst>
+              <a:ext uri="{FF2B5EF4-FFF2-40B4-BE49-F238E27FC236}">
+                <a16:creationId xmlns:a16="http://schemas.microsoft.com/office/drawing/2014/main" id="{DA67ABD9-8A31-4CB9-94E1-A0DA84E71640}"/>
+              </a:ext>
+            </a:extLst>
+          </p:cNvPr>
+          <p:cNvSpPr>
+            <a:spLocks noGrp="1"/>
+          </p:cNvSpPr>
+          <p:nvPr>
+            <p:ph type="title"/>
+          </p:nvPr>
+        </p:nvSpPr>
+        <p:spPr>
+          <a:xfrm>
+            <a:off x="381000" y="1143697"/>
+            <a:ext cx="8382000" cy="857250"/>
+          </a:xfrm>
+        </p:spPr>
+        <p:txBody>
+          <a:bodyPr/>
+          <a:lstStyle/>
+          <a:p>
+            <a:r>
+              <a:rPr lang="en-US" dirty="0"/>
+              <a:t>Write a Python Script that randomly generates an integer from 0 to 100.  </a:t>
+            </a:r>
+            <a:br>
+              <a:rPr lang="en-US" dirty="0"/>
+            </a:br>
+            <a:br>
+              <a:rPr lang="en-US" dirty="0"/>
+            </a:br>
+            <a:r>
+              <a:rPr lang="en-US" dirty="0"/>
+              <a:t>If the integer is less than 50, state “The number is less than 50”</a:t>
+            </a:r>
+            <a:br>
+              <a:rPr lang="en-US" dirty="0"/>
+            </a:br>
+            <a:r>
+              <a:rPr lang="en-US" dirty="0"/>
+              <a:t>if the number is 50, state “The number is 50”</a:t>
+            </a:r>
+            <a:br>
+              <a:rPr lang="en-US" dirty="0"/>
+            </a:br>
+            <a:r>
+              <a:rPr lang="en-US" dirty="0"/>
+              <a:t>if the number is greater than 50, state “The number is greater than 50”</a:t>
+            </a:r>
+            <a:br>
+              <a:rPr lang="en-US" dirty="0"/>
+            </a:br>
+            <a:br>
+              <a:rPr lang="en-US" dirty="0"/>
+            </a:br>
+            <a:r>
+              <a:rPr lang="en-US" dirty="0"/>
+              <a:t>*Display the number to check your code*</a:t>
+            </a:r>
+          </a:p>
+        </p:txBody>
+      </p:sp>
+    </p:spTree>
+    <p:extLst>
+      <p:ext uri="{BB962C8B-B14F-4D97-AF65-F5344CB8AC3E}">
+        <p14:creationId xmlns:p14="http://schemas.microsoft.com/office/powerpoint/2010/main" val="3743467659"/>
+      </p:ext>
+    </p:extLst>
+  </p:cSld>
+  <p:clrMapOvr>
+    <a:masterClrMapping/>
+  </p:clrMapOvr>
+</p:sld>
+</file>
+
+<file path=ppt/slides/slide17.xml><?xml version="1.0" encoding="utf-8"?>
+<p:sld xmlns:a="http://schemas.openxmlformats.org/drawingml/2006/main" xmlns:r="http://schemas.openxmlformats.org/officeDocument/2006/relationships" xmlns:p="http://schemas.openxmlformats.org/presentationml/2006/main">
+  <p:cSld>
+    <p:spTree>
+      <p:nvGrpSpPr>
+        <p:cNvPr id="1" name="">
+          <a:extLst>
+            <a:ext uri="{FF2B5EF4-FFF2-40B4-BE49-F238E27FC236}">
+              <a16:creationId xmlns:a16="http://schemas.microsoft.com/office/drawing/2014/main" id="{031A0284-140A-62F3-9FEC-F52652C92317}"/>
+            </a:ext>
+          </a:extLst>
+        </p:cNvPr>
+        <p:cNvGrpSpPr/>
+        <p:nvPr/>
+      </p:nvGrpSpPr>
+      <p:grpSpPr>
+        <a:xfrm>
+          <a:off x="0" y="0"/>
+          <a:ext cx="0" cy="0"/>
+          <a:chOff x="0" y="0"/>
+          <a:chExt cx="0" cy="0"/>
+        </a:xfrm>
+      </p:grpSpPr>
+      <p:sp>
+        <p:nvSpPr>
+          <p:cNvPr id="4" name="Slide Number Placeholder 3">
+            <a:extLst>
+              <a:ext uri="{FF2B5EF4-FFF2-40B4-BE49-F238E27FC236}">
+                <a16:creationId xmlns:a16="http://schemas.microsoft.com/office/drawing/2014/main" id="{EBBF886C-F0D3-50A9-36C3-A573CDFD3AED}"/>
+              </a:ext>
+            </a:extLst>
+          </p:cNvPr>
+          <p:cNvSpPr>
+            <a:spLocks noGrp="1"/>
+          </p:cNvSpPr>
+          <p:nvPr>
+            <p:ph type="sldNum" sz="quarter" idx="4"/>
+          </p:nvPr>
+        </p:nvSpPr>
+        <p:spPr/>
+        <p:txBody>
+          <a:bodyPr/>
+          <a:lstStyle/>
+          <a:p>
+            <a:fld id="{71B8893A-F325-44A6-8EFB-883C20332CFE}" type="slidenum">
+              <a:rPr lang="en-US" smtClean="0"/>
+              <a:pPr/>
+              <a:t>17</a:t>
+            </a:fld>
+            <a:endParaRPr lang="en-US"/>
+          </a:p>
+        </p:txBody>
+      </p:sp>
+      <p:sp>
+        <p:nvSpPr>
+          <p:cNvPr id="3" name="Title 2">
+            <a:extLst>
+              <a:ext uri="{FF2B5EF4-FFF2-40B4-BE49-F238E27FC236}">
+                <a16:creationId xmlns:a16="http://schemas.microsoft.com/office/drawing/2014/main" id="{CB4AD686-95C5-C5AD-683E-B9BDB0549245}"/>
+              </a:ext>
+            </a:extLst>
+          </p:cNvPr>
+          <p:cNvSpPr>
+            <a:spLocks noGrp="1"/>
+          </p:cNvSpPr>
+          <p:nvPr>
+            <p:ph type="title"/>
+          </p:nvPr>
+        </p:nvSpPr>
+        <p:spPr>
+          <a:xfrm>
+            <a:off x="381000" y="1143697"/>
+            <a:ext cx="8382000" cy="857250"/>
+          </a:xfrm>
+        </p:spPr>
+        <p:txBody>
+          <a:bodyPr/>
+          <a:lstStyle/>
+          <a:p>
+            <a:r>
+              <a:rPr lang="en-US" dirty="0"/>
+              <a:t>Write a Python script that:</a:t>
+            </a:r>
+            <a:br>
+              <a:rPr lang="en-US" dirty="0"/>
+            </a:br>
+            <a:br>
+              <a:rPr lang="en-US" dirty="0"/>
+            </a:br>
+            <a:br>
+              <a:rPr lang="en-US" dirty="0"/>
+            </a:br>
+            <a:r>
+              <a:rPr lang="en-US" dirty="0" err="1"/>
+              <a:t>name_list</a:t>
+            </a:r>
+            <a:r>
+              <a:rPr lang="en-US" dirty="0"/>
+              <a:t> = [“John”, “Rachel”, “Sam”, “Carlos”, “Jane”]</a:t>
+            </a:r>
+            <a:br>
+              <a:rPr lang="en-US" dirty="0"/>
+            </a:br>
+            <a:br>
+              <a:rPr lang="en-US" dirty="0"/>
+            </a:br>
+            <a:r>
+              <a:rPr lang="en-US" dirty="0"/>
+              <a:t>Randomly picks a name from the list.  </a:t>
+            </a:r>
+            <a:br>
+              <a:rPr lang="en-US" dirty="0"/>
+            </a:br>
+            <a:br>
+              <a:rPr lang="en-US" dirty="0"/>
+            </a:br>
+            <a:r>
+              <a:rPr lang="en-US" dirty="0"/>
+              <a:t>Print the name.</a:t>
+            </a:r>
+          </a:p>
+        </p:txBody>
+      </p:sp>
+    </p:spTree>
+    <p:extLst>
+      <p:ext uri="{BB962C8B-B14F-4D97-AF65-F5344CB8AC3E}">
+        <p14:creationId xmlns:p14="http://schemas.microsoft.com/office/powerpoint/2010/main" val="3653447485"/>
+      </p:ext>
+    </p:extLst>
+  </p:cSld>
+  <p:clrMapOvr>
+    <a:masterClrMapping/>
+  </p:clrMapOvr>
+</p:sld>
+</file>
+
+<file path=ppt/slides/slide18.xml><?xml version="1.0" encoding="utf-8"?>
+<p:sld xmlns:a="http://schemas.openxmlformats.org/drawingml/2006/main" xmlns:r="http://schemas.openxmlformats.org/officeDocument/2006/relationships" xmlns:p="http://schemas.openxmlformats.org/presentationml/2006/main">
+  <p:cSld>
+    <p:spTree>
+      <p:nvGrpSpPr>
+        <p:cNvPr id="1" name="">
+          <a:extLst>
+            <a:ext uri="{FF2B5EF4-FFF2-40B4-BE49-F238E27FC236}">
+              <a16:creationId xmlns:a16="http://schemas.microsoft.com/office/drawing/2014/main" id="{28A46AD0-7079-3299-E833-8B13CD843BAC}"/>
+            </a:ext>
+          </a:extLst>
+        </p:cNvPr>
+        <p:cNvGrpSpPr/>
+        <p:nvPr/>
+      </p:nvGrpSpPr>
+      <p:grpSpPr>
+        <a:xfrm>
+          <a:off x="0" y="0"/>
+          <a:ext cx="0" cy="0"/>
+          <a:chOff x="0" y="0"/>
+          <a:chExt cx="0" cy="0"/>
+        </a:xfrm>
+      </p:grpSpPr>
+      <p:sp>
+        <p:nvSpPr>
+          <p:cNvPr id="4" name="Slide Number Placeholder 3">
+            <a:extLst>
+              <a:ext uri="{FF2B5EF4-FFF2-40B4-BE49-F238E27FC236}">
+                <a16:creationId xmlns:a16="http://schemas.microsoft.com/office/drawing/2014/main" id="{8F30125A-E362-2C30-FB2A-39CC17C95418}"/>
+              </a:ext>
+            </a:extLst>
+          </p:cNvPr>
+          <p:cNvSpPr>
+            <a:spLocks noGrp="1"/>
+          </p:cNvSpPr>
+          <p:nvPr>
+            <p:ph type="sldNum" sz="quarter" idx="4"/>
+          </p:nvPr>
+        </p:nvSpPr>
+        <p:spPr/>
+        <p:txBody>
+          <a:bodyPr/>
+          <a:lstStyle/>
+          <a:p>
+            <a:fld id="{71B8893A-F325-44A6-8EFB-883C20332CFE}" type="slidenum">
+              <a:rPr lang="en-US" smtClean="0"/>
+              <a:pPr/>
+              <a:t>18</a:t>
+            </a:fld>
+            <a:endParaRPr lang="en-US"/>
+          </a:p>
+        </p:txBody>
+      </p:sp>
+      <p:sp>
+        <p:nvSpPr>
+          <p:cNvPr id="3" name="Title 2">
+            <a:extLst>
+              <a:ext uri="{FF2B5EF4-FFF2-40B4-BE49-F238E27FC236}">
+                <a16:creationId xmlns:a16="http://schemas.microsoft.com/office/drawing/2014/main" id="{DB6CAD27-4834-FC9D-BA9C-FEEBE504B87D}"/>
+              </a:ext>
+            </a:extLst>
+          </p:cNvPr>
+          <p:cNvSpPr>
+            <a:spLocks noGrp="1"/>
+          </p:cNvSpPr>
+          <p:nvPr>
+            <p:ph type="title"/>
+          </p:nvPr>
+        </p:nvSpPr>
+        <p:spPr>
+          <a:xfrm>
+            <a:off x="381000" y="556399"/>
+            <a:ext cx="8382000" cy="857250"/>
+          </a:xfrm>
+        </p:spPr>
+        <p:txBody>
+          <a:bodyPr/>
+          <a:lstStyle/>
+          <a:p>
+            <a:r>
+              <a:rPr lang="en-US" dirty="0"/>
+              <a:t>Math Module</a:t>
+            </a:r>
+            <a:br>
+              <a:rPr lang="en-US" dirty="0"/>
+            </a:br>
+            <a:br>
+              <a:rPr lang="en-US" dirty="0"/>
+            </a:br>
+            <a:br>
+              <a:rPr lang="en-US" dirty="0"/>
+            </a:br>
+            <a:br>
+              <a:rPr lang="en-US" dirty="0"/>
+            </a:br>
+            <a:endParaRPr lang="en-US" dirty="0"/>
+          </a:p>
+        </p:txBody>
+      </p:sp>
+      <p:sp>
+        <p:nvSpPr>
+          <p:cNvPr id="5" name="TextBox 4">
+            <a:extLst>
+              <a:ext uri="{FF2B5EF4-FFF2-40B4-BE49-F238E27FC236}">
+                <a16:creationId xmlns:a16="http://schemas.microsoft.com/office/drawing/2014/main" id="{B590859F-EB65-BB3D-67D6-BED8A63150B0}"/>
+              </a:ext>
+            </a:extLst>
+          </p:cNvPr>
+          <p:cNvSpPr txBox="1"/>
+          <p:nvPr/>
+        </p:nvSpPr>
+        <p:spPr>
+          <a:xfrm>
+            <a:off x="381000" y="1105872"/>
+            <a:ext cx="7921083" cy="3293209"/>
+          </a:xfrm>
+          <a:prstGeom prst="rect">
+            <a:avLst/>
+          </a:prstGeom>
+          <a:noFill/>
+        </p:spPr>
+        <p:txBody>
+          <a:bodyPr wrap="square">
+            <a:spAutoFit/>
+          </a:bodyPr>
+          <a:lstStyle/>
+          <a:p>
+            <a:r>
+              <a:rPr lang="en-US" dirty="0"/>
+              <a:t>This module provides access to common mathematical functions and constants such as sin() and pi.</a:t>
+            </a:r>
+          </a:p>
+          <a:p>
+            <a:endParaRPr lang="en-US" sz="2000" dirty="0"/>
+          </a:p>
+          <a:p>
+            <a:r>
+              <a:rPr lang="en-US" sz="2000" dirty="0"/>
+              <a:t>Go to </a:t>
+            </a:r>
+            <a:r>
+              <a:rPr lang="en-US" sz="2000" dirty="0">
+                <a:hlinkClick r:id="rId3"/>
+              </a:rPr>
+              <a:t>https://docs.python.org/3/library/math.html</a:t>
+            </a:r>
+            <a:r>
+              <a:rPr lang="en-US" sz="2000" dirty="0"/>
+              <a:t> and look at the following functions/constants.  What do they do?</a:t>
+            </a:r>
+          </a:p>
+          <a:p>
+            <a:endParaRPr lang="en-US" sz="2000" dirty="0"/>
+          </a:p>
+          <a:p>
+            <a:r>
+              <a:rPr lang="en-US" sz="2000" dirty="0" err="1"/>
+              <a:t>math.dist</a:t>
+            </a:r>
+            <a:r>
+              <a:rPr lang="en-US" sz="2000" dirty="0"/>
+              <a:t>(p, q)</a:t>
+            </a:r>
+          </a:p>
+          <a:p>
+            <a:endParaRPr lang="en-US" sz="2000" dirty="0"/>
+          </a:p>
+          <a:p>
+            <a:r>
+              <a:rPr lang="en-US" sz="2000" dirty="0" err="1"/>
+              <a:t>math.pi</a:t>
+            </a:r>
+            <a:endParaRPr lang="en-US" sz="2000" dirty="0"/>
+          </a:p>
+          <a:p>
+            <a:endParaRPr lang="en-US" sz="2000" dirty="0"/>
+          </a:p>
+          <a:p>
+            <a:r>
+              <a:rPr lang="en-US" sz="2000" dirty="0" err="1"/>
+              <a:t>math.degrees</a:t>
+            </a:r>
+            <a:r>
+              <a:rPr lang="en-US" sz="2000" dirty="0"/>
+              <a:t>(x)</a:t>
+            </a:r>
+          </a:p>
+        </p:txBody>
+      </p:sp>
+    </p:spTree>
+    <p:extLst>
+      <p:ext uri="{BB962C8B-B14F-4D97-AF65-F5344CB8AC3E}">
+        <p14:creationId xmlns:p14="http://schemas.microsoft.com/office/powerpoint/2010/main" val="1756041969"/>
+      </p:ext>
+    </p:extLst>
+  </p:cSld>
+  <p:clrMapOvr>
+    <a:masterClrMapping/>
+  </p:clrMapOvr>
+</p:sld>
+</file>
+
+<file path=ppt/slides/slide19.xml><?xml version="1.0" encoding="utf-8"?>
+<p:sld xmlns:a="http://schemas.openxmlformats.org/drawingml/2006/main" xmlns:r="http://schemas.openxmlformats.org/officeDocument/2006/relationships" xmlns:p="http://schemas.openxmlformats.org/presentationml/2006/main">
+  <p:cSld>
+    <p:spTree>
+      <p:nvGrpSpPr>
+        <p:cNvPr id="1" name=""/>
+        <p:cNvGrpSpPr/>
+        <p:nvPr/>
+      </p:nvGrpSpPr>
+      <p:grpSpPr>
+        <a:xfrm>
+          <a:off x="0" y="0"/>
+          <a:ext cx="0" cy="0"/>
+          <a:chOff x="0" y="0"/>
+          <a:chExt cx="0" cy="0"/>
+        </a:xfrm>
+      </p:grpSpPr>
+      <p:sp>
+        <p:nvSpPr>
+          <p:cNvPr id="4" name="Slide Number Placeholder 3">
+            <a:extLst>
+              <a:ext uri="{FF2B5EF4-FFF2-40B4-BE49-F238E27FC236}">
+                <a16:creationId xmlns:a16="http://schemas.microsoft.com/office/drawing/2014/main" id="{D0F0E6DB-EE9E-45C5-B784-49ED7052A2EB}"/>
+              </a:ext>
+            </a:extLst>
+          </p:cNvPr>
+          <p:cNvSpPr>
+            <a:spLocks noGrp="1"/>
+          </p:cNvSpPr>
+          <p:nvPr>
+            <p:ph type="sldNum" sz="quarter" idx="4"/>
+          </p:nvPr>
+        </p:nvSpPr>
+        <p:spPr/>
+        <p:txBody>
+          <a:bodyPr/>
+          <a:lstStyle/>
+          <a:p>
+            <a:fld id="{71B8893A-F325-44A6-8EFB-883C20332CFE}" type="slidenum">
+              <a:rPr lang="en-US" smtClean="0"/>
+              <a:pPr/>
+              <a:t>19</a:t>
+            </a:fld>
+            <a:endParaRPr lang="en-US"/>
+          </a:p>
+        </p:txBody>
+      </p:sp>
+      <p:sp>
+        <p:nvSpPr>
+          <p:cNvPr id="3" name="Title 2">
+            <a:extLst>
+              <a:ext uri="{FF2B5EF4-FFF2-40B4-BE49-F238E27FC236}">
+                <a16:creationId xmlns:a16="http://schemas.microsoft.com/office/drawing/2014/main" id="{DA67ABD9-8A31-4CB9-94E1-A0DA84E71640}"/>
+              </a:ext>
+            </a:extLst>
+          </p:cNvPr>
+          <p:cNvSpPr>
+            <a:spLocks noGrp="1"/>
+          </p:cNvSpPr>
+          <p:nvPr>
+            <p:ph type="title"/>
+          </p:nvPr>
+        </p:nvSpPr>
+        <p:spPr>
+          <a:xfrm>
+            <a:off x="546409" y="906053"/>
+            <a:ext cx="7898780" cy="857250"/>
+          </a:xfrm>
+        </p:spPr>
+        <p:txBody>
+          <a:bodyPr/>
+          <a:lstStyle/>
+          <a:p>
+            <a:r>
+              <a:rPr lang="en-US" dirty="0"/>
+              <a:t>You want to build a circular patio for your home.  Write a program that prompts the user for the diameter of their patio (in feet).  With the diameter, calculate the total area of the patio.  </a:t>
+            </a:r>
+            <a:br>
+              <a:rPr lang="en-US" dirty="0"/>
+            </a:br>
+            <a:br>
+              <a:rPr lang="en-US" dirty="0"/>
+            </a:br>
+            <a:r>
+              <a:rPr lang="en-US" dirty="0"/>
+              <a:t>Print the total area of the patio.</a:t>
+            </a:r>
+            <a:br>
+              <a:rPr lang="en-US" dirty="0"/>
+            </a:br>
+            <a:br>
+              <a:rPr lang="en-US" dirty="0"/>
+            </a:br>
+            <a:r>
+              <a:rPr lang="en-US" dirty="0"/>
+              <a:t>Print the number of bricks you suggest the user buys for their project. (Bricks are 4” x 6”)</a:t>
+            </a:r>
+            <a:br>
+              <a:rPr lang="en-US" dirty="0"/>
+            </a:br>
+            <a:br>
+              <a:rPr lang="en-US" dirty="0"/>
+            </a:br>
+            <a:r>
+              <a:rPr lang="en-US" dirty="0"/>
+              <a:t>Use </a:t>
+            </a:r>
+            <a:r>
+              <a:rPr lang="en-US" dirty="0" err="1"/>
+              <a:t>math.pi</a:t>
+            </a:r>
+            <a:endParaRPr lang="en-US" dirty="0"/>
+          </a:p>
+        </p:txBody>
+      </p:sp>
+    </p:spTree>
+    <p:extLst>
+      <p:ext uri="{BB962C8B-B14F-4D97-AF65-F5344CB8AC3E}">
+        <p14:creationId xmlns:p14="http://schemas.microsoft.com/office/powerpoint/2010/main" val="1824374177"/>
+      </p:ext>
+    </p:extLst>
+  </p:cSld>
+  <p:clrMapOvr>
+    <a:masterClrMapping/>
+  </p:clrMapOvr>
+</p:sld>
+</file>
+
+<file path=ppt/slides/slide2.xml><?xml version="1.0" encoding="utf-8"?>
+<p:sld xmlns:a="http://schemas.openxmlformats.org/drawingml/2006/main" xmlns:r="http://schemas.openxmlformats.org/officeDocument/2006/relationships" xmlns:p="http://schemas.openxmlformats.org/presentationml/2006/main">
+  <p:cSld>
+    <p:spTree>
+      <p:nvGrpSpPr>
+        <p:cNvPr id="1" name="">
+          <a:extLst>
+            <a:ext uri="{FF2B5EF4-FFF2-40B4-BE49-F238E27FC236}">
+              <a16:creationId xmlns:a16="http://schemas.microsoft.com/office/drawing/2014/main" id="{5B19D20E-BD9A-847F-707A-41F7A86C8D39}"/>
+            </a:ext>
+          </a:extLst>
+        </p:cNvPr>
+        <p:cNvGrpSpPr/>
+        <p:nvPr/>
+      </p:nvGrpSpPr>
+      <p:grpSpPr>
+        <a:xfrm>
+          <a:off x="0" y="0"/>
+          <a:ext cx="0" cy="0"/>
+          <a:chOff x="0" y="0"/>
+          <a:chExt cx="0" cy="0"/>
+        </a:xfrm>
+      </p:grpSpPr>
+      <p:sp>
+        <p:nvSpPr>
+          <p:cNvPr id="2" name="Title 1">
+            <a:extLst>
+              <a:ext uri="{FF2B5EF4-FFF2-40B4-BE49-F238E27FC236}">
+                <a16:creationId xmlns:a16="http://schemas.microsoft.com/office/drawing/2014/main" id="{DC869BD9-8066-F6DB-BC59-621195265012}"/>
+              </a:ext>
+            </a:extLst>
+          </p:cNvPr>
+          <p:cNvSpPr>
+            <a:spLocks noGrp="1"/>
+          </p:cNvSpPr>
+          <p:nvPr>
+            <p:ph type="title"/>
+          </p:nvPr>
+        </p:nvSpPr>
+        <p:spPr/>
+        <p:txBody>
+          <a:bodyPr/>
+          <a:lstStyle/>
+          <a:p>
+            <a:br>
+              <a:rPr lang="en-US" dirty="0"/>
+            </a:br>
+            <a:r>
+              <a:rPr lang="en-US" dirty="0"/>
+              <a:t>Motivation</a:t>
+            </a:r>
+          </a:p>
+        </p:txBody>
+      </p:sp>
+      <p:pic>
+        <p:nvPicPr>
+          <p:cNvPr id="3" name="Online Media 2" title="Parkour PARKOUR - The Office US">
+            <a:hlinkClick r:id="" action="ppaction://media"/>
+            <a:extLst>
+              <a:ext uri="{FF2B5EF4-FFF2-40B4-BE49-F238E27FC236}">
+                <a16:creationId xmlns:a16="http://schemas.microsoft.com/office/drawing/2014/main" id="{FA0752D9-62DB-4F2A-4CBE-93C77F0E189F}"/>
+              </a:ext>
+            </a:extLst>
+          </p:cNvPr>
+          <p:cNvPicPr>
+            <a:picLocks noRot="1" noChangeAspect="1"/>
+          </p:cNvPicPr>
+          <p:nvPr>
+            <a:videoFile r:link="rId1"/>
+          </p:nvPr>
+        </p:nvPicPr>
+        <p:blipFill>
+          <a:blip r:embed="rId4"/>
+          <a:stretch>
+            <a:fillRect/>
+          </a:stretch>
+        </p:blipFill>
+        <p:spPr>
+          <a:xfrm>
+            <a:off x="981308" y="754072"/>
+            <a:ext cx="7019500" cy="3965681"/>
+          </a:xfrm>
+          <a:prstGeom prst="rect">
+            <a:avLst/>
+          </a:prstGeom>
+        </p:spPr>
+      </p:pic>
+    </p:spTree>
+    <p:extLst>
+      <p:ext uri="{BB962C8B-B14F-4D97-AF65-F5344CB8AC3E}">
+        <p14:creationId xmlns:p14="http://schemas.microsoft.com/office/powerpoint/2010/main" val="2254684427"/>
+      </p:ext>
+    </p:extLst>
+  </p:cSld>
+  <p:clrMapOvr>
+    <a:masterClrMapping/>
+  </p:clrMapOvr>
+  <p:timing>
+    <p:tnLst>
+      <p:par>
+        <p:cTn id="1" dur="indefinite" restart="never" nodeType="tmRoot">
+          <p:childTnLst>
+            <p:seq concurrent="1" nextAc="seek">
+              <p:cTn id="2" dur="indefinite" nodeType="mainSeq">
+                <p:childTnLst>
+                  <p:par>
+                    <p:cTn id="3" fill="hold">
+                      <p:stCondLst>
+                        <p:cond delay="indefinite"/>
+                      </p:stCondLst>
+                      <p:childTnLst>
+                        <p:par>
+                          <p:cTn id="4" fill="hold">
+                            <p:stCondLst>
+                              <p:cond delay="0"/>
+                            </p:stCondLst>
+                            <p:childTnLst>
+                              <p:par>
+                                <p:cTn id="5" presetID="1" presetClass="mediacall" presetSubtype="0" fill="hold" nodeType="clickEffect">
+                                  <p:stCondLst>
+                                    <p:cond delay="0"/>
+                                  </p:stCondLst>
+                                  <p:childTnLst>
+                                    <p:cmd type="call" cmd="playFrom(0.0)">
+                                      <p:cBhvr>
+                                        <p:cTn id="6" dur="1" fill="hold"/>
+                                        <p:tgtEl>
+                                          <p:spTgt spid="3"/>
+                                        </p:tgtEl>
+                                      </p:cBhvr>
+                                    </p:cmd>
+                                  </p:childTnLst>
+                                </p:cTn>
+                              </p:par>
+                            </p:childTnLst>
+                          </p:cTn>
+                        </p:par>
+                      </p:childTnLst>
+                    </p:cTn>
+                  </p:par>
+                </p:childTnLst>
+              </p:cTn>
+              <p:prevCondLst>
+                <p:cond evt="onPrev" delay="0">
+                  <p:tgtEl>
+                    <p:sldTgt/>
+                  </p:tgtEl>
+                </p:cond>
+              </p:prevCondLst>
+              <p:nextCondLst>
+                <p:cond evt="onNext" delay="0">
+                  <p:tgtEl>
+                    <p:sldTgt/>
+                  </p:tgtEl>
+                </p:cond>
+              </p:nextCondLst>
+            </p:seq>
+            <p:video>
+              <p:cMediaNode vol="80000">
+                <p:cTn id="7" fill="hold" display="0">
+                  <p:stCondLst>
+                    <p:cond delay="indefinite"/>
+                  </p:stCondLst>
+                </p:cTn>
+                <p:tgtEl>
+                  <p:spTgt spid="3"/>
+                </p:tgtEl>
+              </p:cMediaNode>
+            </p:video>
+            <p:seq concurrent="1" nextAc="seek">
+              <p:cTn id="8" restart="whenNotActive" fill="hold" evtFilter="cancelBubble" nodeType="interactiveSeq">
+                <p:stCondLst>
+                  <p:cond evt="onClick" delay="0">
+                    <p:tgtEl>
+                      <p:spTgt spid="3"/>
+                    </p:tgtEl>
+                  </p:cond>
+                </p:stCondLst>
+                <p:endSync evt="end" delay="0">
+                  <p:rtn val="all"/>
+                </p:endSync>
+                <p:childTnLst>
+                  <p:par>
+                    <p:cTn id="9" fill="hold">
+                      <p:stCondLst>
+                        <p:cond delay="0"/>
+                      </p:stCondLst>
+                      <p:childTnLst>
+                        <p:par>
+                          <p:cTn id="10" fill="hold">
+                            <p:stCondLst>
+                              <p:cond delay="0"/>
+                            </p:stCondLst>
+                            <p:childTnLst>
+                              <p:par>
+                                <p:cTn id="11" presetID="2" presetClass="mediacall" presetSubtype="0" fill="hold" nodeType="clickEffect">
+                                  <p:stCondLst>
+                                    <p:cond delay="0"/>
+                                  </p:stCondLst>
+                                  <p:childTnLst>
+                                    <p:cmd type="call" cmd="togglePause">
+                                      <p:cBhvr>
+                                        <p:cTn id="12" dur="1" fill="hold"/>
+                                        <p:tgtEl>
+                                          <p:spTgt spid="3"/>
+                                        </p:tgtEl>
+                                      </p:cBhvr>
+                                    </p:cmd>
+                                  </p:childTnLst>
+                                </p:cTn>
+                              </p:par>
+                            </p:childTnLst>
+                          </p:cTn>
+                        </p:par>
+                      </p:childTnLst>
+                    </p:cTn>
+                  </p:par>
+                </p:childTnLst>
+              </p:cTn>
+              <p:nextCondLst>
+                <p:cond evt="onClick" delay="0">
+                  <p:tgtEl>
+                    <p:spTgt spid="3"/>
+                  </p:tgtEl>
+                </p:cond>
+              </p:nextCondLst>
+            </p:seq>
+          </p:childTnLst>
+        </p:cTn>
+      </p:par>
+    </p:tnLst>
+  </p:timing>
+</p:sld>
+</file>
+
+<file path=ppt/slides/slide20.xml><?xml version="1.0" encoding="utf-8"?>
+<p:sld xmlns:a="http://schemas.openxmlformats.org/drawingml/2006/main" xmlns:r="http://schemas.openxmlformats.org/officeDocument/2006/relationships" xmlns:p="http://schemas.openxmlformats.org/presentationml/2006/main">
+  <p:cSld>
+    <p:spTree>
+      <p:nvGrpSpPr>
+        <p:cNvPr id="1" name="">
+          <a:extLst>
+            <a:ext uri="{FF2B5EF4-FFF2-40B4-BE49-F238E27FC236}">
+              <a16:creationId xmlns:a16="http://schemas.microsoft.com/office/drawing/2014/main" id="{27F997E6-9B67-7E71-8648-BFDBD95BFF7F}"/>
+            </a:ext>
+          </a:extLst>
+        </p:cNvPr>
+        <p:cNvGrpSpPr/>
+        <p:nvPr/>
+      </p:nvGrpSpPr>
+      <p:grpSpPr>
+        <a:xfrm>
+          <a:off x="0" y="0"/>
+          <a:ext cx="0" cy="0"/>
+          <a:chOff x="0" y="0"/>
+          <a:chExt cx="0" cy="0"/>
+        </a:xfrm>
+      </p:grpSpPr>
+      <p:sp>
+        <p:nvSpPr>
+          <p:cNvPr id="2" name="Title 1">
+            <a:extLst>
+              <a:ext uri="{FF2B5EF4-FFF2-40B4-BE49-F238E27FC236}">
+                <a16:creationId xmlns:a16="http://schemas.microsoft.com/office/drawing/2014/main" id="{C761DDF9-4134-283C-96D4-BBEA7FB4DA7C}"/>
+              </a:ext>
+            </a:extLst>
+          </p:cNvPr>
+          <p:cNvSpPr>
+            <a:spLocks noGrp="1"/>
+          </p:cNvSpPr>
+          <p:nvPr>
+            <p:ph type="title"/>
+          </p:nvPr>
+        </p:nvSpPr>
+        <p:spPr>
+          <a:xfrm>
+            <a:off x="2999677" y="2189937"/>
+            <a:ext cx="3144645" cy="585207"/>
+          </a:xfrm>
+        </p:spPr>
+        <p:txBody>
+          <a:bodyPr/>
+          <a:lstStyle/>
+          <a:p>
+            <a:r>
+              <a:rPr lang="en-US" dirty="0"/>
+              <a:t>User defined functions</a:t>
+            </a:r>
+          </a:p>
+        </p:txBody>
+      </p:sp>
+    </p:spTree>
+    <p:extLst>
+      <p:ext uri="{BB962C8B-B14F-4D97-AF65-F5344CB8AC3E}">
+        <p14:creationId xmlns:p14="http://schemas.microsoft.com/office/powerpoint/2010/main" val="2480879606"/>
+      </p:ext>
+    </p:extLst>
+  </p:cSld>
+  <p:clrMapOvr>
+    <a:masterClrMapping/>
+  </p:clrMapOvr>
+</p:sld>
+</file>
+
+<file path=ppt/slides/slide21.xml><?xml version="1.0" encoding="utf-8"?>
+<p:sld xmlns:a="http://schemas.openxmlformats.org/drawingml/2006/main" xmlns:r="http://schemas.openxmlformats.org/officeDocument/2006/relationships" xmlns:p="http://schemas.openxmlformats.org/presentationml/2006/main">
+  <p:cSld>
+    <p:spTree>
+      <p:nvGrpSpPr>
+        <p:cNvPr id="1" name=""/>
+        <p:cNvGrpSpPr/>
+        <p:nvPr/>
+      </p:nvGrpSpPr>
+      <p:grpSpPr>
+        <a:xfrm>
+          <a:off x="0" y="0"/>
+          <a:ext cx="0" cy="0"/>
+          <a:chOff x="0" y="0"/>
+          <a:chExt cx="0" cy="0"/>
+        </a:xfrm>
+      </p:grpSpPr>
+      <p:sp>
+        <p:nvSpPr>
+          <p:cNvPr id="2" name="Title 1">
+            <a:extLst>
+              <a:ext uri="{FF2B5EF4-FFF2-40B4-BE49-F238E27FC236}">
+                <a16:creationId xmlns:a16="http://schemas.microsoft.com/office/drawing/2014/main" id="{DBEDFFBF-64D9-49B2-877B-51A6A3E8AE6D}"/>
+              </a:ext>
+            </a:extLst>
+          </p:cNvPr>
+          <p:cNvSpPr>
+            <a:spLocks noGrp="1"/>
+          </p:cNvSpPr>
+          <p:nvPr>
+            <p:ph type="title"/>
+          </p:nvPr>
+        </p:nvSpPr>
+        <p:spPr>
+          <a:xfrm>
+            <a:off x="381000" y="427219"/>
+            <a:ext cx="8382000" cy="857250"/>
+          </a:xfrm>
+        </p:spPr>
+        <p:txBody>
+          <a:bodyPr/>
+          <a:lstStyle/>
+          <a:p>
+            <a:r>
+              <a:rPr lang="en-US" dirty="0"/>
+              <a:t>How do we create our own functions?</a:t>
+            </a:r>
+          </a:p>
+        </p:txBody>
+      </p:sp>
+      <p:sp>
+        <p:nvSpPr>
+          <p:cNvPr id="3" name="TextBox 2">
+            <a:extLst>
+              <a:ext uri="{FF2B5EF4-FFF2-40B4-BE49-F238E27FC236}">
+                <a16:creationId xmlns:a16="http://schemas.microsoft.com/office/drawing/2014/main" id="{FC03860C-B292-8590-D005-CE973C1D7E88}"/>
+              </a:ext>
+            </a:extLst>
+          </p:cNvPr>
+          <p:cNvSpPr txBox="1"/>
+          <p:nvPr/>
+        </p:nvSpPr>
+        <p:spPr>
+          <a:xfrm>
+            <a:off x="381000" y="1189463"/>
+            <a:ext cx="2124307" cy="738664"/>
+          </a:xfrm>
+          <a:prstGeom prst="rect">
+            <a:avLst/>
+          </a:prstGeom>
+          <a:noFill/>
+        </p:spPr>
+        <p:txBody>
+          <a:bodyPr wrap="square" rtlCol="0">
+            <a:spAutoFit/>
+          </a:bodyPr>
+          <a:lstStyle/>
+          <a:p>
+            <a:pPr marL="342900" indent="-342900">
+              <a:buAutoNum type="arabicParenR"/>
+            </a:pPr>
+            <a:r>
+              <a:rPr lang="en-US" dirty="0"/>
+              <a:t>Define the function</a:t>
+            </a:r>
+          </a:p>
+          <a:p>
+            <a:pPr marL="342900" indent="-342900">
+              <a:buAutoNum type="arabicParenR"/>
+            </a:pPr>
+            <a:endParaRPr lang="en-US" dirty="0"/>
+          </a:p>
+          <a:p>
+            <a:pPr lvl="2"/>
+            <a:r>
+              <a:rPr lang="en-US" dirty="0"/>
+              <a:t>               </a:t>
+            </a:r>
+          </a:p>
+        </p:txBody>
+      </p:sp>
+      <p:sp>
+        <p:nvSpPr>
+          <p:cNvPr id="5" name="TextBox 4">
+            <a:extLst>
+              <a:ext uri="{FF2B5EF4-FFF2-40B4-BE49-F238E27FC236}">
+                <a16:creationId xmlns:a16="http://schemas.microsoft.com/office/drawing/2014/main" id="{902E6F6D-DB09-92DD-52C8-EC3975264529}"/>
+              </a:ext>
+            </a:extLst>
+          </p:cNvPr>
+          <p:cNvSpPr txBox="1"/>
+          <p:nvPr/>
+        </p:nvSpPr>
+        <p:spPr>
+          <a:xfrm>
+            <a:off x="303273" y="1699296"/>
+            <a:ext cx="479502" cy="307777"/>
+          </a:xfrm>
+          <a:prstGeom prst="rect">
+            <a:avLst/>
+          </a:prstGeom>
+          <a:noFill/>
+        </p:spPr>
+        <p:txBody>
+          <a:bodyPr wrap="square">
+            <a:spAutoFit/>
+          </a:bodyPr>
+          <a:lstStyle/>
+          <a:p>
+            <a:r>
+              <a:rPr lang="en-US" b="0" i="0" dirty="0">
+                <a:solidFill>
+                  <a:srgbClr val="222222"/>
+                </a:solidFill>
+                <a:effectLst/>
+                <a:latin typeface="Arial" panose="020B0604020202020204" pitchFamily="34" charset="0"/>
+              </a:rPr>
+              <a:t>def</a:t>
+            </a:r>
+            <a:endParaRPr lang="en-US" dirty="0"/>
+          </a:p>
+        </p:txBody>
+      </p:sp>
+      <p:sp>
+        <p:nvSpPr>
+          <p:cNvPr id="6" name="TextBox 5">
+            <a:extLst>
+              <a:ext uri="{FF2B5EF4-FFF2-40B4-BE49-F238E27FC236}">
+                <a16:creationId xmlns:a16="http://schemas.microsoft.com/office/drawing/2014/main" id="{BA8EC86A-3DDD-BAB3-6BC6-68549B696384}"/>
+              </a:ext>
+            </a:extLst>
+          </p:cNvPr>
+          <p:cNvSpPr txBox="1"/>
+          <p:nvPr/>
+        </p:nvSpPr>
+        <p:spPr>
+          <a:xfrm>
+            <a:off x="688601" y="1699295"/>
+            <a:ext cx="1424886" cy="307777"/>
+          </a:xfrm>
+          <a:prstGeom prst="rect">
+            <a:avLst/>
+          </a:prstGeom>
+          <a:noFill/>
+        </p:spPr>
+        <p:txBody>
+          <a:bodyPr wrap="square">
+            <a:spAutoFit/>
+          </a:bodyPr>
+          <a:lstStyle/>
+          <a:p>
+            <a:r>
+              <a:rPr lang="en-US" dirty="0" err="1"/>
+              <a:t>function_name</a:t>
+            </a:r>
+            <a:endParaRPr lang="en-US" dirty="0"/>
+          </a:p>
+        </p:txBody>
+      </p:sp>
+      <p:sp>
+        <p:nvSpPr>
+          <p:cNvPr id="7" name="TextBox 6">
+            <a:extLst>
+              <a:ext uri="{FF2B5EF4-FFF2-40B4-BE49-F238E27FC236}">
+                <a16:creationId xmlns:a16="http://schemas.microsoft.com/office/drawing/2014/main" id="{50658AEE-C947-C8C9-971C-0DFBDAE5F3AF}"/>
+              </a:ext>
+            </a:extLst>
+          </p:cNvPr>
+          <p:cNvSpPr txBox="1"/>
+          <p:nvPr/>
+        </p:nvSpPr>
+        <p:spPr>
+          <a:xfrm>
+            <a:off x="1918976" y="1699294"/>
+            <a:ext cx="2811331" cy="307777"/>
+          </a:xfrm>
+          <a:prstGeom prst="rect">
+            <a:avLst/>
+          </a:prstGeom>
+          <a:noFill/>
+        </p:spPr>
+        <p:txBody>
+          <a:bodyPr wrap="square">
+            <a:spAutoFit/>
+          </a:bodyPr>
+          <a:lstStyle/>
+          <a:p>
+            <a:r>
+              <a:rPr lang="en-US" dirty="0"/>
+              <a:t>(parameter1, parameter2…):</a:t>
+            </a:r>
+          </a:p>
+        </p:txBody>
+      </p:sp>
+      <p:sp>
+        <p:nvSpPr>
+          <p:cNvPr id="8" name="TextBox 7">
+            <a:extLst>
+              <a:ext uri="{FF2B5EF4-FFF2-40B4-BE49-F238E27FC236}">
+                <a16:creationId xmlns:a16="http://schemas.microsoft.com/office/drawing/2014/main" id="{6FF93740-06F4-6A93-9359-2798370DD977}"/>
+              </a:ext>
+            </a:extLst>
+          </p:cNvPr>
+          <p:cNvSpPr txBox="1"/>
+          <p:nvPr/>
+        </p:nvSpPr>
+        <p:spPr>
+          <a:xfrm>
+            <a:off x="746839" y="2007071"/>
+            <a:ext cx="2811331" cy="307777"/>
+          </a:xfrm>
+          <a:prstGeom prst="rect">
+            <a:avLst/>
+          </a:prstGeom>
+          <a:noFill/>
+        </p:spPr>
+        <p:txBody>
+          <a:bodyPr wrap="square">
+            <a:spAutoFit/>
+          </a:bodyPr>
+          <a:lstStyle/>
+          <a:p>
+            <a:r>
+              <a:rPr lang="en-US" dirty="0"/>
+              <a:t>FUNCTION BODY</a:t>
+            </a:r>
+          </a:p>
+        </p:txBody>
+      </p:sp>
+      <p:sp>
+        <p:nvSpPr>
+          <p:cNvPr id="9" name="TextBox 8">
+            <a:extLst>
+              <a:ext uri="{FF2B5EF4-FFF2-40B4-BE49-F238E27FC236}">
+                <a16:creationId xmlns:a16="http://schemas.microsoft.com/office/drawing/2014/main" id="{5981E237-AF64-458F-8AE5-1F8362761333}"/>
+              </a:ext>
+            </a:extLst>
+          </p:cNvPr>
+          <p:cNvSpPr txBox="1"/>
+          <p:nvPr/>
+        </p:nvSpPr>
+        <p:spPr>
+          <a:xfrm>
+            <a:off x="746839" y="2325528"/>
+            <a:ext cx="2811331" cy="307777"/>
+          </a:xfrm>
+          <a:prstGeom prst="rect">
+            <a:avLst/>
+          </a:prstGeom>
+          <a:noFill/>
+        </p:spPr>
+        <p:txBody>
+          <a:bodyPr wrap="square">
+            <a:spAutoFit/>
+          </a:bodyPr>
+          <a:lstStyle/>
+          <a:p>
+            <a:r>
+              <a:rPr lang="en-US" dirty="0"/>
+              <a:t>return statement</a:t>
+            </a:r>
+          </a:p>
+        </p:txBody>
+      </p:sp>
+      <p:sp>
+        <p:nvSpPr>
+          <p:cNvPr id="10" name="TextBox 9">
+            <a:extLst>
+              <a:ext uri="{FF2B5EF4-FFF2-40B4-BE49-F238E27FC236}">
+                <a16:creationId xmlns:a16="http://schemas.microsoft.com/office/drawing/2014/main" id="{9452B335-40BA-2E1A-A940-85EDCDE0C291}"/>
+              </a:ext>
+            </a:extLst>
+          </p:cNvPr>
+          <p:cNvSpPr txBox="1"/>
+          <p:nvPr/>
+        </p:nvSpPr>
+        <p:spPr>
+          <a:xfrm>
+            <a:off x="4730307" y="1189463"/>
+            <a:ext cx="2124307" cy="738664"/>
+          </a:xfrm>
+          <a:prstGeom prst="rect">
+            <a:avLst/>
+          </a:prstGeom>
+          <a:noFill/>
+        </p:spPr>
+        <p:txBody>
+          <a:bodyPr wrap="square" rtlCol="0">
+            <a:spAutoFit/>
+          </a:bodyPr>
+          <a:lstStyle/>
+          <a:p>
+            <a:r>
+              <a:rPr lang="en-US" dirty="0"/>
+              <a:t>2)  Call the function</a:t>
+            </a:r>
+          </a:p>
+          <a:p>
+            <a:pPr marL="342900" indent="-342900">
+              <a:buAutoNum type="arabicParenR"/>
+            </a:pPr>
+            <a:endParaRPr lang="en-US" dirty="0"/>
+          </a:p>
+          <a:p>
+            <a:pPr lvl="2"/>
+            <a:r>
+              <a:rPr lang="en-US" dirty="0"/>
+              <a:t>               </a:t>
+            </a:r>
+          </a:p>
+        </p:txBody>
+      </p:sp>
+      <p:sp>
+        <p:nvSpPr>
+          <p:cNvPr id="11" name="TextBox 10">
+            <a:extLst>
+              <a:ext uri="{FF2B5EF4-FFF2-40B4-BE49-F238E27FC236}">
+                <a16:creationId xmlns:a16="http://schemas.microsoft.com/office/drawing/2014/main" id="{65C816D8-821E-D079-4CDA-F60D7837F69A}"/>
+              </a:ext>
+            </a:extLst>
+          </p:cNvPr>
+          <p:cNvSpPr txBox="1"/>
+          <p:nvPr/>
+        </p:nvSpPr>
+        <p:spPr>
+          <a:xfrm>
+            <a:off x="4788545" y="1699294"/>
+            <a:ext cx="2811331" cy="307777"/>
+          </a:xfrm>
+          <a:prstGeom prst="rect">
+            <a:avLst/>
+          </a:prstGeom>
+          <a:noFill/>
+        </p:spPr>
+        <p:txBody>
+          <a:bodyPr wrap="square">
+            <a:spAutoFit/>
+          </a:bodyPr>
+          <a:lstStyle/>
+          <a:p>
+            <a:r>
+              <a:rPr lang="en-US" dirty="0" err="1"/>
+              <a:t>function_name</a:t>
+            </a:r>
+            <a:endParaRPr lang="en-US" dirty="0"/>
+          </a:p>
+        </p:txBody>
+      </p:sp>
+      <p:sp>
+        <p:nvSpPr>
+          <p:cNvPr id="12" name="TextBox 11">
+            <a:extLst>
+              <a:ext uri="{FF2B5EF4-FFF2-40B4-BE49-F238E27FC236}">
+                <a16:creationId xmlns:a16="http://schemas.microsoft.com/office/drawing/2014/main" id="{663956BB-E43A-CC57-283E-B09AC726B62F}"/>
+              </a:ext>
+            </a:extLst>
+          </p:cNvPr>
+          <p:cNvSpPr txBox="1"/>
+          <p:nvPr/>
+        </p:nvSpPr>
+        <p:spPr>
+          <a:xfrm>
+            <a:off x="5983584" y="1689484"/>
+            <a:ext cx="2811331" cy="307777"/>
+          </a:xfrm>
+          <a:prstGeom prst="rect">
+            <a:avLst/>
+          </a:prstGeom>
+          <a:noFill/>
+        </p:spPr>
+        <p:txBody>
+          <a:bodyPr wrap="square">
+            <a:spAutoFit/>
+          </a:bodyPr>
+          <a:lstStyle/>
+          <a:p>
+            <a:r>
+              <a:rPr lang="en-US" dirty="0"/>
+              <a:t>(argument1, argument2…)</a:t>
+            </a:r>
+          </a:p>
+        </p:txBody>
+      </p:sp>
+      <p:sp>
+        <p:nvSpPr>
+          <p:cNvPr id="13" name="TextBox 12">
+            <a:extLst>
+              <a:ext uri="{FF2B5EF4-FFF2-40B4-BE49-F238E27FC236}">
+                <a16:creationId xmlns:a16="http://schemas.microsoft.com/office/drawing/2014/main" id="{569A5F5A-A85D-B64A-ED5C-A4D26830EB75}"/>
+              </a:ext>
+            </a:extLst>
+          </p:cNvPr>
+          <p:cNvSpPr txBox="1"/>
+          <p:nvPr/>
+        </p:nvSpPr>
+        <p:spPr>
+          <a:xfrm>
+            <a:off x="303273" y="2931385"/>
+            <a:ext cx="479502" cy="307777"/>
+          </a:xfrm>
+          <a:prstGeom prst="rect">
+            <a:avLst/>
+          </a:prstGeom>
+          <a:noFill/>
+        </p:spPr>
+        <p:txBody>
+          <a:bodyPr wrap="square">
+            <a:spAutoFit/>
+          </a:bodyPr>
+          <a:lstStyle/>
+          <a:p>
+            <a:r>
+              <a:rPr lang="en-US" b="0" i="0" dirty="0">
+                <a:solidFill>
+                  <a:srgbClr val="222222"/>
+                </a:solidFill>
+                <a:effectLst/>
+                <a:latin typeface="Arial" panose="020B0604020202020204" pitchFamily="34" charset="0"/>
+              </a:rPr>
+              <a:t>def</a:t>
+            </a:r>
+            <a:endParaRPr lang="en-US" dirty="0"/>
+          </a:p>
+        </p:txBody>
+      </p:sp>
+      <p:sp>
+        <p:nvSpPr>
+          <p:cNvPr id="14" name="TextBox 13">
+            <a:extLst>
+              <a:ext uri="{FF2B5EF4-FFF2-40B4-BE49-F238E27FC236}">
+                <a16:creationId xmlns:a16="http://schemas.microsoft.com/office/drawing/2014/main" id="{B2E91B79-F9AE-DD3B-349B-57CF7F742C6F}"/>
+              </a:ext>
+            </a:extLst>
+          </p:cNvPr>
+          <p:cNvSpPr txBox="1"/>
+          <p:nvPr/>
+        </p:nvSpPr>
+        <p:spPr>
+          <a:xfrm>
+            <a:off x="727618" y="2931383"/>
+            <a:ext cx="3442938" cy="307777"/>
+          </a:xfrm>
+          <a:prstGeom prst="rect">
+            <a:avLst/>
+          </a:prstGeom>
+          <a:noFill/>
+        </p:spPr>
+        <p:txBody>
+          <a:bodyPr wrap="square">
+            <a:spAutoFit/>
+          </a:bodyPr>
+          <a:lstStyle/>
+          <a:p>
+            <a:r>
+              <a:rPr lang="en-US" dirty="0" err="1"/>
+              <a:t>add_together</a:t>
+            </a:r>
+            <a:endParaRPr lang="en-US" dirty="0"/>
+          </a:p>
+        </p:txBody>
+      </p:sp>
+      <p:sp>
+        <p:nvSpPr>
+          <p:cNvPr id="16" name="TextBox 15">
+            <a:extLst>
+              <a:ext uri="{FF2B5EF4-FFF2-40B4-BE49-F238E27FC236}">
+                <a16:creationId xmlns:a16="http://schemas.microsoft.com/office/drawing/2014/main" id="{025D96E4-4FEA-4F29-7F87-BFE40ECCE9BD}"/>
+              </a:ext>
+            </a:extLst>
+          </p:cNvPr>
+          <p:cNvSpPr txBox="1"/>
+          <p:nvPr/>
+        </p:nvSpPr>
+        <p:spPr>
+          <a:xfrm>
+            <a:off x="1795347" y="2931381"/>
+            <a:ext cx="4572000" cy="307777"/>
+          </a:xfrm>
+          <a:prstGeom prst="rect">
+            <a:avLst/>
+          </a:prstGeom>
+          <a:noFill/>
+        </p:spPr>
+        <p:txBody>
+          <a:bodyPr wrap="square">
+            <a:spAutoFit/>
+          </a:bodyPr>
+          <a:lstStyle/>
+          <a:p>
+            <a:r>
+              <a:rPr lang="en-US" dirty="0"/>
+              <a:t>(number1, number2):</a:t>
+            </a:r>
+          </a:p>
+        </p:txBody>
+      </p:sp>
+      <p:sp>
+        <p:nvSpPr>
+          <p:cNvPr id="17" name="TextBox 16">
+            <a:extLst>
+              <a:ext uri="{FF2B5EF4-FFF2-40B4-BE49-F238E27FC236}">
+                <a16:creationId xmlns:a16="http://schemas.microsoft.com/office/drawing/2014/main" id="{FF4757C2-59BD-7198-CDEA-3902BE512F65}"/>
+              </a:ext>
+            </a:extLst>
+          </p:cNvPr>
+          <p:cNvSpPr txBox="1"/>
+          <p:nvPr/>
+        </p:nvSpPr>
+        <p:spPr>
+          <a:xfrm>
+            <a:off x="688601" y="3239158"/>
+            <a:ext cx="4572000" cy="307777"/>
+          </a:xfrm>
+          <a:prstGeom prst="rect">
+            <a:avLst/>
+          </a:prstGeom>
+          <a:noFill/>
+        </p:spPr>
+        <p:txBody>
+          <a:bodyPr wrap="square">
+            <a:spAutoFit/>
+          </a:bodyPr>
+          <a:lstStyle/>
+          <a:p>
+            <a:r>
+              <a:rPr lang="en-US" dirty="0"/>
+              <a:t> sum = number1 + number2</a:t>
+            </a:r>
+          </a:p>
+        </p:txBody>
+      </p:sp>
+      <p:sp>
+        <p:nvSpPr>
+          <p:cNvPr id="18" name="TextBox 17">
+            <a:extLst>
+              <a:ext uri="{FF2B5EF4-FFF2-40B4-BE49-F238E27FC236}">
+                <a16:creationId xmlns:a16="http://schemas.microsoft.com/office/drawing/2014/main" id="{97E7A6F6-730A-FB1C-78FB-8B05EE46B4E2}"/>
+              </a:ext>
+            </a:extLst>
+          </p:cNvPr>
+          <p:cNvSpPr txBox="1"/>
+          <p:nvPr/>
+        </p:nvSpPr>
+        <p:spPr>
+          <a:xfrm>
+            <a:off x="727618" y="3514063"/>
+            <a:ext cx="2811331" cy="307777"/>
+          </a:xfrm>
+          <a:prstGeom prst="rect">
+            <a:avLst/>
+          </a:prstGeom>
+          <a:noFill/>
+        </p:spPr>
+        <p:txBody>
+          <a:bodyPr wrap="square">
+            <a:spAutoFit/>
+          </a:bodyPr>
+          <a:lstStyle/>
+          <a:p>
+            <a:r>
+              <a:rPr lang="en-US" dirty="0"/>
+              <a:t>return sum</a:t>
+            </a:r>
+          </a:p>
+        </p:txBody>
+      </p:sp>
+      <p:sp>
+        <p:nvSpPr>
+          <p:cNvPr id="19" name="TextBox 18">
+            <a:extLst>
+              <a:ext uri="{FF2B5EF4-FFF2-40B4-BE49-F238E27FC236}">
+                <a16:creationId xmlns:a16="http://schemas.microsoft.com/office/drawing/2014/main" id="{9DF1A6EF-10C3-59EC-C311-1B21B81E86D9}"/>
+              </a:ext>
+            </a:extLst>
+          </p:cNvPr>
+          <p:cNvSpPr txBox="1"/>
+          <p:nvPr/>
+        </p:nvSpPr>
+        <p:spPr>
+          <a:xfrm>
+            <a:off x="4841819" y="2908210"/>
+            <a:ext cx="3442938" cy="307777"/>
+          </a:xfrm>
+          <a:prstGeom prst="rect">
+            <a:avLst/>
+          </a:prstGeom>
+          <a:noFill/>
+        </p:spPr>
+        <p:txBody>
+          <a:bodyPr wrap="square">
+            <a:spAutoFit/>
+          </a:bodyPr>
+          <a:lstStyle/>
+          <a:p>
+            <a:r>
+              <a:rPr lang="en-US" dirty="0"/>
+              <a:t>result1 = </a:t>
+            </a:r>
+            <a:r>
+              <a:rPr lang="en-US" dirty="0" err="1"/>
+              <a:t>add_together</a:t>
+            </a:r>
+            <a:endParaRPr lang="en-US" dirty="0"/>
+          </a:p>
+        </p:txBody>
+      </p:sp>
+      <p:sp>
+        <p:nvSpPr>
+          <p:cNvPr id="20" name="TextBox 19">
+            <a:extLst>
+              <a:ext uri="{FF2B5EF4-FFF2-40B4-BE49-F238E27FC236}">
+                <a16:creationId xmlns:a16="http://schemas.microsoft.com/office/drawing/2014/main" id="{F50CA314-1F19-EF08-50C1-F1D61F4853D4}"/>
+              </a:ext>
+            </a:extLst>
+          </p:cNvPr>
+          <p:cNvSpPr txBox="1"/>
+          <p:nvPr/>
+        </p:nvSpPr>
+        <p:spPr>
+          <a:xfrm>
+            <a:off x="6620427" y="2898988"/>
+            <a:ext cx="4572000" cy="523220"/>
+          </a:xfrm>
+          <a:prstGeom prst="rect">
+            <a:avLst/>
+          </a:prstGeom>
+          <a:noFill/>
+        </p:spPr>
+        <p:txBody>
+          <a:bodyPr wrap="square">
+            <a:spAutoFit/>
+          </a:bodyPr>
+          <a:lstStyle/>
+          <a:p>
+            <a:r>
+              <a:rPr lang="en-US" dirty="0"/>
+              <a:t>(10, 20)</a:t>
+            </a:r>
+          </a:p>
+          <a:p>
+            <a:endParaRPr lang="en-US" dirty="0"/>
+          </a:p>
+        </p:txBody>
+      </p:sp>
+      <p:sp>
+        <p:nvSpPr>
+          <p:cNvPr id="21" name="TextBox 20">
+            <a:extLst>
+              <a:ext uri="{FF2B5EF4-FFF2-40B4-BE49-F238E27FC236}">
+                <a16:creationId xmlns:a16="http://schemas.microsoft.com/office/drawing/2014/main" id="{34F3142D-23A4-D7CF-F9C2-BF549BD76B6A}"/>
+              </a:ext>
+            </a:extLst>
+          </p:cNvPr>
+          <p:cNvSpPr txBox="1"/>
+          <p:nvPr/>
+        </p:nvSpPr>
+        <p:spPr>
+          <a:xfrm>
+            <a:off x="4841819" y="3214342"/>
+            <a:ext cx="3442938" cy="307777"/>
+          </a:xfrm>
+          <a:prstGeom prst="rect">
+            <a:avLst/>
+          </a:prstGeom>
+          <a:noFill/>
+        </p:spPr>
+        <p:txBody>
+          <a:bodyPr wrap="square">
+            <a:spAutoFit/>
+          </a:bodyPr>
+          <a:lstStyle/>
+          <a:p>
+            <a:r>
+              <a:rPr lang="en-US" dirty="0"/>
+              <a:t>result2 = </a:t>
+            </a:r>
+            <a:r>
+              <a:rPr lang="en-US" dirty="0" err="1"/>
+              <a:t>add_together</a:t>
+            </a:r>
+            <a:r>
+              <a:rPr lang="en-US" dirty="0"/>
+              <a:t>(5, 7)</a:t>
+            </a:r>
+          </a:p>
+        </p:txBody>
+      </p:sp>
+      <p:sp>
+        <p:nvSpPr>
+          <p:cNvPr id="22" name="TextBox 21">
+            <a:extLst>
+              <a:ext uri="{FF2B5EF4-FFF2-40B4-BE49-F238E27FC236}">
+                <a16:creationId xmlns:a16="http://schemas.microsoft.com/office/drawing/2014/main" id="{D11113CB-D694-2CDC-C1D1-E06EAAF3AD64}"/>
+              </a:ext>
+            </a:extLst>
+          </p:cNvPr>
+          <p:cNvSpPr txBox="1"/>
+          <p:nvPr/>
+        </p:nvSpPr>
+        <p:spPr>
+          <a:xfrm>
+            <a:off x="4841819" y="3501915"/>
+            <a:ext cx="3442938" cy="307777"/>
+          </a:xfrm>
+          <a:prstGeom prst="rect">
+            <a:avLst/>
+          </a:prstGeom>
+          <a:noFill/>
+        </p:spPr>
+        <p:txBody>
+          <a:bodyPr wrap="square">
+            <a:spAutoFit/>
+          </a:bodyPr>
+          <a:lstStyle/>
+          <a:p>
+            <a:r>
+              <a:rPr lang="en-US" dirty="0"/>
+              <a:t>result3 = </a:t>
+            </a:r>
+            <a:r>
+              <a:rPr lang="en-US" dirty="0" err="1"/>
+              <a:t>add_together</a:t>
+            </a:r>
+            <a:r>
+              <a:rPr lang="en-US" dirty="0"/>
+              <a:t>(100, 10)</a:t>
+            </a:r>
+          </a:p>
+        </p:txBody>
+      </p:sp>
+      <p:sp>
+        <p:nvSpPr>
+          <p:cNvPr id="23" name="TextBox 22">
+            <a:extLst>
+              <a:ext uri="{FF2B5EF4-FFF2-40B4-BE49-F238E27FC236}">
+                <a16:creationId xmlns:a16="http://schemas.microsoft.com/office/drawing/2014/main" id="{9B4E1A0E-7435-530F-1B74-12CCE07EC9CF}"/>
+              </a:ext>
+            </a:extLst>
+          </p:cNvPr>
+          <p:cNvSpPr txBox="1"/>
+          <p:nvPr/>
+        </p:nvSpPr>
+        <p:spPr>
+          <a:xfrm>
+            <a:off x="3838808" y="3884852"/>
+            <a:ext cx="5057078" cy="307777"/>
+          </a:xfrm>
+          <a:prstGeom prst="rect">
+            <a:avLst/>
+          </a:prstGeom>
+          <a:noFill/>
+        </p:spPr>
+        <p:txBody>
+          <a:bodyPr wrap="square">
+            <a:spAutoFit/>
+          </a:bodyPr>
+          <a:lstStyle/>
+          <a:p>
+            <a:r>
+              <a:rPr lang="en-US" dirty="0"/>
+              <a:t>What would be printed out if we ran these three lines of code?</a:t>
+            </a:r>
+          </a:p>
+        </p:txBody>
+      </p:sp>
+      <p:sp>
+        <p:nvSpPr>
+          <p:cNvPr id="24" name="TextBox 23">
+            <a:extLst>
+              <a:ext uri="{FF2B5EF4-FFF2-40B4-BE49-F238E27FC236}">
+                <a16:creationId xmlns:a16="http://schemas.microsoft.com/office/drawing/2014/main" id="{9B41B926-C803-7DDF-DCA2-8EB4D818CC24}"/>
+              </a:ext>
+            </a:extLst>
+          </p:cNvPr>
+          <p:cNvSpPr txBox="1"/>
+          <p:nvPr/>
+        </p:nvSpPr>
+        <p:spPr>
+          <a:xfrm>
+            <a:off x="4841819" y="4192975"/>
+            <a:ext cx="3442938" cy="738664"/>
+          </a:xfrm>
+          <a:prstGeom prst="rect">
+            <a:avLst/>
+          </a:prstGeom>
+          <a:noFill/>
+        </p:spPr>
+        <p:txBody>
+          <a:bodyPr wrap="square">
+            <a:spAutoFit/>
+          </a:bodyPr>
+          <a:lstStyle/>
+          <a:p>
+            <a:r>
+              <a:rPr lang="en-US" dirty="0"/>
+              <a:t>print(result1)</a:t>
+            </a:r>
+          </a:p>
+          <a:p>
+            <a:r>
+              <a:rPr lang="en-US" dirty="0"/>
+              <a:t>print(result2)</a:t>
+            </a:r>
+          </a:p>
+          <a:p>
+            <a:r>
+              <a:rPr lang="en-US" dirty="0"/>
+              <a:t>print(result3)</a:t>
+            </a:r>
+          </a:p>
+        </p:txBody>
+      </p:sp>
+    </p:spTree>
+    <p:extLst>
+      <p:ext uri="{BB962C8B-B14F-4D97-AF65-F5344CB8AC3E}">
+        <p14:creationId xmlns:p14="http://schemas.microsoft.com/office/powerpoint/2010/main" val="3652852448"/>
+      </p:ext>
+    </p:extLst>
+  </p:cSld>
+  <p:clrMapOvr>
+    <a:masterClrMapping/>
+  </p:clrMapOvr>
+  <p:timing>
+    <p:tnLst>
+      <p:par>
+        <p:cTn id="1" dur="indefinite" restart="never" nodeType="tmRoot">
+          <p:childTnLst>
+            <p:seq concurrent="1" nextAc="seek">
+              <p:cTn id="2" dur="indefinite" nodeType="mainSeq">
+                <p:childTnLst>
+                  <p:par>
+                    <p:cTn id="3" fill="hold">
+                      <p:stCondLst>
+                        <p:cond delay="indefinite"/>
+                      </p:stCondLst>
+                      <p:childTnLst>
+                        <p:par>
+                          <p:cTn id="4" fill="hold">
+                            <p:stCondLst>
+                              <p:cond delay="0"/>
+                            </p:stCondLst>
+                            <p:childTnLst>
+                              <p:par>
+                                <p:cTn id="5" presetID="1" presetClass="entr" presetSubtype="0" fill="hold" grpId="0" nodeType="clickEffect">
+                                  <p:stCondLst>
+                                    <p:cond delay="0"/>
+                                  </p:stCondLst>
+                                  <p:childTnLst>
+                                    <p:set>
+                                      <p:cBhvr>
+                                        <p:cTn id="6" dur="1" fill="hold">
+                                          <p:stCondLst>
+                                            <p:cond delay="0"/>
+                                          </p:stCondLst>
+                                        </p:cTn>
+                                        <p:tgtEl>
+                                          <p:spTgt spid="3"/>
+                                        </p:tgtEl>
+                                        <p:attrNameLst>
+                                          <p:attrName>style.visibility</p:attrName>
+                                        </p:attrNameLst>
+                                      </p:cBhvr>
+                                      <p:to>
+                                        <p:strVal val="visible"/>
+                                      </p:to>
+                                    </p:set>
+                                  </p:childTnLst>
+                                </p:cTn>
+                              </p:par>
+                            </p:childTnLst>
+                          </p:cTn>
+                        </p:par>
+                      </p:childTnLst>
+                    </p:cTn>
+                  </p:par>
+                  <p:par>
+                    <p:cTn id="7" fill="hold">
+                      <p:stCondLst>
+                        <p:cond delay="indefinite"/>
+                      </p:stCondLst>
+                      <p:childTnLst>
+                        <p:par>
+                          <p:cTn id="8" fill="hold">
+                            <p:stCondLst>
+                              <p:cond delay="0"/>
+                            </p:stCondLst>
+                            <p:childTnLst>
+                              <p:par>
+                                <p:cTn id="9" presetID="1" presetClass="entr" presetSubtype="0" fill="hold" grpId="0" nodeType="clickEffect">
+                                  <p:stCondLst>
+                                    <p:cond delay="0"/>
+                                  </p:stCondLst>
+                                  <p:childTnLst>
+                                    <p:set>
+                                      <p:cBhvr>
+                                        <p:cTn id="10" dur="1" fill="hold">
+                                          <p:stCondLst>
+                                            <p:cond delay="0"/>
+                                          </p:stCondLst>
+                                        </p:cTn>
+                                        <p:tgtEl>
+                                          <p:spTgt spid="5"/>
+                                        </p:tgtEl>
+                                        <p:attrNameLst>
+                                          <p:attrName>style.visibility</p:attrName>
+                                        </p:attrNameLst>
+                                      </p:cBhvr>
+                                      <p:to>
+                                        <p:strVal val="visible"/>
+                                      </p:to>
+                                    </p:set>
+                                  </p:childTnLst>
+                                </p:cTn>
+                              </p:par>
+                            </p:childTnLst>
+                          </p:cTn>
+                        </p:par>
+                      </p:childTnLst>
+                    </p:cTn>
+                  </p:par>
+                  <p:par>
+                    <p:cTn id="11" fill="hold">
+                      <p:stCondLst>
+                        <p:cond delay="indefinite"/>
+                      </p:stCondLst>
+                      <p:childTnLst>
+                        <p:par>
+                          <p:cTn id="12" fill="hold">
+                            <p:stCondLst>
+                              <p:cond delay="0"/>
+                            </p:stCondLst>
+                            <p:childTnLst>
+                              <p:par>
+                                <p:cTn id="13" presetID="1" presetClass="entr" presetSubtype="0" fill="hold" grpId="0" nodeType="clickEffect">
+                                  <p:stCondLst>
+                                    <p:cond delay="0"/>
+                                  </p:stCondLst>
+                                  <p:childTnLst>
+                                    <p:set>
+                                      <p:cBhvr>
+                                        <p:cTn id="14" dur="1" fill="hold">
+                                          <p:stCondLst>
+                                            <p:cond delay="0"/>
+                                          </p:stCondLst>
+                                        </p:cTn>
+                                        <p:tgtEl>
+                                          <p:spTgt spid="6"/>
+                                        </p:tgtEl>
+                                        <p:attrNameLst>
+                                          <p:attrName>style.visibility</p:attrName>
+                                        </p:attrNameLst>
+                                      </p:cBhvr>
+                                      <p:to>
+                                        <p:strVal val="visible"/>
+                                      </p:to>
+                                    </p:set>
+                                  </p:childTnLst>
+                                </p:cTn>
+                              </p:par>
+                            </p:childTnLst>
+                          </p:cTn>
+                        </p:par>
+                      </p:childTnLst>
+                    </p:cTn>
+                  </p:par>
+                  <p:par>
+                    <p:cTn id="15" fill="hold">
+                      <p:stCondLst>
+                        <p:cond delay="indefinite"/>
+                      </p:stCondLst>
+                      <p:childTnLst>
+                        <p:par>
+                          <p:cTn id="16" fill="hold">
+                            <p:stCondLst>
+                              <p:cond delay="0"/>
+                            </p:stCondLst>
+                            <p:childTnLst>
+                              <p:par>
+                                <p:cTn id="17" presetID="1" presetClass="entr" presetSubtype="0" fill="hold" grpId="0" nodeType="clickEffect">
+                                  <p:stCondLst>
+                                    <p:cond delay="0"/>
+                                  </p:stCondLst>
+                                  <p:childTnLst>
+                                    <p:set>
+                                      <p:cBhvr>
+                                        <p:cTn id="18" dur="1" fill="hold">
+                                          <p:stCondLst>
+                                            <p:cond delay="0"/>
+                                          </p:stCondLst>
+                                        </p:cTn>
+                                        <p:tgtEl>
+                                          <p:spTgt spid="7"/>
+                                        </p:tgtEl>
+                                        <p:attrNameLst>
+                                          <p:attrName>style.visibility</p:attrName>
+                                        </p:attrNameLst>
+                                      </p:cBhvr>
+                                      <p:to>
+                                        <p:strVal val="visible"/>
+                                      </p:to>
+                                    </p:set>
+                                  </p:childTnLst>
+                                </p:cTn>
+                              </p:par>
+                            </p:childTnLst>
+                          </p:cTn>
+                        </p:par>
+                      </p:childTnLst>
+                    </p:cTn>
+                  </p:par>
+                  <p:par>
+                    <p:cTn id="19" fill="hold">
+                      <p:stCondLst>
+                        <p:cond delay="indefinite"/>
+                      </p:stCondLst>
+                      <p:childTnLst>
+                        <p:par>
+                          <p:cTn id="20" fill="hold">
+                            <p:stCondLst>
+                              <p:cond delay="0"/>
+                            </p:stCondLst>
+                            <p:childTnLst>
+                              <p:par>
+                                <p:cTn id="21" presetID="1" presetClass="entr" presetSubtype="0" fill="hold" grpId="0" nodeType="clickEffect">
+                                  <p:stCondLst>
+                                    <p:cond delay="0"/>
+                                  </p:stCondLst>
+                                  <p:childTnLst>
+                                    <p:set>
+                                      <p:cBhvr>
+                                        <p:cTn id="22" dur="1" fill="hold">
+                                          <p:stCondLst>
+                                            <p:cond delay="0"/>
+                                          </p:stCondLst>
+                                        </p:cTn>
+                                        <p:tgtEl>
+                                          <p:spTgt spid="8"/>
+                                        </p:tgtEl>
+                                        <p:attrNameLst>
+                                          <p:attrName>style.visibility</p:attrName>
+                                        </p:attrNameLst>
+                                      </p:cBhvr>
+                                      <p:to>
+                                        <p:strVal val="visible"/>
+                                      </p:to>
+                                    </p:set>
+                                  </p:childTnLst>
+                                </p:cTn>
+                              </p:par>
+                            </p:childTnLst>
+                          </p:cTn>
+                        </p:par>
+                      </p:childTnLst>
+                    </p:cTn>
+                  </p:par>
+                  <p:par>
+                    <p:cTn id="23" fill="hold">
+                      <p:stCondLst>
+                        <p:cond delay="indefinite"/>
+                      </p:stCondLst>
+                      <p:childTnLst>
+                        <p:par>
+                          <p:cTn id="24" fill="hold">
+                            <p:stCondLst>
+                              <p:cond delay="0"/>
+                            </p:stCondLst>
+                            <p:childTnLst>
+                              <p:par>
+                                <p:cTn id="25" presetID="1" presetClass="entr" presetSubtype="0" fill="hold" grpId="0" nodeType="clickEffect">
+                                  <p:stCondLst>
+                                    <p:cond delay="0"/>
+                                  </p:stCondLst>
+                                  <p:childTnLst>
+                                    <p:set>
+                                      <p:cBhvr>
+                                        <p:cTn id="26" dur="1" fill="hold">
+                                          <p:stCondLst>
+                                            <p:cond delay="0"/>
+                                          </p:stCondLst>
+                                        </p:cTn>
+                                        <p:tgtEl>
+                                          <p:spTgt spid="9"/>
+                                        </p:tgtEl>
+                                        <p:attrNameLst>
+                                          <p:attrName>style.visibility</p:attrName>
+                                        </p:attrNameLst>
+                                      </p:cBhvr>
+                                      <p:to>
+                                        <p:strVal val="visible"/>
+                                      </p:to>
+                                    </p:set>
+                                  </p:childTnLst>
+                                </p:cTn>
+                              </p:par>
+                            </p:childTnLst>
+                          </p:cTn>
+                        </p:par>
+                      </p:childTnLst>
+                    </p:cTn>
+                  </p:par>
+                  <p:par>
+                    <p:cTn id="27" fill="hold">
+                      <p:stCondLst>
+                        <p:cond delay="indefinite"/>
+                      </p:stCondLst>
+                      <p:childTnLst>
+                        <p:par>
+                          <p:cTn id="28" fill="hold">
+                            <p:stCondLst>
+                              <p:cond delay="0"/>
+                            </p:stCondLst>
+                            <p:childTnLst>
+                              <p:par>
+                                <p:cTn id="29" presetID="1" presetClass="entr" presetSubtype="0" fill="hold" grpId="0" nodeType="clickEffect">
+                                  <p:stCondLst>
+                                    <p:cond delay="0"/>
+                                  </p:stCondLst>
+                                  <p:childTnLst>
+                                    <p:set>
+                                      <p:cBhvr>
+                                        <p:cTn id="30" dur="1" fill="hold">
+                                          <p:stCondLst>
+                                            <p:cond delay="0"/>
+                                          </p:stCondLst>
+                                        </p:cTn>
+                                        <p:tgtEl>
+                                          <p:spTgt spid="10"/>
+                                        </p:tgtEl>
+                                        <p:attrNameLst>
+                                          <p:attrName>style.visibility</p:attrName>
+                                        </p:attrNameLst>
+                                      </p:cBhvr>
+                                      <p:to>
+                                        <p:strVal val="visible"/>
+                                      </p:to>
+                                    </p:set>
+                                  </p:childTnLst>
+                                </p:cTn>
+                              </p:par>
+                            </p:childTnLst>
+                          </p:cTn>
+                        </p:par>
+                      </p:childTnLst>
+                    </p:cTn>
+                  </p:par>
+                  <p:par>
+                    <p:cTn id="31" fill="hold">
+                      <p:stCondLst>
+                        <p:cond delay="indefinite"/>
+                      </p:stCondLst>
+                      <p:childTnLst>
+                        <p:par>
+                          <p:cTn id="32" fill="hold">
+                            <p:stCondLst>
+                              <p:cond delay="0"/>
+                            </p:stCondLst>
+                            <p:childTnLst>
+                              <p:par>
+                                <p:cTn id="33" presetID="1" presetClass="entr" presetSubtype="0" fill="hold" grpId="0" nodeType="clickEffect">
+                                  <p:stCondLst>
+                                    <p:cond delay="0"/>
+                                  </p:stCondLst>
+                                  <p:childTnLst>
+                                    <p:set>
+                                      <p:cBhvr>
+                                        <p:cTn id="34" dur="1" fill="hold">
+                                          <p:stCondLst>
+                                            <p:cond delay="0"/>
+                                          </p:stCondLst>
+                                        </p:cTn>
+                                        <p:tgtEl>
+                                          <p:spTgt spid="11"/>
+                                        </p:tgtEl>
+                                        <p:attrNameLst>
+                                          <p:attrName>style.visibility</p:attrName>
+                                        </p:attrNameLst>
+                                      </p:cBhvr>
+                                      <p:to>
+                                        <p:strVal val="visible"/>
+                                      </p:to>
+                                    </p:set>
+                                  </p:childTnLst>
+                                </p:cTn>
+                              </p:par>
+                            </p:childTnLst>
+                          </p:cTn>
+                        </p:par>
+                      </p:childTnLst>
+                    </p:cTn>
+                  </p:par>
+                  <p:par>
+                    <p:cTn id="35" fill="hold">
+                      <p:stCondLst>
+                        <p:cond delay="indefinite"/>
+                      </p:stCondLst>
+                      <p:childTnLst>
+                        <p:par>
+                          <p:cTn id="36" fill="hold">
+                            <p:stCondLst>
+                              <p:cond delay="0"/>
+                            </p:stCondLst>
+                            <p:childTnLst>
+                              <p:par>
+                                <p:cTn id="37" presetID="1" presetClass="entr" presetSubtype="0" fill="hold" grpId="0" nodeType="clickEffect">
+                                  <p:stCondLst>
+                                    <p:cond delay="0"/>
+                                  </p:stCondLst>
+                                  <p:childTnLst>
+                                    <p:set>
+                                      <p:cBhvr>
+                                        <p:cTn id="38" dur="1" fill="hold">
+                                          <p:stCondLst>
+                                            <p:cond delay="0"/>
+                                          </p:stCondLst>
+                                        </p:cTn>
+                                        <p:tgtEl>
+                                          <p:spTgt spid="12"/>
+                                        </p:tgtEl>
+                                        <p:attrNameLst>
+                                          <p:attrName>style.visibility</p:attrName>
+                                        </p:attrNameLst>
+                                      </p:cBhvr>
+                                      <p:to>
+                                        <p:strVal val="visible"/>
+                                      </p:to>
+                                    </p:set>
+                                  </p:childTnLst>
+                                </p:cTn>
+                              </p:par>
+                            </p:childTnLst>
+                          </p:cTn>
+                        </p:par>
+                      </p:childTnLst>
+                    </p:cTn>
+                  </p:par>
+                  <p:par>
+                    <p:cTn id="39" fill="hold">
+                      <p:stCondLst>
+                        <p:cond delay="indefinite"/>
+                      </p:stCondLst>
+                      <p:childTnLst>
+                        <p:par>
+                          <p:cTn id="40" fill="hold">
+                            <p:stCondLst>
+                              <p:cond delay="0"/>
+                            </p:stCondLst>
+                            <p:childTnLst>
+                              <p:par>
+                                <p:cTn id="41" presetID="1" presetClass="entr" presetSubtype="0" fill="hold" grpId="0" nodeType="clickEffect">
+                                  <p:stCondLst>
+                                    <p:cond delay="0"/>
+                                  </p:stCondLst>
+                                  <p:childTnLst>
+                                    <p:set>
+                                      <p:cBhvr>
+                                        <p:cTn id="42" dur="1" fill="hold">
+                                          <p:stCondLst>
+                                            <p:cond delay="0"/>
+                                          </p:stCondLst>
+                                        </p:cTn>
+                                        <p:tgtEl>
+                                          <p:spTgt spid="13"/>
+                                        </p:tgtEl>
+                                        <p:attrNameLst>
+                                          <p:attrName>style.visibility</p:attrName>
+                                        </p:attrNameLst>
+                                      </p:cBhvr>
+                                      <p:to>
+                                        <p:strVal val="visible"/>
+                                      </p:to>
+                                    </p:set>
+                                  </p:childTnLst>
+                                </p:cTn>
+                              </p:par>
+                            </p:childTnLst>
+                          </p:cTn>
+                        </p:par>
+                      </p:childTnLst>
+                    </p:cTn>
+                  </p:par>
+                  <p:par>
+                    <p:cTn id="43" fill="hold">
+                      <p:stCondLst>
+                        <p:cond delay="indefinite"/>
+                      </p:stCondLst>
+                      <p:childTnLst>
+                        <p:par>
+                          <p:cTn id="44" fill="hold">
+                            <p:stCondLst>
+                              <p:cond delay="0"/>
+                            </p:stCondLst>
+                            <p:childTnLst>
+                              <p:par>
+                                <p:cTn id="45" presetID="1" presetClass="entr" presetSubtype="0" fill="hold" grpId="0" nodeType="clickEffect">
+                                  <p:stCondLst>
+                                    <p:cond delay="0"/>
+                                  </p:stCondLst>
+                                  <p:childTnLst>
+                                    <p:set>
+                                      <p:cBhvr>
+                                        <p:cTn id="46" dur="1" fill="hold">
+                                          <p:stCondLst>
+                                            <p:cond delay="0"/>
+                                          </p:stCondLst>
+                                        </p:cTn>
+                                        <p:tgtEl>
+                                          <p:spTgt spid="14"/>
+                                        </p:tgtEl>
+                                        <p:attrNameLst>
+                                          <p:attrName>style.visibility</p:attrName>
+                                        </p:attrNameLst>
+                                      </p:cBhvr>
+                                      <p:to>
+                                        <p:strVal val="visible"/>
+                                      </p:to>
+                                    </p:set>
+                                  </p:childTnLst>
+                                </p:cTn>
+                              </p:par>
+                            </p:childTnLst>
+                          </p:cTn>
+                        </p:par>
+                      </p:childTnLst>
+                    </p:cTn>
+                  </p:par>
+                  <p:par>
+                    <p:cTn id="47" fill="hold">
+                      <p:stCondLst>
+                        <p:cond delay="indefinite"/>
+                      </p:stCondLst>
+                      <p:childTnLst>
+                        <p:par>
+                          <p:cTn id="48" fill="hold">
+                            <p:stCondLst>
+                              <p:cond delay="0"/>
+                            </p:stCondLst>
+                            <p:childTnLst>
+                              <p:par>
+                                <p:cTn id="49" presetID="1" presetClass="entr" presetSubtype="0" fill="hold" grpId="0" nodeType="clickEffect">
+                                  <p:stCondLst>
+                                    <p:cond delay="0"/>
+                                  </p:stCondLst>
+                                  <p:childTnLst>
+                                    <p:set>
+                                      <p:cBhvr>
+                                        <p:cTn id="50" dur="1" fill="hold">
+                                          <p:stCondLst>
+                                            <p:cond delay="0"/>
+                                          </p:stCondLst>
+                                        </p:cTn>
+                                        <p:tgtEl>
+                                          <p:spTgt spid="16"/>
+                                        </p:tgtEl>
+                                        <p:attrNameLst>
+                                          <p:attrName>style.visibility</p:attrName>
+                                        </p:attrNameLst>
+                                      </p:cBhvr>
+                                      <p:to>
+                                        <p:strVal val="visible"/>
+                                      </p:to>
+                                    </p:set>
+                                  </p:childTnLst>
+                                </p:cTn>
+                              </p:par>
+                            </p:childTnLst>
+                          </p:cTn>
+                        </p:par>
+                      </p:childTnLst>
+                    </p:cTn>
+                  </p:par>
+                  <p:par>
+                    <p:cTn id="51" fill="hold">
+                      <p:stCondLst>
+                        <p:cond delay="indefinite"/>
+                      </p:stCondLst>
+                      <p:childTnLst>
+                        <p:par>
+                          <p:cTn id="52" fill="hold">
+                            <p:stCondLst>
+                              <p:cond delay="0"/>
+                            </p:stCondLst>
+                            <p:childTnLst>
+                              <p:par>
+                                <p:cTn id="53" presetID="1" presetClass="entr" presetSubtype="0" fill="hold" grpId="0" nodeType="clickEffect">
+                                  <p:stCondLst>
+                                    <p:cond delay="0"/>
+                                  </p:stCondLst>
+                                  <p:childTnLst>
+                                    <p:set>
+                                      <p:cBhvr>
+                                        <p:cTn id="54" dur="1" fill="hold">
+                                          <p:stCondLst>
+                                            <p:cond delay="0"/>
+                                          </p:stCondLst>
+                                        </p:cTn>
+                                        <p:tgtEl>
+                                          <p:spTgt spid="17"/>
+                                        </p:tgtEl>
+                                        <p:attrNameLst>
+                                          <p:attrName>style.visibility</p:attrName>
+                                        </p:attrNameLst>
+                                      </p:cBhvr>
+                                      <p:to>
+                                        <p:strVal val="visible"/>
+                                      </p:to>
+                                    </p:set>
+                                  </p:childTnLst>
+                                </p:cTn>
+                              </p:par>
+                            </p:childTnLst>
+                          </p:cTn>
+                        </p:par>
+                      </p:childTnLst>
+                    </p:cTn>
+                  </p:par>
+                  <p:par>
+                    <p:cTn id="55" fill="hold">
+                      <p:stCondLst>
+                        <p:cond delay="indefinite"/>
+                      </p:stCondLst>
+                      <p:childTnLst>
+                        <p:par>
+                          <p:cTn id="56" fill="hold">
+                            <p:stCondLst>
+                              <p:cond delay="0"/>
+                            </p:stCondLst>
+                            <p:childTnLst>
+                              <p:par>
+                                <p:cTn id="57" presetID="1" presetClass="entr" presetSubtype="0" fill="hold" grpId="0" nodeType="clickEffect">
+                                  <p:stCondLst>
+                                    <p:cond delay="0"/>
+                                  </p:stCondLst>
+                                  <p:childTnLst>
+                                    <p:set>
+                                      <p:cBhvr>
+                                        <p:cTn id="58" dur="1" fill="hold">
+                                          <p:stCondLst>
+                                            <p:cond delay="0"/>
+                                          </p:stCondLst>
+                                        </p:cTn>
+                                        <p:tgtEl>
+                                          <p:spTgt spid="18"/>
+                                        </p:tgtEl>
+                                        <p:attrNameLst>
+                                          <p:attrName>style.visibility</p:attrName>
+                                        </p:attrNameLst>
+                                      </p:cBhvr>
+                                      <p:to>
+                                        <p:strVal val="visible"/>
+                                      </p:to>
+                                    </p:set>
+                                  </p:childTnLst>
+                                </p:cTn>
+                              </p:par>
+                            </p:childTnLst>
+                          </p:cTn>
+                        </p:par>
+                      </p:childTnLst>
+                    </p:cTn>
+                  </p:par>
+                  <p:par>
+                    <p:cTn id="59" fill="hold">
+                      <p:stCondLst>
+                        <p:cond delay="indefinite"/>
+                      </p:stCondLst>
+                      <p:childTnLst>
+                        <p:par>
+                          <p:cTn id="60" fill="hold">
+                            <p:stCondLst>
+                              <p:cond delay="0"/>
+                            </p:stCondLst>
+                            <p:childTnLst>
+                              <p:par>
+                                <p:cTn id="61" presetID="1" presetClass="entr" presetSubtype="0" fill="hold" grpId="0" nodeType="clickEffect">
+                                  <p:stCondLst>
+                                    <p:cond delay="0"/>
+                                  </p:stCondLst>
+                                  <p:childTnLst>
+                                    <p:set>
+                                      <p:cBhvr>
+                                        <p:cTn id="62" dur="1" fill="hold">
+                                          <p:stCondLst>
+                                            <p:cond delay="0"/>
+                                          </p:stCondLst>
+                                        </p:cTn>
+                                        <p:tgtEl>
+                                          <p:spTgt spid="19"/>
+                                        </p:tgtEl>
+                                        <p:attrNameLst>
+                                          <p:attrName>style.visibility</p:attrName>
+                                        </p:attrNameLst>
+                                      </p:cBhvr>
+                                      <p:to>
+                                        <p:strVal val="visible"/>
+                                      </p:to>
+                                    </p:set>
+                                  </p:childTnLst>
+                                </p:cTn>
+                              </p:par>
+                            </p:childTnLst>
+                          </p:cTn>
+                        </p:par>
+                      </p:childTnLst>
+                    </p:cTn>
+                  </p:par>
+                  <p:par>
+                    <p:cTn id="63" fill="hold">
+                      <p:stCondLst>
+                        <p:cond delay="indefinite"/>
+                      </p:stCondLst>
+                      <p:childTnLst>
+                        <p:par>
+                          <p:cTn id="64" fill="hold">
+                            <p:stCondLst>
+                              <p:cond delay="0"/>
+                            </p:stCondLst>
+                            <p:childTnLst>
+                              <p:par>
+                                <p:cTn id="65" presetID="1" presetClass="entr" presetSubtype="0" fill="hold" grpId="0" nodeType="clickEffect">
+                                  <p:stCondLst>
+                                    <p:cond delay="0"/>
+                                  </p:stCondLst>
+                                  <p:childTnLst>
+                                    <p:set>
+                                      <p:cBhvr>
+                                        <p:cTn id="66" dur="1" fill="hold">
+                                          <p:stCondLst>
+                                            <p:cond delay="0"/>
+                                          </p:stCondLst>
+                                        </p:cTn>
+                                        <p:tgtEl>
+                                          <p:spTgt spid="20"/>
+                                        </p:tgtEl>
+                                        <p:attrNameLst>
+                                          <p:attrName>style.visibility</p:attrName>
+                                        </p:attrNameLst>
+                                      </p:cBhvr>
+                                      <p:to>
+                                        <p:strVal val="visible"/>
+                                      </p:to>
+                                    </p:set>
+                                  </p:childTnLst>
+                                </p:cTn>
+                              </p:par>
+                            </p:childTnLst>
+                          </p:cTn>
+                        </p:par>
+                      </p:childTnLst>
+                    </p:cTn>
+                  </p:par>
+                  <p:par>
+                    <p:cTn id="67" fill="hold">
+                      <p:stCondLst>
+                        <p:cond delay="indefinite"/>
+                      </p:stCondLst>
+                      <p:childTnLst>
+                        <p:par>
+                          <p:cTn id="68" fill="hold">
+                            <p:stCondLst>
+                              <p:cond delay="0"/>
+                            </p:stCondLst>
+                            <p:childTnLst>
+                              <p:par>
+                                <p:cTn id="69" presetID="1" presetClass="entr" presetSubtype="0" fill="hold" grpId="0" nodeType="clickEffect">
+                                  <p:stCondLst>
+                                    <p:cond delay="0"/>
+                                  </p:stCondLst>
+                                  <p:childTnLst>
+                                    <p:set>
+                                      <p:cBhvr>
+                                        <p:cTn id="70" dur="1" fill="hold">
+                                          <p:stCondLst>
+                                            <p:cond delay="0"/>
+                                          </p:stCondLst>
+                                        </p:cTn>
+                                        <p:tgtEl>
+                                          <p:spTgt spid="21"/>
+                                        </p:tgtEl>
+                                        <p:attrNameLst>
+                                          <p:attrName>style.visibility</p:attrName>
+                                        </p:attrNameLst>
+                                      </p:cBhvr>
+                                      <p:to>
+                                        <p:strVal val="visible"/>
+                                      </p:to>
+                                    </p:set>
+                                  </p:childTnLst>
+                                </p:cTn>
+                              </p:par>
+                            </p:childTnLst>
+                          </p:cTn>
+                        </p:par>
+                      </p:childTnLst>
+                    </p:cTn>
+                  </p:par>
+                  <p:par>
+                    <p:cTn id="71" fill="hold">
+                      <p:stCondLst>
+                        <p:cond delay="indefinite"/>
+                      </p:stCondLst>
+                      <p:childTnLst>
+                        <p:par>
+                          <p:cTn id="72" fill="hold">
+                            <p:stCondLst>
+                              <p:cond delay="0"/>
+                            </p:stCondLst>
+                            <p:childTnLst>
+                              <p:par>
+                                <p:cTn id="73" presetID="1" presetClass="entr" presetSubtype="0" fill="hold" grpId="0" nodeType="clickEffect">
+                                  <p:stCondLst>
+                                    <p:cond delay="0"/>
+                                  </p:stCondLst>
+                                  <p:childTnLst>
+                                    <p:set>
+                                      <p:cBhvr>
+                                        <p:cTn id="74" dur="1" fill="hold">
+                                          <p:stCondLst>
+                                            <p:cond delay="0"/>
+                                          </p:stCondLst>
+                                        </p:cTn>
+                                        <p:tgtEl>
+                                          <p:spTgt spid="22"/>
+                                        </p:tgtEl>
+                                        <p:attrNameLst>
+                                          <p:attrName>style.visibility</p:attrName>
+                                        </p:attrNameLst>
+                                      </p:cBhvr>
+                                      <p:to>
+                                        <p:strVal val="visible"/>
+                                      </p:to>
+                                    </p:set>
+                                  </p:childTnLst>
+                                </p:cTn>
+                              </p:par>
+                            </p:childTnLst>
+                          </p:cTn>
+                        </p:par>
+                      </p:childTnLst>
+                    </p:cTn>
+                  </p:par>
+                  <p:par>
+                    <p:cTn id="75" fill="hold">
+                      <p:stCondLst>
+                        <p:cond delay="indefinite"/>
+                      </p:stCondLst>
+                      <p:childTnLst>
+                        <p:par>
+                          <p:cTn id="76" fill="hold">
+                            <p:stCondLst>
+                              <p:cond delay="0"/>
+                            </p:stCondLst>
+                            <p:childTnLst>
+                              <p:par>
+                                <p:cTn id="77" presetID="1" presetClass="entr" presetSubtype="0" fill="hold" grpId="0" nodeType="clickEffect">
+                                  <p:stCondLst>
+                                    <p:cond delay="0"/>
+                                  </p:stCondLst>
+                                  <p:childTnLst>
+                                    <p:set>
+                                      <p:cBhvr>
+                                        <p:cTn id="78" dur="1" fill="hold">
+                                          <p:stCondLst>
+                                            <p:cond delay="0"/>
+                                          </p:stCondLst>
+                                        </p:cTn>
+                                        <p:tgtEl>
+                                          <p:spTgt spid="23"/>
+                                        </p:tgtEl>
+                                        <p:attrNameLst>
+                                          <p:attrName>style.visibility</p:attrName>
+                                        </p:attrNameLst>
+                                      </p:cBhvr>
+                                      <p:to>
+                                        <p:strVal val="visible"/>
+                                      </p:to>
+                                    </p:set>
+                                  </p:childTnLst>
+                                </p:cTn>
+                              </p:par>
+                            </p:childTnLst>
+                          </p:cTn>
+                        </p:par>
+                      </p:childTnLst>
+                    </p:cTn>
+                  </p:par>
+                  <p:par>
+                    <p:cTn id="79" fill="hold">
+                      <p:stCondLst>
+                        <p:cond delay="indefinite"/>
+                      </p:stCondLst>
+                      <p:childTnLst>
+                        <p:par>
+                          <p:cTn id="80" fill="hold">
+                            <p:stCondLst>
+                              <p:cond delay="0"/>
+                            </p:stCondLst>
+                            <p:childTnLst>
+                              <p:par>
+                                <p:cTn id="81" presetID="1" presetClass="entr" presetSubtype="0" fill="hold" grpId="0" nodeType="clickEffect">
+                                  <p:stCondLst>
+                                    <p:cond delay="0"/>
+                                  </p:stCondLst>
+                                  <p:childTnLst>
+                                    <p:set>
+                                      <p:cBhvr>
+                                        <p:cTn id="82" dur="1" fill="hold">
+                                          <p:stCondLst>
+                                            <p:cond delay="0"/>
+                                          </p:stCondLst>
+                                        </p:cTn>
+                                        <p:tgtEl>
+                                          <p:spTgt spid="24"/>
+                                        </p:tgtEl>
+                                        <p:attrNameLst>
+                                          <p:attrName>style.visibility</p:attrName>
+                                        </p:attrNameLst>
+                                      </p:cBhvr>
+                                      <p:to>
+                                        <p:strVal val="visible"/>
+                                      </p:to>
+                                    </p:set>
+                                  </p:childTnLst>
+                                </p:cTn>
+                              </p:par>
+                            </p:childTnLst>
+                          </p:cTn>
+                        </p:par>
+                      </p:childTnLst>
+                    </p:cTn>
+                  </p:par>
+                </p:childTnLst>
+              </p:cTn>
+              <p:prevCondLst>
+                <p:cond evt="onPrev" delay="0">
+                  <p:tgtEl>
+                    <p:sldTgt/>
+                  </p:tgtEl>
+                </p:cond>
+              </p:prevCondLst>
+              <p:nextCondLst>
+                <p:cond evt="onNext" delay="0">
+                  <p:tgtEl>
+                    <p:sldTgt/>
+                  </p:tgtEl>
+                </p:cond>
+              </p:nextCondLst>
+            </p:seq>
+          </p:childTnLst>
+        </p:cTn>
+      </p:par>
+    </p:tnLst>
+    <p:bldLst>
+      <p:bldP spid="3" grpId="0"/>
+      <p:bldP spid="5" grpId="0"/>
+      <p:bldP spid="6" grpId="0"/>
+      <p:bldP spid="7" grpId="0"/>
+      <p:bldP spid="8" grpId="0"/>
+      <p:bldP spid="9" grpId="0"/>
+      <p:bldP spid="10" grpId="0"/>
+      <p:bldP spid="11" grpId="0"/>
+      <p:bldP spid="12" grpId="0"/>
+      <p:bldP spid="13" grpId="0"/>
+      <p:bldP spid="14" grpId="0"/>
+      <p:bldP spid="16" grpId="0"/>
+      <p:bldP spid="17" grpId="0"/>
+      <p:bldP spid="18" grpId="0"/>
+      <p:bldP spid="19" grpId="0"/>
+      <p:bldP spid="20" grpId="0"/>
+      <p:bldP spid="21" grpId="0"/>
+      <p:bldP spid="22" grpId="0"/>
+      <p:bldP spid="23" grpId="0"/>
+      <p:bldP spid="24" grpId="0"/>
+    </p:bldLst>
+  </p:timing>
+</p:sld>
+</file>
+
+<file path=ppt/slides/slide22.xml><?xml version="1.0" encoding="utf-8"?>
+<p:sld xmlns:a="http://schemas.openxmlformats.org/drawingml/2006/main" xmlns:r="http://schemas.openxmlformats.org/officeDocument/2006/relationships" xmlns:p="http://schemas.openxmlformats.org/presentationml/2006/main">
+  <p:cSld>
+    <p:spTree>
+      <p:nvGrpSpPr>
+        <p:cNvPr id="1" name=""/>
+        <p:cNvGrpSpPr/>
+        <p:nvPr/>
+      </p:nvGrpSpPr>
+      <p:grpSpPr>
+        <a:xfrm>
+          <a:off x="0" y="0"/>
+          <a:ext cx="0" cy="0"/>
+          <a:chOff x="0" y="0"/>
+          <a:chExt cx="0" cy="0"/>
+        </a:xfrm>
+      </p:grpSpPr>
+      <p:sp>
+        <p:nvSpPr>
+          <p:cNvPr id="3" name="Content Placeholder 2">
+            <a:extLst>
+              <a:ext uri="{FF2B5EF4-FFF2-40B4-BE49-F238E27FC236}">
+                <a16:creationId xmlns:a16="http://schemas.microsoft.com/office/drawing/2014/main" id="{6933CB63-0862-4EC6-8BA7-94D8619835CD}"/>
+              </a:ext>
+            </a:extLst>
+          </p:cNvPr>
+          <p:cNvSpPr>
+            <a:spLocks noGrp="1"/>
+          </p:cNvSpPr>
+          <p:nvPr>
+            <p:ph idx="1"/>
+          </p:nvPr>
+        </p:nvSpPr>
+        <p:spPr/>
+        <p:txBody>
+          <a:bodyPr>
+            <a:normAutofit/>
+          </a:bodyPr>
+          <a:lstStyle/>
+          <a:p>
+            <a:r>
+              <a:rPr lang="en-US" dirty="0"/>
+              <a:t>Write a python function that calculates and </a:t>
+            </a:r>
+            <a:r>
+              <a:rPr lang="en-US" b="1" dirty="0"/>
+              <a:t>returns </a:t>
+            </a:r>
+            <a:r>
+              <a:rPr lang="en-US" dirty="0"/>
+              <a:t>the area of a rectangle using two integer inputs from the user! Outside of the function call, print the area.</a:t>
+            </a:r>
+          </a:p>
+        </p:txBody>
+      </p:sp>
+      <p:sp>
+        <p:nvSpPr>
+          <p:cNvPr id="2" name="Title 1">
+            <a:extLst>
+              <a:ext uri="{FF2B5EF4-FFF2-40B4-BE49-F238E27FC236}">
+                <a16:creationId xmlns:a16="http://schemas.microsoft.com/office/drawing/2014/main" id="{56BB22C1-C97C-7358-F5A7-8EABD5DFEE3A}"/>
+              </a:ext>
+            </a:extLst>
+          </p:cNvPr>
+          <p:cNvSpPr>
+            <a:spLocks noGrp="1"/>
+          </p:cNvSpPr>
+          <p:nvPr>
+            <p:ph type="title"/>
+          </p:nvPr>
+        </p:nvSpPr>
+        <p:spPr>
+          <a:xfrm>
+            <a:off x="381000" y="0"/>
+            <a:ext cx="8382000" cy="857250"/>
+          </a:xfrm>
+        </p:spPr>
+        <p:txBody>
+          <a:bodyPr/>
+          <a:lstStyle/>
+          <a:p>
+            <a:r>
+              <a:rPr lang="en-US" dirty="0"/>
+              <a:t>In Class Exercise #1</a:t>
+            </a:r>
+          </a:p>
+        </p:txBody>
+      </p:sp>
+    </p:spTree>
+    <p:extLst>
+      <p:ext uri="{BB962C8B-B14F-4D97-AF65-F5344CB8AC3E}">
+        <p14:creationId xmlns:p14="http://schemas.microsoft.com/office/powerpoint/2010/main" val="305716964"/>
+      </p:ext>
+    </p:extLst>
+  </p:cSld>
+  <p:clrMapOvr>
+    <a:masterClrMapping/>
+  </p:clrMapOvr>
+</p:sld>
+</file>
+
+<file path=ppt/slides/slide23.xml><?xml version="1.0" encoding="utf-8"?>
+<p:sld xmlns:a="http://schemas.openxmlformats.org/drawingml/2006/main" xmlns:r="http://schemas.openxmlformats.org/officeDocument/2006/relationships" xmlns:p="http://schemas.openxmlformats.org/presentationml/2006/main">
+  <p:cSld>
+    <p:spTree>
+      <p:nvGrpSpPr>
+        <p:cNvPr id="1" name=""/>
+        <p:cNvGrpSpPr/>
+        <p:nvPr/>
+      </p:nvGrpSpPr>
+      <p:grpSpPr>
+        <a:xfrm>
+          <a:off x="0" y="0"/>
+          <a:ext cx="0" cy="0"/>
+          <a:chOff x="0" y="0"/>
+          <a:chExt cx="0" cy="0"/>
+        </a:xfrm>
+      </p:grpSpPr>
+      <p:sp>
+        <p:nvSpPr>
+          <p:cNvPr id="2" name="Title 1">
+            <a:extLst>
+              <a:ext uri="{FF2B5EF4-FFF2-40B4-BE49-F238E27FC236}">
+                <a16:creationId xmlns:a16="http://schemas.microsoft.com/office/drawing/2014/main" id="{DBEDFFBF-64D9-49B2-877B-51A6A3E8AE6D}"/>
+              </a:ext>
+            </a:extLst>
+          </p:cNvPr>
+          <p:cNvSpPr>
+            <a:spLocks noGrp="1"/>
+          </p:cNvSpPr>
+          <p:nvPr>
+            <p:ph type="title"/>
+          </p:nvPr>
+        </p:nvSpPr>
+        <p:spPr/>
+        <p:txBody>
+          <a:bodyPr/>
+          <a:lstStyle/>
+          <a:p>
+            <a:r>
+              <a:rPr lang="en-US" dirty="0"/>
+              <a:t>In Class Exercise #2</a:t>
+            </a:r>
+          </a:p>
+        </p:txBody>
+      </p:sp>
+      <p:sp>
+        <p:nvSpPr>
+          <p:cNvPr id="3" name="Content Placeholder 2">
+            <a:extLst>
+              <a:ext uri="{FF2B5EF4-FFF2-40B4-BE49-F238E27FC236}">
+                <a16:creationId xmlns:a16="http://schemas.microsoft.com/office/drawing/2014/main" id="{6933CB63-0862-4EC6-8BA7-94D8619835CD}"/>
+              </a:ext>
+            </a:extLst>
+          </p:cNvPr>
+          <p:cNvSpPr>
+            <a:spLocks noGrp="1"/>
+          </p:cNvSpPr>
+          <p:nvPr>
+            <p:ph idx="1"/>
+          </p:nvPr>
+        </p:nvSpPr>
+        <p:spPr/>
+        <p:txBody>
+          <a:bodyPr>
+            <a:normAutofit/>
+          </a:bodyPr>
+          <a:lstStyle/>
+          <a:p>
+            <a:r>
+              <a:rPr lang="en-US" dirty="0"/>
+              <a:t>Write a function called tip() that has two parameters named total and percentage.</a:t>
+            </a:r>
+          </a:p>
+          <a:p>
+            <a:endParaRPr lang="en-US" dirty="0"/>
+          </a:p>
+          <a:p>
+            <a:r>
+              <a:rPr lang="en-US" dirty="0"/>
+              <a:t>This function should </a:t>
+            </a:r>
+            <a:r>
+              <a:rPr lang="en-US" b="1" dirty="0"/>
+              <a:t>return</a:t>
+            </a:r>
+            <a:r>
+              <a:rPr lang="en-US" dirty="0"/>
+              <a:t> the amount you should tip given a total and the percentage you want to tip.  Print the amount returned outside of the function call.</a:t>
+            </a:r>
+          </a:p>
+          <a:p>
+            <a:endParaRPr lang="en-US" dirty="0"/>
+          </a:p>
+          <a:p>
+            <a:pPr marL="0" indent="0">
+              <a:buNone/>
+            </a:pPr>
+            <a:r>
+              <a:rPr lang="en-US" dirty="0"/>
+              <a:t>       tip(10, 25) = 2.5</a:t>
+            </a:r>
+          </a:p>
+        </p:txBody>
+      </p:sp>
+    </p:spTree>
+    <p:extLst>
+      <p:ext uri="{BB962C8B-B14F-4D97-AF65-F5344CB8AC3E}">
+        <p14:creationId xmlns:p14="http://schemas.microsoft.com/office/powerpoint/2010/main" val="1852592762"/>
+      </p:ext>
+    </p:extLst>
+  </p:cSld>
+  <p:clrMapOvr>
+    <a:masterClrMapping/>
+  </p:clrMapOvr>
+</p:sld>
+</file>
+
+<file path=ppt/slides/slide24.xml><?xml version="1.0" encoding="utf-8"?>
+<p:sld xmlns:a="http://schemas.openxmlformats.org/drawingml/2006/main" xmlns:r="http://schemas.openxmlformats.org/officeDocument/2006/relationships" xmlns:p="http://schemas.openxmlformats.org/presentationml/2006/main">
+  <p:cSld>
+    <p:spTree>
+      <p:nvGrpSpPr>
+        <p:cNvPr id="1" name=""/>
+        <p:cNvGrpSpPr/>
+        <p:nvPr/>
+      </p:nvGrpSpPr>
+      <p:grpSpPr>
+        <a:xfrm>
+          <a:off x="0" y="0"/>
+          <a:ext cx="0" cy="0"/>
+          <a:chOff x="0" y="0"/>
+          <a:chExt cx="0" cy="0"/>
+        </a:xfrm>
+      </p:grpSpPr>
+      <p:sp>
+        <p:nvSpPr>
+          <p:cNvPr id="2" name="Title 1">
+            <a:extLst>
+              <a:ext uri="{FF2B5EF4-FFF2-40B4-BE49-F238E27FC236}">
+                <a16:creationId xmlns:a16="http://schemas.microsoft.com/office/drawing/2014/main" id="{DBEDFFBF-64D9-49B2-877B-51A6A3E8AE6D}"/>
+              </a:ext>
+            </a:extLst>
+          </p:cNvPr>
+          <p:cNvSpPr>
+            <a:spLocks noGrp="1"/>
+          </p:cNvSpPr>
+          <p:nvPr>
+            <p:ph type="title"/>
+          </p:nvPr>
+        </p:nvSpPr>
+        <p:spPr/>
+        <p:txBody>
+          <a:bodyPr/>
+          <a:lstStyle/>
+          <a:p>
+            <a:r>
+              <a:rPr lang="en-US" dirty="0"/>
+              <a:t>In Class Exercise #3</a:t>
+            </a:r>
+          </a:p>
+        </p:txBody>
+      </p:sp>
+      <p:sp>
+        <p:nvSpPr>
+          <p:cNvPr id="3" name="Content Placeholder 2">
+            <a:extLst>
+              <a:ext uri="{FF2B5EF4-FFF2-40B4-BE49-F238E27FC236}">
+                <a16:creationId xmlns:a16="http://schemas.microsoft.com/office/drawing/2014/main" id="{6933CB63-0862-4EC6-8BA7-94D8619835CD}"/>
+              </a:ext>
+            </a:extLst>
+          </p:cNvPr>
+          <p:cNvSpPr>
+            <a:spLocks noGrp="1"/>
+          </p:cNvSpPr>
+          <p:nvPr>
+            <p:ph idx="1"/>
+          </p:nvPr>
+        </p:nvSpPr>
+        <p:spPr/>
+        <p:txBody>
+          <a:bodyPr>
+            <a:normAutofit/>
+          </a:bodyPr>
+          <a:lstStyle/>
+          <a:p>
+            <a:r>
+              <a:rPr lang="en-US" dirty="0"/>
+              <a:t>Write a function that takes a numerical input from the user, cubes that number, and then </a:t>
+            </a:r>
+            <a:r>
+              <a:rPr lang="en-US" b="1" dirty="0"/>
+              <a:t>returns</a:t>
+            </a:r>
+            <a:r>
+              <a:rPr lang="en-US" dirty="0"/>
+              <a:t> the result.  Print the result outside of the function call.</a:t>
+            </a:r>
+          </a:p>
+          <a:p>
+            <a:endParaRPr lang="en-US" dirty="0"/>
+          </a:p>
+        </p:txBody>
+      </p:sp>
+    </p:spTree>
+    <p:extLst>
+      <p:ext uri="{BB962C8B-B14F-4D97-AF65-F5344CB8AC3E}">
+        <p14:creationId xmlns:p14="http://schemas.microsoft.com/office/powerpoint/2010/main" val="2480126636"/>
+      </p:ext>
+    </p:extLst>
+  </p:cSld>
+  <p:clrMapOvr>
+    <a:masterClrMapping/>
+  </p:clrMapOvr>
+</p:sld>
+</file>
+
+<file path=ppt/slides/slide25.xml><?xml version="1.0" encoding="utf-8"?>
+<p:sld xmlns:a="http://schemas.openxmlformats.org/drawingml/2006/main" xmlns:r="http://schemas.openxmlformats.org/officeDocument/2006/relationships" xmlns:p="http://schemas.openxmlformats.org/presentationml/2006/main">
+  <p:cSld>
+    <p:spTree>
+      <p:nvGrpSpPr>
+        <p:cNvPr id="1" name=""/>
+        <p:cNvGrpSpPr/>
+        <p:nvPr/>
+      </p:nvGrpSpPr>
+      <p:grpSpPr>
+        <a:xfrm>
+          <a:off x="0" y="0"/>
+          <a:ext cx="0" cy="0"/>
+          <a:chOff x="0" y="0"/>
+          <a:chExt cx="0" cy="0"/>
+        </a:xfrm>
+      </p:grpSpPr>
+      <p:sp>
+        <p:nvSpPr>
+          <p:cNvPr id="2" name="Title 1">
+            <a:extLst>
+              <a:ext uri="{FF2B5EF4-FFF2-40B4-BE49-F238E27FC236}">
+                <a16:creationId xmlns:a16="http://schemas.microsoft.com/office/drawing/2014/main" id="{DBEDFFBF-64D9-49B2-877B-51A6A3E8AE6D}"/>
+              </a:ext>
+            </a:extLst>
+          </p:cNvPr>
+          <p:cNvSpPr>
+            <a:spLocks noGrp="1"/>
+          </p:cNvSpPr>
+          <p:nvPr>
+            <p:ph type="title"/>
+          </p:nvPr>
+        </p:nvSpPr>
+        <p:spPr/>
+        <p:txBody>
+          <a:bodyPr/>
+          <a:lstStyle/>
+          <a:p>
+            <a:r>
+              <a:rPr lang="en-US" dirty="0"/>
+              <a:t>In Class Exercise #4</a:t>
+            </a:r>
+          </a:p>
+        </p:txBody>
+      </p:sp>
+      <p:sp>
+        <p:nvSpPr>
+          <p:cNvPr id="3" name="Content Placeholder 2">
+            <a:extLst>
+              <a:ext uri="{FF2B5EF4-FFF2-40B4-BE49-F238E27FC236}">
+                <a16:creationId xmlns:a16="http://schemas.microsoft.com/office/drawing/2014/main" id="{6933CB63-0862-4EC6-8BA7-94D8619835CD}"/>
+              </a:ext>
+            </a:extLst>
+          </p:cNvPr>
+          <p:cNvSpPr>
+            <a:spLocks noGrp="1"/>
+          </p:cNvSpPr>
+          <p:nvPr>
+            <p:ph idx="1"/>
+          </p:nvPr>
+        </p:nvSpPr>
+        <p:spPr/>
+        <p:txBody>
+          <a:bodyPr>
+            <a:normAutofit/>
+          </a:bodyPr>
+          <a:lstStyle/>
+          <a:p>
+            <a:r>
+              <a:rPr lang="en-US" dirty="0"/>
+              <a:t>Write a function that is called “</a:t>
+            </a:r>
+            <a:r>
+              <a:rPr lang="en-US" dirty="0" err="1"/>
+              <a:t>has_more_letters</a:t>
+            </a:r>
+            <a:r>
+              <a:rPr lang="en-US" dirty="0"/>
+              <a:t>”.  This function should accept two strings as arguments, and will </a:t>
+            </a:r>
+            <a:r>
+              <a:rPr lang="en-US" b="1" u="sng" dirty="0"/>
+              <a:t>return</a:t>
+            </a:r>
+            <a:r>
+              <a:rPr lang="en-US" dirty="0"/>
+              <a:t> the string that has more letters.  Outside of the function call, print the string with more letters.</a:t>
+            </a:r>
+          </a:p>
+        </p:txBody>
+      </p:sp>
+    </p:spTree>
+    <p:extLst>
+      <p:ext uri="{BB962C8B-B14F-4D97-AF65-F5344CB8AC3E}">
+        <p14:creationId xmlns:p14="http://schemas.microsoft.com/office/powerpoint/2010/main" val="1818365840"/>
+      </p:ext>
+    </p:extLst>
+  </p:cSld>
+  <p:clrMapOvr>
+    <a:masterClrMapping/>
+  </p:clrMapOvr>
+</p:sld>
+</file>
+
+<file path=ppt/slides/slide26.xml><?xml version="1.0" encoding="utf-8"?>
+<p:sld xmlns:a="http://schemas.openxmlformats.org/drawingml/2006/main" xmlns:r="http://schemas.openxmlformats.org/officeDocument/2006/relationships" xmlns:p="http://schemas.openxmlformats.org/presentationml/2006/main">
+  <p:cSld>
+    <p:spTree>
+      <p:nvGrpSpPr>
+        <p:cNvPr id="1" name=""/>
+        <p:cNvGrpSpPr/>
+        <p:nvPr/>
+      </p:nvGrpSpPr>
+      <p:grpSpPr>
+        <a:xfrm>
+          <a:off x="0" y="0"/>
+          <a:ext cx="0" cy="0"/>
+          <a:chOff x="0" y="0"/>
+          <a:chExt cx="0" cy="0"/>
+        </a:xfrm>
+      </p:grpSpPr>
+      <p:sp>
+        <p:nvSpPr>
+          <p:cNvPr id="2" name="Title 1">
+            <a:extLst>
+              <a:ext uri="{FF2B5EF4-FFF2-40B4-BE49-F238E27FC236}">
+                <a16:creationId xmlns:a16="http://schemas.microsoft.com/office/drawing/2014/main" id="{DBEDFFBF-64D9-49B2-877B-51A6A3E8AE6D}"/>
+              </a:ext>
+            </a:extLst>
+          </p:cNvPr>
+          <p:cNvSpPr>
+            <a:spLocks noGrp="1"/>
+          </p:cNvSpPr>
+          <p:nvPr>
+            <p:ph type="title"/>
+          </p:nvPr>
+        </p:nvSpPr>
+        <p:spPr/>
+        <p:txBody>
+          <a:bodyPr/>
+          <a:lstStyle/>
+          <a:p>
+            <a:r>
+              <a:rPr lang="en-US" dirty="0"/>
+              <a:t>In Class Exercise #5</a:t>
+            </a:r>
+          </a:p>
+        </p:txBody>
+      </p:sp>
+      <p:sp>
+        <p:nvSpPr>
+          <p:cNvPr id="3" name="Content Placeholder 2">
+            <a:extLst>
+              <a:ext uri="{FF2B5EF4-FFF2-40B4-BE49-F238E27FC236}">
+                <a16:creationId xmlns:a16="http://schemas.microsoft.com/office/drawing/2014/main" id="{6933CB63-0862-4EC6-8BA7-94D8619835CD}"/>
+              </a:ext>
+            </a:extLst>
+          </p:cNvPr>
+          <p:cNvSpPr>
+            <a:spLocks noGrp="1"/>
+          </p:cNvSpPr>
+          <p:nvPr>
+            <p:ph idx="1"/>
+          </p:nvPr>
+        </p:nvSpPr>
+        <p:spPr/>
+        <p:txBody>
+          <a:bodyPr>
+            <a:normAutofit/>
+          </a:bodyPr>
+          <a:lstStyle/>
+          <a:p>
+            <a:r>
+              <a:rPr lang="en-US" dirty="0"/>
+              <a:t>Write a function that is called “</a:t>
+            </a:r>
+            <a:r>
+              <a:rPr lang="en-US" dirty="0" err="1"/>
+              <a:t>count_char_x</a:t>
+            </a:r>
+            <a:r>
+              <a:rPr lang="en-US" dirty="0"/>
+              <a:t>”.  This function should accept two inputs, a word and a character.  The function will return how many instances of the character are in the word.</a:t>
+            </a:r>
+          </a:p>
+        </p:txBody>
+      </p:sp>
+    </p:spTree>
+    <p:extLst>
+      <p:ext uri="{BB962C8B-B14F-4D97-AF65-F5344CB8AC3E}">
+        <p14:creationId xmlns:p14="http://schemas.microsoft.com/office/powerpoint/2010/main" val="2180454425"/>
+      </p:ext>
+    </p:extLst>
+  </p:cSld>
+  <p:clrMapOvr>
+    <a:masterClrMapping/>
+  </p:clrMapOvr>
+</p:sld>
+</file>
+
+<file path=ppt/slides/slide27.xml><?xml version="1.0" encoding="utf-8"?>
+<p:sld xmlns:a="http://schemas.openxmlformats.org/drawingml/2006/main" xmlns:r="http://schemas.openxmlformats.org/officeDocument/2006/relationships" xmlns:p="http://schemas.openxmlformats.org/presentationml/2006/main">
+  <p:cSld>
+    <p:spTree>
+      <p:nvGrpSpPr>
+        <p:cNvPr id="1" name=""/>
+        <p:cNvGrpSpPr/>
+        <p:nvPr/>
+      </p:nvGrpSpPr>
+      <p:grpSpPr>
+        <a:xfrm>
+          <a:off x="0" y="0"/>
+          <a:ext cx="0" cy="0"/>
+          <a:chOff x="0" y="0"/>
+          <a:chExt cx="0" cy="0"/>
+        </a:xfrm>
+      </p:grpSpPr>
+      <p:sp>
+        <p:nvSpPr>
+          <p:cNvPr id="2" name="Title 1">
+            <a:extLst>
+              <a:ext uri="{FF2B5EF4-FFF2-40B4-BE49-F238E27FC236}">
+                <a16:creationId xmlns:a16="http://schemas.microsoft.com/office/drawing/2014/main" id="{8FFE8B6A-04FD-4F39-B24F-5A6F46DC3CF0}"/>
+              </a:ext>
+            </a:extLst>
+          </p:cNvPr>
+          <p:cNvSpPr>
+            <a:spLocks noGrp="1"/>
+          </p:cNvSpPr>
+          <p:nvPr>
+            <p:ph type="title"/>
+          </p:nvPr>
+        </p:nvSpPr>
+        <p:spPr>
+          <a:xfrm>
+            <a:off x="381000" y="1967163"/>
+            <a:ext cx="8382000" cy="857250"/>
+          </a:xfrm>
+        </p:spPr>
+        <p:txBody>
+          <a:bodyPr/>
+          <a:lstStyle/>
+          <a:p>
+            <a:r>
+              <a:rPr lang="en-US" dirty="0"/>
+              <a:t>What did you learn?</a:t>
+            </a:r>
+          </a:p>
+        </p:txBody>
+      </p:sp>
+    </p:spTree>
+    <p:extLst>
+      <p:ext uri="{BB962C8B-B14F-4D97-AF65-F5344CB8AC3E}">
+        <p14:creationId xmlns:p14="http://schemas.microsoft.com/office/powerpoint/2010/main" val="2995805120"/>
+      </p:ext>
+    </p:extLst>
+  </p:cSld>
+  <p:clrMapOvr>
+    <a:masterClrMapping/>
+  </p:clrMapOvr>
+</p:sld>
+</file>
+
+<file path=ppt/slides/slide28.xml><?xml version="1.0" encoding="utf-8"?>
+<p:sld xmlns:a="http://schemas.openxmlformats.org/drawingml/2006/main" xmlns:r="http://schemas.openxmlformats.org/officeDocument/2006/relationships" xmlns:p="http://schemas.openxmlformats.org/presentationml/2006/main">
+  <p:cSld>
+    <p:spTree>
+      <p:nvGrpSpPr>
+        <p:cNvPr id="1" name=""/>
+        <p:cNvGrpSpPr/>
+        <p:nvPr/>
+      </p:nvGrpSpPr>
+      <p:grpSpPr>
+        <a:xfrm>
+          <a:off x="0" y="0"/>
+          <a:ext cx="0" cy="0"/>
+          <a:chOff x="0" y="0"/>
+          <a:chExt cx="0" cy="0"/>
+        </a:xfrm>
+      </p:grpSpPr>
+      <p:sp>
+        <p:nvSpPr>
+          <p:cNvPr id="14338" name="Title 1"/>
+          <p:cNvSpPr>
+            <a:spLocks noGrp="1"/>
+          </p:cNvSpPr>
+          <p:nvPr>
+            <p:ph type="ctrTitle"/>
+          </p:nvPr>
+        </p:nvSpPr>
+        <p:spPr>
+          <a:xfrm>
+            <a:off x="685800" y="2020491"/>
+            <a:ext cx="7772400" cy="1102519"/>
+          </a:xfrm>
+        </p:spPr>
+        <p:txBody>
+          <a:bodyPr/>
+          <a:lstStyle/>
+          <a:p>
+            <a:pPr eaLnBrk="1" hangingPunct="1"/>
+            <a:r>
+              <a:rPr lang="en-US" altLang="en-US" sz="4500" dirty="0"/>
+              <a:t>Admin</a:t>
+            </a:r>
+            <a:endParaRPr lang="en-US" altLang="en-US" dirty="0"/>
+          </a:p>
+        </p:txBody>
+      </p:sp>
+    </p:spTree>
+    <p:extLst>
+      <p:ext uri="{BB962C8B-B14F-4D97-AF65-F5344CB8AC3E}">
+        <p14:creationId xmlns:p14="http://schemas.microsoft.com/office/powerpoint/2010/main" val="2524704764"/>
+      </p:ext>
+    </p:extLst>
+  </p:cSld>
+  <p:clrMapOvr>
+    <a:masterClrMapping/>
+  </p:clrMapOvr>
+</p:sld>
+</file>
+
+<file path=ppt/slides/slide3.xml><?xml version="1.0" encoding="utf-8"?>
+<p:sld xmlns:a="http://schemas.openxmlformats.org/drawingml/2006/main" xmlns:r="http://schemas.openxmlformats.org/officeDocument/2006/relationships" xmlns:p="http://schemas.openxmlformats.org/presentationml/2006/main">
+  <p:cSld>
+    <p:spTree>
+      <p:nvGrpSpPr>
+        <p:cNvPr id="1" name="">
+          <a:extLst>
+            <a:ext uri="{FF2B5EF4-FFF2-40B4-BE49-F238E27FC236}">
+              <a16:creationId xmlns:a16="http://schemas.microsoft.com/office/drawing/2014/main" id="{EF590356-D218-05C2-9300-A24D000265F2}"/>
+            </a:ext>
+          </a:extLst>
+        </p:cNvPr>
+        <p:cNvGrpSpPr/>
+        <p:nvPr/>
+      </p:nvGrpSpPr>
+      <p:grpSpPr>
+        <a:xfrm>
+          <a:off x="0" y="0"/>
+          <a:ext cx="0" cy="0"/>
+          <a:chOff x="0" y="0"/>
+          <a:chExt cx="0" cy="0"/>
+        </a:xfrm>
+      </p:grpSpPr>
+      <p:sp>
+        <p:nvSpPr>
+          <p:cNvPr id="2" name="Title 1">
+            <a:extLst>
+              <a:ext uri="{FF2B5EF4-FFF2-40B4-BE49-F238E27FC236}">
+                <a16:creationId xmlns:a16="http://schemas.microsoft.com/office/drawing/2014/main" id="{C368B425-1482-C9DD-32B8-CFBBAA424ABB}"/>
+              </a:ext>
+            </a:extLst>
+          </p:cNvPr>
+          <p:cNvSpPr>
+            <a:spLocks noGrp="1"/>
+          </p:cNvSpPr>
+          <p:nvPr>
+            <p:ph type="title"/>
+          </p:nvPr>
+        </p:nvSpPr>
+        <p:spPr/>
+        <p:txBody>
+          <a:bodyPr/>
+          <a:lstStyle/>
+          <a:p>
+            <a:br>
+              <a:rPr lang="en-US" dirty="0"/>
+            </a:br>
+            <a:r>
+              <a:rPr lang="en-US" dirty="0"/>
+              <a:t>The Dunning-Kruger effect</a:t>
+            </a:r>
+          </a:p>
+        </p:txBody>
+      </p:sp>
+      <p:sp>
+        <p:nvSpPr>
+          <p:cNvPr id="5" name="TextBox 4">
+            <a:extLst>
+              <a:ext uri="{FF2B5EF4-FFF2-40B4-BE49-F238E27FC236}">
+                <a16:creationId xmlns:a16="http://schemas.microsoft.com/office/drawing/2014/main" id="{978A391B-E79C-E6BA-632B-BBA6798E6682}"/>
+              </a:ext>
+            </a:extLst>
+          </p:cNvPr>
+          <p:cNvSpPr txBox="1"/>
+          <p:nvPr/>
+        </p:nvSpPr>
+        <p:spPr>
+          <a:xfrm>
+            <a:off x="1274956" y="2094696"/>
+            <a:ext cx="6477000" cy="1169551"/>
+          </a:xfrm>
+          <a:prstGeom prst="rect">
+            <a:avLst/>
+          </a:prstGeom>
+          <a:noFill/>
+        </p:spPr>
+        <p:txBody>
+          <a:bodyPr wrap="square">
+            <a:spAutoFit/>
+          </a:bodyPr>
+          <a:lstStyle/>
+          <a:p>
+            <a:r>
+              <a:rPr lang="en-US" b="0" i="0" dirty="0">
+                <a:solidFill>
+                  <a:srgbClr val="202122"/>
+                </a:solidFill>
+                <a:effectLst/>
+                <a:latin typeface="Arial" panose="020B0604020202020204" pitchFamily="34" charset="0"/>
+              </a:rPr>
+              <a:t>The </a:t>
+            </a:r>
+            <a:r>
+              <a:rPr lang="en-US" b="1" i="0" dirty="0">
+                <a:solidFill>
+                  <a:srgbClr val="202122"/>
+                </a:solidFill>
+                <a:effectLst/>
+                <a:latin typeface="Arial" panose="020B0604020202020204" pitchFamily="34" charset="0"/>
+              </a:rPr>
+              <a:t>Dunning–Kruger effect</a:t>
+            </a:r>
+            <a:r>
+              <a:rPr lang="en-US" b="0" i="0" dirty="0">
+                <a:solidFill>
+                  <a:srgbClr val="202122"/>
+                </a:solidFill>
+                <a:effectLst/>
+                <a:latin typeface="Arial" panose="020B0604020202020204" pitchFamily="34" charset="0"/>
+              </a:rPr>
+              <a:t> is a </a:t>
+            </a:r>
+            <a:r>
+              <a:rPr lang="en-US" b="0" i="0" u="none" strike="noStrike" dirty="0">
+                <a:solidFill>
+                  <a:srgbClr val="3366CC"/>
+                </a:solidFill>
+                <a:effectLst/>
+                <a:latin typeface="Arial" panose="020B0604020202020204" pitchFamily="34" charset="0"/>
+                <a:hlinkClick r:id="rId3" tooltip="Cognitive bias"/>
+              </a:rPr>
+              <a:t>cognitive bias</a:t>
+            </a:r>
+            <a:r>
+              <a:rPr lang="en-US" b="0" i="0" dirty="0">
+                <a:solidFill>
+                  <a:srgbClr val="202122"/>
+                </a:solidFill>
+                <a:effectLst/>
+                <a:latin typeface="Arial" panose="020B0604020202020204" pitchFamily="34" charset="0"/>
+              </a:rPr>
+              <a:t> that describes the systematic tendency of people with low </a:t>
+            </a:r>
+            <a:r>
+              <a:rPr lang="en-US" b="0" i="0" u="none" strike="noStrike" dirty="0">
+                <a:solidFill>
+                  <a:srgbClr val="3366CC"/>
+                </a:solidFill>
+                <a:effectLst/>
+                <a:latin typeface="Arial" panose="020B0604020202020204" pitchFamily="34" charset="0"/>
+                <a:hlinkClick r:id="rId4" tooltip="Ability"/>
+              </a:rPr>
+              <a:t>ability</a:t>
+            </a:r>
+            <a:r>
+              <a:rPr lang="en-US" b="0" i="0" dirty="0">
+                <a:solidFill>
+                  <a:srgbClr val="202122"/>
+                </a:solidFill>
+                <a:effectLst/>
+                <a:latin typeface="Arial" panose="020B0604020202020204" pitchFamily="34" charset="0"/>
+              </a:rPr>
+              <a:t> in a specific area to give overly positive assessments of this ability. </a:t>
+            </a:r>
+          </a:p>
+          <a:p>
+            <a:endParaRPr lang="en-US" dirty="0">
+              <a:solidFill>
+                <a:srgbClr val="202122"/>
+              </a:solidFill>
+              <a:latin typeface="Arial" panose="020B0604020202020204" pitchFamily="34" charset="0"/>
+            </a:endParaRPr>
+          </a:p>
+          <a:p>
+            <a:r>
+              <a:rPr lang="en-US" dirty="0">
+                <a:solidFill>
+                  <a:srgbClr val="202122"/>
+                </a:solidFill>
+                <a:latin typeface="Arial" panose="020B0604020202020204" pitchFamily="34" charset="0"/>
+              </a:rPr>
+              <a:t>Keep pushing yourself.  Even if you think you’re great.</a:t>
+            </a:r>
+            <a:endParaRPr lang="en-US" dirty="0"/>
+          </a:p>
+        </p:txBody>
+      </p:sp>
+    </p:spTree>
+    <p:extLst>
+      <p:ext uri="{BB962C8B-B14F-4D97-AF65-F5344CB8AC3E}">
+        <p14:creationId xmlns:p14="http://schemas.microsoft.com/office/powerpoint/2010/main" val="2883852192"/>
+      </p:ext>
+    </p:extLst>
+  </p:cSld>
+  <p:clrMapOvr>
+    <a:masterClrMapping/>
+  </p:clrMapOvr>
+  <p:timing>
+    <p:tnLst>
+      <p:par>
+        <p:cTn id="1" dur="indefinite" restart="never" nodeType="tmRoot">
+          <p:childTnLst>
+            <p:seq concurrent="1" nextAc="seek">
+              <p:cTn id="2" dur="indefinite" nodeType="mainSeq">
+                <p:childTnLst>
+                  <p:par>
+                    <p:cTn id="3" fill="hold">
+                      <p:stCondLst>
+                        <p:cond delay="indefinite"/>
+                      </p:stCondLst>
+                      <p:childTnLst>
+                        <p:par>
+                          <p:cTn id="4" fill="hold">
+                            <p:stCondLst>
+                              <p:cond delay="0"/>
+                            </p:stCondLst>
+                            <p:childTnLst>
+                              <p:par>
+                                <p:cTn id="5" presetID="1" presetClass="entr" presetSubtype="0" fill="hold" nodeType="clickEffect">
+                                  <p:stCondLst>
+                                    <p:cond delay="0"/>
+                                  </p:stCondLst>
+                                  <p:childTnLst>
+                                    <p:set>
+                                      <p:cBhvr>
+                                        <p:cTn id="6" dur="1" fill="hold">
+                                          <p:stCondLst>
+                                            <p:cond delay="0"/>
+                                          </p:stCondLst>
+                                        </p:cTn>
+                                        <p:tgtEl>
+                                          <p:spTgt spid="5">
+                                            <p:txEl>
+                                              <p:pRg st="0" end="0"/>
+                                            </p:txEl>
+                                          </p:spTgt>
+                                        </p:tgtEl>
+                                        <p:attrNameLst>
+                                          <p:attrName>style.visibility</p:attrName>
+                                        </p:attrNameLst>
+                                      </p:cBhvr>
+                                      <p:to>
+                                        <p:strVal val="visible"/>
+                                      </p:to>
+                                    </p:set>
+                                  </p:childTnLst>
+                                </p:cTn>
+                              </p:par>
+                            </p:childTnLst>
+                          </p:cTn>
+                        </p:par>
+                      </p:childTnLst>
+                    </p:cTn>
+                  </p:par>
+                  <p:par>
+                    <p:cTn id="7" fill="hold">
+                      <p:stCondLst>
+                        <p:cond delay="indefinite"/>
+                      </p:stCondLst>
+                      <p:childTnLst>
+                        <p:par>
+                          <p:cTn id="8" fill="hold">
+                            <p:stCondLst>
+                              <p:cond delay="0"/>
+                            </p:stCondLst>
+                            <p:childTnLst>
+                              <p:par>
+                                <p:cTn id="9" presetID="1" presetClass="entr" presetSubtype="0" fill="hold" nodeType="clickEffect">
+                                  <p:stCondLst>
+                                    <p:cond delay="0"/>
+                                  </p:stCondLst>
+                                  <p:childTnLst>
+                                    <p:set>
+                                      <p:cBhvr>
+                                        <p:cTn id="10" dur="1" fill="hold">
+                                          <p:stCondLst>
+                                            <p:cond delay="0"/>
+                                          </p:stCondLst>
+                                        </p:cTn>
+                                        <p:tgtEl>
+                                          <p:spTgt spid="5">
+                                            <p:txEl>
+                                              <p:pRg st="2" end="2"/>
+                                            </p:txEl>
+                                          </p:spTgt>
+                                        </p:tgtEl>
+                                        <p:attrNameLst>
+                                          <p:attrName>style.visibility</p:attrName>
+                                        </p:attrNameLst>
+                                      </p:cBhvr>
+                                      <p:to>
+                                        <p:strVal val="visible"/>
+                                      </p:to>
+                                    </p:set>
+                                  </p:childTnLst>
+                                </p:cTn>
+                              </p:par>
+                            </p:childTnLst>
+                          </p:cTn>
+                        </p:par>
+                      </p:childTnLst>
+                    </p:cTn>
+                  </p:par>
+                </p:childTnLst>
+              </p:cTn>
+              <p:prevCondLst>
+                <p:cond evt="onPrev" delay="0">
+                  <p:tgtEl>
+                    <p:sldTgt/>
+                  </p:tgtEl>
+                </p:cond>
+              </p:prevCondLst>
+              <p:nextCondLst>
+                <p:cond evt="onNext" delay="0">
+                  <p:tgtEl>
+                    <p:sldTgt/>
+                  </p:tgtEl>
+                </p:cond>
+              </p:nextCondLst>
+            </p:seq>
+          </p:childTnLst>
+        </p:cTn>
+      </p:par>
+    </p:tnLst>
+  </p:timing>
+</p:sld>
+</file>
+
+<file path=ppt/slides/slide4.xml><?xml version="1.0" encoding="utf-8"?>
+<p:sld xmlns:a="http://schemas.openxmlformats.org/drawingml/2006/main" xmlns:r="http://schemas.openxmlformats.org/officeDocument/2006/relationships" xmlns:p="http://schemas.openxmlformats.org/presentationml/2006/main">
+  <p:cSld>
+    <p:spTree>
+      <p:nvGrpSpPr>
+        <p:cNvPr id="1" name="">
+          <a:extLst>
+            <a:ext uri="{FF2B5EF4-FFF2-40B4-BE49-F238E27FC236}">
+              <a16:creationId xmlns:a16="http://schemas.microsoft.com/office/drawing/2014/main" id="{372D87CF-5E92-D709-ADC1-CD5AB2C3F775}"/>
+            </a:ext>
+          </a:extLst>
+        </p:cNvPr>
+        <p:cNvGrpSpPr/>
+        <p:nvPr/>
+      </p:nvGrpSpPr>
+      <p:grpSpPr>
+        <a:xfrm>
+          <a:off x="0" y="0"/>
+          <a:ext cx="0" cy="0"/>
+          <a:chOff x="0" y="0"/>
+          <a:chExt cx="0" cy="0"/>
+        </a:xfrm>
+      </p:grpSpPr>
+      <p:sp>
+        <p:nvSpPr>
+          <p:cNvPr id="2" name="Title 1">
+            <a:extLst>
+              <a:ext uri="{FF2B5EF4-FFF2-40B4-BE49-F238E27FC236}">
+                <a16:creationId xmlns:a16="http://schemas.microsoft.com/office/drawing/2014/main" id="{2AEBB9CF-99E0-34C2-13BD-CE711791B329}"/>
+              </a:ext>
+            </a:extLst>
+          </p:cNvPr>
+          <p:cNvSpPr>
+            <a:spLocks noGrp="1"/>
+          </p:cNvSpPr>
+          <p:nvPr>
+            <p:ph type="title"/>
+          </p:nvPr>
+        </p:nvSpPr>
+        <p:spPr/>
+        <p:txBody>
+          <a:bodyPr/>
+          <a:lstStyle/>
+          <a:p>
+            <a:br>
+              <a:rPr lang="en-US" dirty="0"/>
+            </a:br>
+            <a:r>
+              <a:rPr lang="en-US" dirty="0"/>
+              <a:t>Course Schedule</a:t>
+            </a:r>
+          </a:p>
+        </p:txBody>
+      </p:sp>
+      <p:pic>
+        <p:nvPicPr>
+          <p:cNvPr id="7" name="Content Placeholder 6">
+            <a:extLst>
+              <a:ext uri="{FF2B5EF4-FFF2-40B4-BE49-F238E27FC236}">
+                <a16:creationId xmlns:a16="http://schemas.microsoft.com/office/drawing/2014/main" id="{D6C03BA8-C242-A7E3-06B9-2FDDD142A3E2}"/>
+              </a:ext>
+            </a:extLst>
+          </p:cNvPr>
+          <p:cNvPicPr>
+            <a:picLocks noGrp="1" noChangeAspect="1"/>
+          </p:cNvPicPr>
+          <p:nvPr>
+            <p:ph idx="1"/>
+          </p:nvPr>
+        </p:nvPicPr>
+        <p:blipFill>
+          <a:blip r:embed="rId3"/>
+          <a:stretch>
+            <a:fillRect/>
+          </a:stretch>
+        </p:blipFill>
+        <p:spPr>
+          <a:xfrm>
+            <a:off x="381000" y="989100"/>
+            <a:ext cx="8382000" cy="3716356"/>
+          </a:xfrm>
+          <a:prstGeom prst="rect">
+            <a:avLst/>
+          </a:prstGeom>
+          <a:noFill/>
+          <a:ln>
+            <a:noFill/>
+          </a:ln>
+        </p:spPr>
+      </p:pic>
+      <p:sp>
+        <p:nvSpPr>
+          <p:cNvPr id="8" name="Rectangle 7">
+            <a:extLst>
+              <a:ext uri="{FF2B5EF4-FFF2-40B4-BE49-F238E27FC236}">
+                <a16:creationId xmlns:a16="http://schemas.microsoft.com/office/drawing/2014/main" id="{0C366FE1-DAFA-E7EC-025F-E1D1E8686851}"/>
+              </a:ext>
+            </a:extLst>
+          </p:cNvPr>
+          <p:cNvSpPr/>
+          <p:nvPr/>
+        </p:nvSpPr>
+        <p:spPr>
+          <a:xfrm>
+            <a:off x="148683" y="1925444"/>
+            <a:ext cx="4713249" cy="230458"/>
+          </a:xfrm>
+          <a:prstGeom prst="rect">
+            <a:avLst/>
+          </a:prstGeom>
+          <a:noFill/>
+          <a:ln w="38100">
+            <a:solidFill>
+              <a:srgbClr val="FF0000"/>
+            </a:solidFill>
+          </a:ln>
+        </p:spPr>
+        <p:style>
+          <a:lnRef idx="2">
+            <a:schemeClr val="accent1">
+              <a:shade val="15000"/>
+            </a:schemeClr>
+          </a:lnRef>
+          <a:fillRef idx="1">
+            <a:schemeClr val="accent1"/>
+          </a:fillRef>
+          <a:effectRef idx="0">
+            <a:schemeClr val="accent1"/>
+          </a:effectRef>
+          <a:fontRef idx="minor">
+            <a:schemeClr val="lt1"/>
+          </a:fontRef>
+        </p:style>
+        <p:txBody>
+          <a:bodyPr rtlCol="0" anchor="ctr"/>
+          <a:lstStyle/>
+          <a:p>
+            <a:pPr algn="ctr"/>
+            <a:endParaRPr lang="en-US"/>
+          </a:p>
+        </p:txBody>
+      </p:sp>
+    </p:spTree>
+    <p:extLst>
+      <p:ext uri="{BB962C8B-B14F-4D97-AF65-F5344CB8AC3E}">
+        <p14:creationId xmlns:p14="http://schemas.microsoft.com/office/powerpoint/2010/main" val="1919185427"/>
+      </p:ext>
+    </p:extLst>
+  </p:cSld>
+  <p:clrMapOvr>
+    <a:masterClrMapping/>
+  </p:clrMapOvr>
+</p:sld>
+</file>
+
+<file path=ppt/slides/slide5.xml><?xml version="1.0" encoding="utf-8"?>
+<p:sld xmlns:a="http://schemas.openxmlformats.org/drawingml/2006/main" xmlns:r="http://schemas.openxmlformats.org/officeDocument/2006/relationships" xmlns:p="http://schemas.openxmlformats.org/presentationml/2006/main">
+  <p:cSld>
+    <p:spTree>
+      <p:nvGrpSpPr>
+        <p:cNvPr id="1" name="">
+          <a:extLst>
+            <a:ext uri="{FF2B5EF4-FFF2-40B4-BE49-F238E27FC236}">
+              <a16:creationId xmlns:a16="http://schemas.microsoft.com/office/drawing/2014/main" id="{0B89F51F-ADCA-105D-6A2E-72EBEFFBB4F0}"/>
+            </a:ext>
+          </a:extLst>
+        </p:cNvPr>
+        <p:cNvGrpSpPr/>
+        <p:nvPr/>
+      </p:nvGrpSpPr>
+      <p:grpSpPr>
+        <a:xfrm>
+          <a:off x="0" y="0"/>
+          <a:ext cx="0" cy="0"/>
+          <a:chOff x="0" y="0"/>
+          <a:chExt cx="0" cy="0"/>
+        </a:xfrm>
+      </p:grpSpPr>
+      <p:sp>
+        <p:nvSpPr>
+          <p:cNvPr id="2" name="Title 1">
+            <a:extLst>
+              <a:ext uri="{FF2B5EF4-FFF2-40B4-BE49-F238E27FC236}">
+                <a16:creationId xmlns:a16="http://schemas.microsoft.com/office/drawing/2014/main" id="{21D0DA68-9A3E-BE02-724E-F79475A2462B}"/>
+              </a:ext>
+            </a:extLst>
+          </p:cNvPr>
+          <p:cNvSpPr>
+            <a:spLocks noGrp="1"/>
+          </p:cNvSpPr>
+          <p:nvPr>
+            <p:ph type="title"/>
+          </p:nvPr>
+        </p:nvSpPr>
+        <p:spPr>
+          <a:xfrm>
+            <a:off x="3791414" y="2279146"/>
+            <a:ext cx="1438879" cy="585207"/>
+          </a:xfrm>
+        </p:spPr>
+        <p:txBody>
+          <a:bodyPr/>
+          <a:lstStyle/>
+          <a:p>
+            <a:r>
+              <a:rPr lang="en-US" dirty="0"/>
+              <a:t>Review</a:t>
+            </a:r>
+          </a:p>
+        </p:txBody>
+      </p:sp>
+    </p:spTree>
+    <p:extLst>
+      <p:ext uri="{BB962C8B-B14F-4D97-AF65-F5344CB8AC3E}">
+        <p14:creationId xmlns:p14="http://schemas.microsoft.com/office/powerpoint/2010/main" val="2846455765"/>
+      </p:ext>
+    </p:extLst>
+  </p:cSld>
+  <p:clrMapOvr>
+    <a:masterClrMapping/>
+  </p:clrMapOvr>
+</p:sld>
+</file>
+
+<file path=ppt/slides/slide6.xml><?xml version="1.0" encoding="utf-8"?>
+<p:sld xmlns:a="http://schemas.openxmlformats.org/drawingml/2006/main" xmlns:r="http://schemas.openxmlformats.org/officeDocument/2006/relationships" xmlns:p="http://schemas.openxmlformats.org/presentationml/2006/main">
+  <p:cSld>
+    <p:spTree>
+      <p:nvGrpSpPr>
+        <p:cNvPr id="1" name="Shape 59"/>
+        <p:cNvGrpSpPr/>
+        <p:nvPr/>
+      </p:nvGrpSpPr>
+      <p:grpSpPr>
+        <a:xfrm>
+          <a:off x="0" y="0"/>
+          <a:ext cx="0" cy="0"/>
+          <a:chOff x="0" y="0"/>
+          <a:chExt cx="0" cy="0"/>
+        </a:xfrm>
+      </p:grpSpPr>
+      <p:sp>
+        <p:nvSpPr>
+          <p:cNvPr id="60" name="Google Shape;60;p14"/>
+          <p:cNvSpPr txBox="1">
+            <a:spLocks noGrp="1"/>
+          </p:cNvSpPr>
+          <p:nvPr>
+            <p:ph type="body" idx="1"/>
+          </p:nvPr>
+        </p:nvSpPr>
+        <p:spPr>
+          <a:xfrm>
+            <a:off x="311700" y="213675"/>
+            <a:ext cx="8520600" cy="4742700"/>
+          </a:xfrm>
+          <a:prstGeom prst="rect">
+            <a:avLst/>
+          </a:prstGeom>
+        </p:spPr>
+        <p:txBody>
+          <a:bodyPr spcFirstLastPara="1" wrap="square" lIns="91425" tIns="91425" rIns="91425" bIns="91425" anchor="t" anchorCtr="0">
+            <a:normAutofit fontScale="92500" lnSpcReduction="10000"/>
+          </a:bodyPr>
+          <a:lstStyle/>
+          <a:p>
+            <a:pPr marL="0" lvl="0" indent="0" algn="l" rtl="0">
+              <a:spcBef>
+                <a:spcPts val="0"/>
+              </a:spcBef>
+              <a:spcAft>
+                <a:spcPts val="0"/>
+              </a:spcAft>
+              <a:buNone/>
+            </a:pPr>
+            <a:r>
+              <a:rPr lang="en" sz="2500" b="1" u="sng" dirty="0"/>
+              <a:t>Problem 1</a:t>
+            </a:r>
+            <a:endParaRPr sz="2500" b="1" u="sng" dirty="0"/>
+          </a:p>
+          <a:p>
+            <a:pPr marL="0" lvl="0" indent="0" algn="l" rtl="0">
+              <a:spcBef>
+                <a:spcPts val="1200"/>
+              </a:spcBef>
+              <a:spcAft>
+                <a:spcPts val="0"/>
+              </a:spcAft>
+              <a:buNone/>
+            </a:pPr>
+            <a:r>
+              <a:rPr lang="en" sz="2500" dirty="0"/>
+              <a:t>Print the numbers from 1 to 100.  If the number is divisible by 3, print “Fizz” instead of the number.  If it is divisible by 5, print “Buzz” instead of the number.  If it is divisible by both, print “FizzBuzz” instead of the number.</a:t>
+            </a:r>
+            <a:endParaRPr sz="2500" dirty="0"/>
+          </a:p>
+          <a:p>
+            <a:pPr marL="0" lvl="0" indent="0" algn="l" rtl="0">
+              <a:spcBef>
+                <a:spcPts val="1200"/>
+              </a:spcBef>
+              <a:spcAft>
+                <a:spcPts val="0"/>
+              </a:spcAft>
+              <a:buNone/>
+            </a:pPr>
+            <a:endParaRPr sz="2500" dirty="0"/>
+          </a:p>
+          <a:p>
+            <a:pPr marL="0" lvl="0" indent="0" algn="l" rtl="0">
+              <a:spcBef>
+                <a:spcPts val="1200"/>
+              </a:spcBef>
+              <a:spcAft>
+                <a:spcPts val="0"/>
+              </a:spcAft>
+              <a:buNone/>
+            </a:pPr>
+            <a:r>
+              <a:rPr lang="en" sz="2500" b="1" u="sng" dirty="0"/>
+              <a:t>Problem 2</a:t>
+            </a:r>
+            <a:endParaRPr sz="2500" b="1" u="sng" dirty="0"/>
+          </a:p>
+          <a:p>
+            <a:pPr marL="0" lvl="0" indent="0" algn="l" rtl="0">
+              <a:spcBef>
+                <a:spcPts val="1200"/>
+              </a:spcBef>
+              <a:spcAft>
+                <a:spcPts val="0"/>
+              </a:spcAft>
+              <a:buNone/>
+            </a:pPr>
+            <a:r>
+              <a:rPr lang="en" sz="2500" dirty="0"/>
+              <a:t>Ask the user for “rock”, “paper”, or “scissors”.  Randomly assign the computer’s choice of “rock”, “paper”, or “scissors”. Display whether the user won, lost, or tied.</a:t>
+            </a:r>
+            <a:endParaRPr sz="2500" dirty="0"/>
+          </a:p>
+          <a:p>
+            <a:pPr marL="0" lvl="0" indent="0" algn="l" rtl="0">
+              <a:spcBef>
+                <a:spcPts val="1200"/>
+              </a:spcBef>
+              <a:spcAft>
+                <a:spcPts val="0"/>
+              </a:spcAft>
+              <a:buNone/>
+            </a:pPr>
+            <a:endParaRPr dirty="0"/>
+          </a:p>
+          <a:p>
+            <a:pPr marL="0" lvl="0" indent="0" algn="l" rtl="0">
+              <a:spcBef>
+                <a:spcPts val="1200"/>
+              </a:spcBef>
+              <a:spcAft>
+                <a:spcPts val="1200"/>
+              </a:spcAft>
+              <a:buNone/>
+            </a:pPr>
+            <a:endParaRPr dirty="0"/>
+          </a:p>
+        </p:txBody>
+      </p:sp>
+    </p:spTree>
+  </p:cSld>
+  <p:clrMapOvr>
+    <a:masterClrMapping/>
+  </p:clrMapOvr>
+</p:sld>
+</file>
+
+<file path=ppt/slides/slide7.xml><?xml version="1.0" encoding="utf-8"?>
+<p:sld xmlns:a="http://schemas.openxmlformats.org/drawingml/2006/main" xmlns:r="http://schemas.openxmlformats.org/officeDocument/2006/relationships" xmlns:p="http://schemas.openxmlformats.org/presentationml/2006/main">
+  <p:cSld>
+    <p:spTree>
+      <p:nvGrpSpPr>
+        <p:cNvPr id="1" name="Shape 64"/>
+        <p:cNvGrpSpPr/>
+        <p:nvPr/>
+      </p:nvGrpSpPr>
+      <p:grpSpPr>
+        <a:xfrm>
+          <a:off x="0" y="0"/>
+          <a:ext cx="0" cy="0"/>
+          <a:chOff x="0" y="0"/>
+          <a:chExt cx="0" cy="0"/>
+        </a:xfrm>
+      </p:grpSpPr>
+      <p:sp>
+        <p:nvSpPr>
+          <p:cNvPr id="65" name="Google Shape;65;p15"/>
+          <p:cNvSpPr txBox="1">
+            <a:spLocks noGrp="1"/>
+          </p:cNvSpPr>
+          <p:nvPr>
+            <p:ph type="body" idx="1"/>
+          </p:nvPr>
+        </p:nvSpPr>
+        <p:spPr>
+          <a:xfrm>
+            <a:off x="311700" y="213675"/>
+            <a:ext cx="8520600" cy="4742700"/>
+          </a:xfrm>
+          <a:prstGeom prst="rect">
+            <a:avLst/>
+          </a:prstGeom>
+        </p:spPr>
+        <p:txBody>
+          <a:bodyPr spcFirstLastPara="1" wrap="square" lIns="91425" tIns="91425" rIns="91425" bIns="91425" anchor="t" anchorCtr="0">
+            <a:normAutofit fontScale="62500" lnSpcReduction="20000"/>
+          </a:bodyPr>
+          <a:lstStyle/>
+          <a:p>
+            <a:pPr marL="0" lvl="0" indent="0" algn="l" rtl="0">
+              <a:spcBef>
+                <a:spcPts val="0"/>
+              </a:spcBef>
+              <a:spcAft>
+                <a:spcPts val="0"/>
+              </a:spcAft>
+              <a:buNone/>
+            </a:pPr>
+            <a:r>
+              <a:rPr lang="en" sz="2500" b="1" u="sng"/>
+              <a:t>Problem 3</a:t>
+            </a:r>
+            <a:endParaRPr sz="2500" b="1" u="sng"/>
+          </a:p>
+          <a:p>
+            <a:pPr marL="0" lvl="0" indent="0" algn="l" rtl="0">
+              <a:spcBef>
+                <a:spcPts val="1200"/>
+              </a:spcBef>
+              <a:spcAft>
+                <a:spcPts val="0"/>
+              </a:spcAft>
+              <a:buNone/>
+            </a:pPr>
+            <a:r>
+              <a:rPr lang="en" sz="2500"/>
+              <a:t>Create a guessing game.  Randomly assign a number from 1 to 100 (using the random module).  Ask the user to guess the number.  If the user guesses higher, display “Too high”.  If the user guesses lower, display “Too low”.  Congratulate the user when they guess the correct number.  Continually ask the user until they get the number correct.</a:t>
+            </a:r>
+            <a:endParaRPr sz="2500"/>
+          </a:p>
+          <a:p>
+            <a:pPr marL="0" lvl="0" indent="0" algn="l" rtl="0">
+              <a:spcBef>
+                <a:spcPts val="1200"/>
+              </a:spcBef>
+              <a:spcAft>
+                <a:spcPts val="0"/>
+              </a:spcAft>
+              <a:buNone/>
+            </a:pPr>
+            <a:r>
+              <a:rPr lang="en" sz="2500" b="1"/>
+              <a:t>Bonus:  </a:t>
+            </a:r>
+            <a:r>
+              <a:rPr lang="en" sz="2500"/>
+              <a:t>Display to the user how many times they guessed.</a:t>
+            </a:r>
+            <a:endParaRPr sz="2500"/>
+          </a:p>
+          <a:p>
+            <a:pPr marL="0" lvl="0" indent="0" algn="l" rtl="0">
+              <a:spcBef>
+                <a:spcPts val="1200"/>
+              </a:spcBef>
+              <a:spcAft>
+                <a:spcPts val="0"/>
+              </a:spcAft>
+              <a:buNone/>
+            </a:pPr>
+            <a:endParaRPr sz="2500"/>
+          </a:p>
+          <a:p>
+            <a:pPr marL="0" lvl="0" indent="0" algn="l" rtl="0">
+              <a:spcBef>
+                <a:spcPts val="1200"/>
+              </a:spcBef>
+              <a:spcAft>
+                <a:spcPts val="0"/>
+              </a:spcAft>
+              <a:buNone/>
+            </a:pPr>
+            <a:r>
+              <a:rPr lang="en" sz="2500" b="1" u="sng"/>
+              <a:t>Problem 4</a:t>
+            </a:r>
+            <a:r>
+              <a:rPr lang="en" sz="2500"/>
+              <a:t>:</a:t>
+            </a:r>
+            <a:endParaRPr sz="2500"/>
+          </a:p>
+          <a:p>
+            <a:pPr marL="0" lvl="0" indent="0" algn="l" rtl="0">
+              <a:spcBef>
+                <a:spcPts val="1200"/>
+              </a:spcBef>
+              <a:spcAft>
+                <a:spcPts val="0"/>
+              </a:spcAft>
+              <a:buNone/>
+            </a:pPr>
+            <a:r>
+              <a:rPr lang="en" sz="2500"/>
+              <a:t>Write a program to help you track your student’s grades.  Ask the user how many students are in the class.  For each student, ask their name and their grade.  Display the class average.  Display the highest grade in the class. Display the lowest grade in the class.</a:t>
+            </a:r>
+            <a:endParaRPr sz="2500"/>
+          </a:p>
+          <a:p>
+            <a:pPr marL="0" lvl="0" indent="0" algn="l" rtl="0">
+              <a:spcBef>
+                <a:spcPts val="1200"/>
+              </a:spcBef>
+              <a:spcAft>
+                <a:spcPts val="0"/>
+              </a:spcAft>
+              <a:buNone/>
+            </a:pPr>
+            <a:br>
+              <a:rPr lang="en" sz="2500"/>
+            </a:br>
+            <a:r>
+              <a:rPr lang="en" sz="2500" b="1"/>
+              <a:t>Bonus:  </a:t>
+            </a:r>
+            <a:r>
+              <a:rPr lang="en" sz="2500"/>
+              <a:t>Display who got the highest grade in the class.</a:t>
+            </a:r>
+            <a:endParaRPr sz="2500"/>
+          </a:p>
+          <a:p>
+            <a:pPr marL="0" lvl="0" indent="0" algn="l" rtl="0">
+              <a:spcBef>
+                <a:spcPts val="1200"/>
+              </a:spcBef>
+              <a:spcAft>
+                <a:spcPts val="0"/>
+              </a:spcAft>
+              <a:buNone/>
+            </a:pPr>
+            <a:endParaRPr/>
+          </a:p>
+          <a:p>
+            <a:pPr marL="0" lvl="0" indent="0" algn="l" rtl="0">
+              <a:spcBef>
+                <a:spcPts val="1200"/>
+              </a:spcBef>
+              <a:spcAft>
+                <a:spcPts val="1200"/>
+              </a:spcAft>
+              <a:buNone/>
+            </a:pPr>
+            <a:endParaRPr/>
+          </a:p>
+        </p:txBody>
+      </p:sp>
+    </p:spTree>
+  </p:cSld>
+  <p:clrMapOvr>
+    <a:masterClrMapping/>
+  </p:clrMapOvr>
+</p:sld>
+</file>
+
+<file path=ppt/slides/slide8.xml><?xml version="1.0" encoding="utf-8"?>
+<p:sld xmlns:a="http://schemas.openxmlformats.org/drawingml/2006/main" xmlns:r="http://schemas.openxmlformats.org/officeDocument/2006/relationships" xmlns:p="http://schemas.openxmlformats.org/presentationml/2006/main">
+  <p:cSld>
+    <p:spTree>
+      <p:nvGrpSpPr>
+        <p:cNvPr id="1" name="">
+          <a:extLst>
+            <a:ext uri="{FF2B5EF4-FFF2-40B4-BE49-F238E27FC236}">
+              <a16:creationId xmlns:a16="http://schemas.microsoft.com/office/drawing/2014/main" id="{26BCF93E-5639-82B9-F48F-8AEF8C9A5F96}"/>
+            </a:ext>
+          </a:extLst>
+        </p:cNvPr>
+        <p:cNvGrpSpPr/>
+        <p:nvPr/>
+      </p:nvGrpSpPr>
+      <p:grpSpPr>
+        <a:xfrm>
+          <a:off x="0" y="0"/>
+          <a:ext cx="0" cy="0"/>
+          <a:chOff x="0" y="0"/>
+          <a:chExt cx="0" cy="0"/>
+        </a:xfrm>
+      </p:grpSpPr>
+      <p:sp>
+        <p:nvSpPr>
+          <p:cNvPr id="2" name="Title 1">
+            <a:extLst>
+              <a:ext uri="{FF2B5EF4-FFF2-40B4-BE49-F238E27FC236}">
+                <a16:creationId xmlns:a16="http://schemas.microsoft.com/office/drawing/2014/main" id="{9BB7CDC2-0AFB-55FB-DF29-1C300D0E861F}"/>
+              </a:ext>
+            </a:extLst>
+          </p:cNvPr>
+          <p:cNvSpPr>
+            <a:spLocks noGrp="1"/>
+          </p:cNvSpPr>
+          <p:nvPr>
+            <p:ph type="title"/>
+          </p:nvPr>
+        </p:nvSpPr>
+        <p:spPr>
+          <a:xfrm>
+            <a:off x="3791414" y="2279146"/>
+            <a:ext cx="1438879" cy="585207"/>
+          </a:xfrm>
+        </p:spPr>
+        <p:txBody>
+          <a:bodyPr/>
+          <a:lstStyle/>
+          <a:p>
+            <a:r>
+              <a:rPr lang="en-US" dirty="0"/>
+              <a:t>Modules</a:t>
+            </a:r>
+          </a:p>
+        </p:txBody>
+      </p:sp>
+    </p:spTree>
+    <p:extLst>
+      <p:ext uri="{BB962C8B-B14F-4D97-AF65-F5344CB8AC3E}">
+        <p14:creationId xmlns:p14="http://schemas.microsoft.com/office/powerpoint/2010/main" val="299971120"/>
+      </p:ext>
+    </p:extLst>
+  </p:cSld>
+  <p:clrMapOvr>
+    <a:masterClrMapping/>
+  </p:clrMapOvr>
+</p:sld>
+</file>
+
+<file path=ppt/slides/slide9.xml><?xml version="1.0" encoding="utf-8"?>
+<p:sld xmlns:a="http://schemas.openxmlformats.org/drawingml/2006/main" xmlns:r="http://schemas.openxmlformats.org/officeDocument/2006/relationships" xmlns:p="http://schemas.openxmlformats.org/presentationml/2006/main">
+  <p:cSld>
+    <p:spTree>
+      <p:nvGrpSpPr>
+        <p:cNvPr id="1" name=""/>
+        <p:cNvGrpSpPr/>
+        <p:nvPr/>
+      </p:nvGrpSpPr>
+      <p:grpSpPr>
+        <a:xfrm>
+          <a:off x="0" y="0"/>
+          <a:ext cx="0" cy="0"/>
+          <a:chOff x="0" y="0"/>
+          <a:chExt cx="0" cy="0"/>
+        </a:xfrm>
+      </p:grpSpPr>
+      <p:sp>
+        <p:nvSpPr>
+          <p:cNvPr id="4" name="Slide Number Placeholder 3">
+            <a:extLst>
+              <a:ext uri="{FF2B5EF4-FFF2-40B4-BE49-F238E27FC236}">
+                <a16:creationId xmlns:a16="http://schemas.microsoft.com/office/drawing/2014/main" id="{D0F0E6DB-EE9E-45C5-B784-49ED7052A2EB}"/>
+              </a:ext>
+            </a:extLst>
+          </p:cNvPr>
+          <p:cNvSpPr>
+            <a:spLocks noGrp="1"/>
+          </p:cNvSpPr>
+          <p:nvPr>
+            <p:ph type="sldNum" sz="quarter" idx="4"/>
+          </p:nvPr>
+        </p:nvSpPr>
+        <p:spPr/>
+        <p:txBody>
+          <a:bodyPr/>
+          <a:lstStyle/>
+          <a:p>
+            <a:fld id="{71B8893A-F325-44A6-8EFB-883C20332CFE}" type="slidenum">
+              <a:rPr lang="en-US" smtClean="0"/>
+              <a:pPr/>
+              <a:t>9</a:t>
+            </a:fld>
+            <a:endParaRPr lang="en-US"/>
+          </a:p>
+        </p:txBody>
+      </p:sp>
+      <p:sp>
+        <p:nvSpPr>
+          <p:cNvPr id="3" name="Title 2">
+            <a:extLst>
+              <a:ext uri="{FF2B5EF4-FFF2-40B4-BE49-F238E27FC236}">
+                <a16:creationId xmlns:a16="http://schemas.microsoft.com/office/drawing/2014/main" id="{DA67ABD9-8A31-4CB9-94E1-A0DA84E71640}"/>
+              </a:ext>
+            </a:extLst>
+          </p:cNvPr>
+          <p:cNvSpPr>
+            <a:spLocks noGrp="1"/>
+          </p:cNvSpPr>
+          <p:nvPr>
+            <p:ph type="title"/>
+          </p:nvPr>
+        </p:nvSpPr>
+        <p:spPr>
+          <a:xfrm>
+            <a:off x="381000" y="1857375"/>
+            <a:ext cx="8382000" cy="857250"/>
+          </a:xfrm>
+        </p:spPr>
+        <p:txBody>
+          <a:bodyPr/>
+          <a:lstStyle/>
+          <a:p>
+            <a:r>
+              <a:rPr lang="en-US" dirty="0"/>
+              <a:t>What are some built-in Python functions that we have learned about?</a:t>
+            </a:r>
+          </a:p>
+        </p:txBody>
+      </p:sp>
+    </p:spTree>
+    <p:extLst>
+      <p:ext uri="{BB962C8B-B14F-4D97-AF65-F5344CB8AC3E}">
+        <p14:creationId xmlns:p14="http://schemas.microsoft.com/office/powerpoint/2010/main" val="1359797099"/>
+      </p:ext>
+    </p:extLst>
+  </p:cSld>
+  <p:clrMapOvr>
+    <a:masterClrMapping/>
+  </p:clrMapOvr>
+</p:sld>
+</file>
+
 <file path=ppt/theme/theme1.xml><?xml version="1.0" encoding="utf-8"?>
 <a:theme xmlns:a="http://schemas.openxmlformats.org/drawingml/2006/main" name="US Army 2023 AFC DEVCOM Logo">
   <a:themeElements>

--- a/Python/Lesson 03 - Functions/Lesson 03 - Functions.pptx
+++ b/Python/Lesson 03 - Functions/Lesson 03 - Functions.pptx
@@ -3880,7 +3880,7 @@
               </a:spcAft>
               <a:buNone/>
             </a:pPr>
-            <a:endParaRPr/>
+            <a:endParaRPr dirty="0"/>
           </a:p>
         </p:txBody>
       </p:sp>
@@ -50969,15 +50969,15 @@
           <a:lstStyle/>
           <a:p>
             <a:r>
-              <a:rPr lang="en-US" dirty="0"/>
+              <a:rPr lang="en-US" sz="2400" dirty="0"/>
               <a:t>Write a python function that calculates and </a:t>
             </a:r>
             <a:r>
-              <a:rPr lang="en-US" b="1" dirty="0"/>
+              <a:rPr lang="en-US" sz="2400" b="1" dirty="0"/>
               <a:t>returns </a:t>
             </a:r>
             <a:r>
-              <a:rPr lang="en-US" dirty="0"/>
+              <a:rPr lang="en-US" sz="2400" dirty="0"/>
               <a:t>the area of a rectangle using two integer inputs from the user! Outside of the function call, print the area.</a:t>
             </a:r>
           </a:p>
@@ -51009,6 +51009,9 @@
           <a:bodyPr/>
           <a:lstStyle/>
           <a:p>
+            <a:br>
+              <a:rPr lang="en-US" dirty="0"/>
+            </a:br>
             <a:r>
               <a:rPr lang="en-US" dirty="0"/>
               <a:t>In Class Exercise #1</a:t>
@@ -51098,36 +51101,36 @@
           <a:lstStyle/>
           <a:p>
             <a:r>
-              <a:rPr lang="en-US" dirty="0"/>
+              <a:rPr lang="en-US" sz="2000" dirty="0"/>
               <a:t>Write a function called tip() that has two parameters named total and percentage.</a:t>
             </a:r>
           </a:p>
           <a:p>
-            <a:endParaRPr lang="en-US" dirty="0"/>
+            <a:endParaRPr lang="en-US" sz="2000" dirty="0"/>
           </a:p>
           <a:p>
             <a:r>
-              <a:rPr lang="en-US" dirty="0"/>
+              <a:rPr lang="en-US" sz="2000" dirty="0"/>
               <a:t>This function should </a:t>
             </a:r>
             <a:r>
-              <a:rPr lang="en-US" b="1" dirty="0"/>
+              <a:rPr lang="en-US" sz="2000" b="1" dirty="0"/>
               <a:t>return</a:t>
             </a:r>
             <a:r>
-              <a:rPr lang="en-US" dirty="0"/>
+              <a:rPr lang="en-US" sz="2000" dirty="0"/>
               <a:t> the amount you should tip given a total and the percentage you want to tip.  Print the amount returned outside of the function call.</a:t>
             </a:r>
           </a:p>
           <a:p>
-            <a:endParaRPr lang="en-US" dirty="0"/>
+            <a:endParaRPr lang="en-US" sz="2000" dirty="0"/>
           </a:p>
           <a:p>
             <a:pPr marL="0" indent="0">
               <a:buNone/>
             </a:pPr>
             <a:r>
-              <a:rPr lang="en-US" dirty="0"/>
+              <a:rPr lang="en-US" sz="2000" dirty="0"/>
               <a:t>       tip(10, 25) = 2.5</a:t>
             </a:r>
           </a:p>
@@ -51314,24 +51317,24 @@
           <a:lstStyle/>
           <a:p>
             <a:r>
-              <a:rPr lang="en-US" dirty="0"/>
+              <a:rPr lang="en-US" sz="2000" dirty="0"/>
               <a:t>Write a function that is called “</a:t>
             </a:r>
             <a:r>
-              <a:rPr lang="en-US" dirty="0" err="1"/>
-              <a:t>has_more_letters</a:t>
+              <a:rPr lang="en-US" sz="2000" dirty="0" err="1"/>
+              <a:t>has_more_characters</a:t>
             </a:r>
             <a:r>
-              <a:rPr lang="en-US" dirty="0"/>
+              <a:rPr lang="en-US" sz="2000" dirty="0"/>
               <a:t>”.  This function should accept two strings as arguments, and will </a:t>
             </a:r>
             <a:r>
-              <a:rPr lang="en-US" b="1" u="sng" dirty="0"/>
+              <a:rPr lang="en-US" sz="2000" b="1" u="sng" dirty="0"/>
               <a:t>return</a:t>
             </a:r>
             <a:r>
-              <a:rPr lang="en-US" dirty="0"/>
-              <a:t> the string that has more letters.  Outside of the function call, print the string with more letters.</a:t>
+              <a:rPr lang="en-US" sz="2000" dirty="0"/>
+              <a:t> the string that has more characters.  Outside of the function call, print the string with more characters.</a:t>
             </a:r>
           </a:p>
         </p:txBody>
